--- a/docs/tema2/diapositivas/vpc-diseno.pptx
+++ b/docs/tema2/diapositivas/vpc-diseno.pptx
@@ -5,7 +5,7 @@
     <p:sldMasterId id="2147483648" r:id="rId1"/>
   </p:sldMasterIdLst>
   <p:notesMasterIdLst>
-    <p:notesMasterId r:id="rId15"/>
+    <p:notesMasterId r:id="rId13"/>
   </p:notesMasterIdLst>
   <p:sldIdLst>
     <p:sldId id="256" r:id="rId2"/>
@@ -19,8 +19,6 @@
     <p:sldId id="264" r:id="rId10"/>
     <p:sldId id="265" r:id="rId11"/>
     <p:sldId id="266" r:id="rId12"/>
-    <p:sldId id="267" r:id="rId13"/>
-    <p:sldId id="268" r:id="rId14"/>
   </p:sldIdLst>
   <p:sldSz cx="12192000" cy="6858000"/>
   <p:notesSz cx="6858000" cy="12192000"/>
@@ -149,7 +147,7 @@
     </p:spTree>
     <p:extLst>
       <p:ext uri="{BB962C8B-B14F-4D97-AF65-F5344CB8AC3E}">
-        <p14:creationId xmlns:p14="http://schemas.microsoft.com/office/powerpoint/2010/main" val="2763560881"/>
+        <p14:creationId xmlns:p14="http://schemas.microsoft.com/office/powerpoint/2010/main" val="683529030"/>
       </p:ext>
     </p:extLst>
   </p:cSld>
@@ -483,174 +481,6 @@
             <a:fld id="{F7021451-1387-4CA6-816F-3879F97B5CBC}" type="slidenum">
               <a:rPr lang="en-US"/>
               <a:t>11</a:t>
-            </a:fld>
-            <a:endParaRPr lang="en-US"/>
-          </a:p>
-        </p:txBody>
-      </p:sp>
-    </p:spTree>
-    <p:extLst>
-      <p:ext uri="{BB962C8B-B14F-4D97-AF65-F5344CB8AC3E}">
-        <p14:creationId xmlns:p14="http://schemas.microsoft.com/office/powerpoint/2010/main" val="1024086991"/>
-      </p:ext>
-    </p:extLst>
-  </p:cSld>
-  <p:clrMapOvr>
-    <a:masterClrMapping/>
-  </p:clrMapOvr>
-</p:notes>
-</file>
-
-<file path=ppt/notesSlides/notesSlide12.xml><?xml version="1.0" encoding="utf-8"?>
-<p:notes xmlns:a="http://schemas.openxmlformats.org/drawingml/2006/main" xmlns:r="http://schemas.openxmlformats.org/officeDocument/2006/relationships" xmlns:p="http://schemas.openxmlformats.org/presentationml/2006/main">
-  <p:cSld>
-    <p:spTree>
-      <p:nvGrpSpPr>
-        <p:cNvPr id="1" name=""/>
-        <p:cNvGrpSpPr/>
-        <p:nvPr/>
-      </p:nvGrpSpPr>
-      <p:grpSpPr>
-        <a:xfrm>
-          <a:off x="0" y="0"/>
-          <a:ext cx="0" cy="0"/>
-          <a:chOff x="0" y="0"/>
-          <a:chExt cx="0" cy="0"/>
-        </a:xfrm>
-      </p:grpSpPr>
-      <p:sp>
-        <p:nvSpPr>
-          <p:cNvPr id="2" name="Slide Image Placeholder 1"/>
-          <p:cNvSpPr>
-            <a:spLocks noGrp="1" noRot="1" noChangeAspect="1"/>
-          </p:cNvSpPr>
-          <p:nvPr>
-            <p:ph type="sldImg"/>
-          </p:nvPr>
-        </p:nvSpPr>
-        <p:spPr/>
-      </p:sp>
-      <p:sp>
-        <p:nvSpPr>
-          <p:cNvPr id="3" name="Notes Placeholder 2"/>
-          <p:cNvSpPr>
-            <a:spLocks noGrp="1"/>
-          </p:cNvSpPr>
-          <p:nvPr>
-            <p:ph type="body" idx="1"/>
-          </p:nvPr>
-        </p:nvSpPr>
-        <p:spPr/>
-        <p:txBody>
-          <a:bodyPr/>
-          <a:lstStyle/>
-          <a:p>
-            <a:endParaRPr lang="en-US" dirty="0"/>
-          </a:p>
-        </p:txBody>
-      </p:sp>
-      <p:sp>
-        <p:nvSpPr>
-          <p:cNvPr id="4" name="Slide Number Placeholder 3"/>
-          <p:cNvSpPr>
-            <a:spLocks noGrp="1"/>
-          </p:cNvSpPr>
-          <p:nvPr>
-            <p:ph type="sldNum" sz="quarter" idx="10"/>
-          </p:nvPr>
-        </p:nvSpPr>
-        <p:spPr/>
-        <p:txBody>
-          <a:bodyPr/>
-          <a:lstStyle/>
-          <a:p>
-            <a:fld id="{F7021451-1387-4CA6-816F-3879F97B5CBC}" type="slidenum">
-              <a:rPr lang="en-US"/>
-              <a:t>12</a:t>
-            </a:fld>
-            <a:endParaRPr lang="en-US"/>
-          </a:p>
-        </p:txBody>
-      </p:sp>
-    </p:spTree>
-    <p:extLst>
-      <p:ext uri="{BB962C8B-B14F-4D97-AF65-F5344CB8AC3E}">
-        <p14:creationId xmlns:p14="http://schemas.microsoft.com/office/powerpoint/2010/main" val="1024086991"/>
-      </p:ext>
-    </p:extLst>
-  </p:cSld>
-  <p:clrMapOvr>
-    <a:masterClrMapping/>
-  </p:clrMapOvr>
-</p:notes>
-</file>
-
-<file path=ppt/notesSlides/notesSlide13.xml><?xml version="1.0" encoding="utf-8"?>
-<p:notes xmlns:a="http://schemas.openxmlformats.org/drawingml/2006/main" xmlns:r="http://schemas.openxmlformats.org/officeDocument/2006/relationships" xmlns:p="http://schemas.openxmlformats.org/presentationml/2006/main">
-  <p:cSld>
-    <p:spTree>
-      <p:nvGrpSpPr>
-        <p:cNvPr id="1" name=""/>
-        <p:cNvGrpSpPr/>
-        <p:nvPr/>
-      </p:nvGrpSpPr>
-      <p:grpSpPr>
-        <a:xfrm>
-          <a:off x="0" y="0"/>
-          <a:ext cx="0" cy="0"/>
-          <a:chOff x="0" y="0"/>
-          <a:chExt cx="0" cy="0"/>
-        </a:xfrm>
-      </p:grpSpPr>
-      <p:sp>
-        <p:nvSpPr>
-          <p:cNvPr id="2" name="Slide Image Placeholder 1"/>
-          <p:cNvSpPr>
-            <a:spLocks noGrp="1" noRot="1" noChangeAspect="1"/>
-          </p:cNvSpPr>
-          <p:nvPr>
-            <p:ph type="sldImg"/>
-          </p:nvPr>
-        </p:nvSpPr>
-        <p:spPr/>
-      </p:sp>
-      <p:sp>
-        <p:nvSpPr>
-          <p:cNvPr id="3" name="Notes Placeholder 2"/>
-          <p:cNvSpPr>
-            <a:spLocks noGrp="1"/>
-          </p:cNvSpPr>
-          <p:nvPr>
-            <p:ph type="body" idx="1"/>
-          </p:nvPr>
-        </p:nvSpPr>
-        <p:spPr/>
-        <p:txBody>
-          <a:bodyPr/>
-          <a:lstStyle/>
-          <a:p>
-            <a:endParaRPr lang="en-US" dirty="0"/>
-          </a:p>
-        </p:txBody>
-      </p:sp>
-      <p:sp>
-        <p:nvSpPr>
-          <p:cNvPr id="4" name="Slide Number Placeholder 3"/>
-          <p:cNvSpPr>
-            <a:spLocks noGrp="1"/>
-          </p:cNvSpPr>
-          <p:nvPr>
-            <p:ph type="sldNum" sz="quarter" idx="10"/>
-          </p:nvPr>
-        </p:nvSpPr>
-        <p:spPr/>
-        <p:txBody>
-          <a:bodyPr/>
-          <a:lstStyle/>
-          <a:p>
-            <a:fld id="{F7021451-1387-4CA6-816F-3879F97B5CBC}" type="slidenum">
-              <a:rPr lang="en-US"/>
-              <a:t>13</a:t>
             </a:fld>
             <a:endParaRPr lang="en-US"/>
           </a:p>
@@ -1742,7 +1572,7 @@
               <a:buNone/>
             </a:pPr>
             <a:r>
-              <a:rPr lang="en-US" sz="3800" b="1" dirty="0">
+              <a:rPr lang="en-US" sz="4000" b="1" dirty="0">
                 <a:solidFill>
                   <a:srgbClr val="FFFFFF"/>
                 </a:solidFill>
@@ -1752,7 +1582,7 @@
               </a:rPr>
               <a:t>Diseño de la red virtual</a:t>
             </a:r>
-            <a:endParaRPr lang="en-US" sz="3800" dirty="0"/>
+            <a:endParaRPr lang="en-US" sz="4000" dirty="0"/>
           </a:p>
         </p:txBody>
       </p:sp>
@@ -1813,7 +1643,7 @@
               <a:buNone/>
             </a:pPr>
             <a:r>
-              <a:rPr lang="en-US" sz="1900" i="1" dirty="0">
+              <a:rPr lang="en-US" sz="2000" i="1" dirty="0">
                 <a:solidFill>
                   <a:srgbClr val="FFFFFF"/>
                 </a:solidFill>
@@ -1823,7 +1653,7 @@
               </a:rPr>
               <a:t>Tema 2 — Redes virtuales y servicios de cómputo</a:t>
             </a:r>
-            <a:endParaRPr lang="en-US" sz="1900" dirty="0"/>
+            <a:endParaRPr lang="en-US" sz="2000" dirty="0"/>
           </a:p>
         </p:txBody>
       </p:sp>
@@ -1917,7 +1747,7 @@
                 <a:ea typeface="Arial" pitchFamily="34" charset="-122"/>
                 <a:cs typeface="Arial" pitchFamily="34" charset="-120"/>
               </a:rPr>
-              <a:t>El error más común de la sesión de hoy</a:t>
+              <a:t>Diagramar antes de construir</a:t>
             </a:r>
             <a:endParaRPr lang="en-US" sz="2400" dirty="0"/>
           </a:p>
@@ -1970,8 +1800,8 @@
         </p:nvSpPr>
         <p:spPr>
           <a:xfrm>
-            <a:off x="548640" y="2103120"/>
-            <a:ext cx="11091672" cy="3108960"/>
+            <a:off x="548640" y="1188720"/>
+            <a:ext cx="11091672" cy="1755648"/>
           </a:xfrm>
           <a:prstGeom prst="roundRect">
             <a:avLst/>
@@ -2002,8 +1832,8 @@
         </p:nvSpPr>
         <p:spPr>
           <a:xfrm>
-            <a:off x="822960" y="2212848"/>
-            <a:ext cx="10543032" cy="2889504"/>
+            <a:off x="822960" y="1298448"/>
+            <a:ext cx="10543032" cy="1335024"/>
           </a:xfrm>
           <a:prstGeom prst="rect">
             <a:avLst/>
@@ -2019,7 +1849,7 @@
               <a:buNone/>
             </a:pPr>
             <a:r>
-              <a:rPr lang="en-US" sz="2300" b="1" dirty="0">
+              <a:rPr lang="en-US" sz="2000" b="1" dirty="0">
                 <a:solidFill>
                   <a:srgbClr val="1A237E"/>
                 </a:solidFill>
@@ -2027,17 +1857,17 @@
                 <a:ea typeface="Arial" pitchFamily="34" charset="-122"/>
                 <a:cs typeface="Arial" pitchFamily="34" charset="-120"/>
               </a:rPr>
-              <a:t>⚠️ No es pública «porque tú la llamaste así»
+              <a:t>Antes de crear una sola subred en consola, dibuja el reparto en papel
 </a:t>
             </a:r>
-            <a:endParaRPr lang="en-US" sz="2300" dirty="0"/>
+            <a:endParaRPr lang="en-US" sz="2000" dirty="0"/>
           </a:p>
           <a:p>
             <a:pPr marL="0" indent="0">
               <a:buNone/>
             </a:pPr>
             <a:r>
-              <a:rPr lang="en-US" sz="2200" dirty="0">
+              <a:rPr lang="en-US" sz="1900" dirty="0">
                 <a:solidFill>
                   <a:srgbClr val="212121"/>
                 </a:solidFill>
@@ -2045,9 +1875,980 @@
                 <a:ea typeface="Arial" pitchFamily="34" charset="-122"/>
                 <a:cs typeface="Arial" pitchFamily="34" charset="-120"/>
               </a:rPr>
-              <a:t>Es habitual crear una instancia, asignarle una IP pública y esperar que funcione, y que no responda porque la subred donde vive sigue apuntando a ninguna parte. Una subred es pública porque su tabla de rutas apunta a la pasarela — vas a diagnosticar justo este fallo en la Actividad 2.2 de la próxima sesión.</a:t>
+              <a:t>Cuántas subredes, en qué zonas, qué rango CIDR, cuáles públicas y cuáles privadas. Es la única forma de detectar un solapamiento o una subred olvidada antes de que cueste deshacerlo.</a:t>
             </a:r>
-            <a:endParaRPr lang="en-US" sz="2300" dirty="0"/>
+            <a:endParaRPr lang="en-US" sz="2000" dirty="0"/>
+          </a:p>
+        </p:txBody>
+      </p:sp>
+      <p:sp>
+        <p:nvSpPr>
+          <p:cNvPr id="7" name="Text 5"/>
+          <p:cNvSpPr/>
+          <p:nvPr/>
+        </p:nvSpPr>
+        <p:spPr>
+          <a:xfrm>
+            <a:off x="548640" y="3108960"/>
+            <a:ext cx="11091672" cy="365760"/>
+          </a:xfrm>
+          <a:prstGeom prst="rect">
+            <a:avLst/>
+          </a:prstGeom>
+          <a:noFill/>
+          <a:ln/>
+        </p:spPr>
+        <p:txBody>
+          <a:bodyPr wrap="square" rtlCol="0" anchor="ctr"/>
+          <a:lstStyle/>
+          <a:p>
+            <a:pPr marL="0" indent="0">
+              <a:buNone/>
+            </a:pPr>
+            <a:r>
+              <a:rPr lang="en-US" sz="1500" b="1" dirty="0">
+                <a:solidFill>
+                  <a:srgbClr val="3949AB"/>
+                </a:solidFill>
+                <a:latin typeface="Arial" pitchFamily="34" charset="0"/>
+                <a:ea typeface="Arial" pitchFamily="34" charset="-122"/>
+                <a:cs typeface="Arial" pitchFamily="34" charset="-120"/>
+              </a:rPr>
+              <a:t>La plantilla que rellenarás en la actividad</a:t>
+            </a:r>
+            <a:endParaRPr lang="en-US" sz="1500" dirty="0"/>
+          </a:p>
+        </p:txBody>
+      </p:sp>
+      <p:graphicFrame>
+        <p:nvGraphicFramePr>
+          <p:cNvPr id="11" name="Table 0"/>
+          <p:cNvGraphicFramePr>
+            <a:graphicFrameLocks noGrp="1"/>
+          </p:cNvGraphicFramePr>
+          <p:nvPr>
+            <p:extLst>
+              <p:ext uri="{D42A27DB-BD31-4B8C-83A1-F6EECF244321}">
+                <p14:modId xmlns:p14="http://schemas.microsoft.com/office/powerpoint/2010/main" val="1579011935"/>
+              </p:ext>
+            </p:extLst>
+          </p:nvPr>
+        </p:nvGraphicFramePr>
+        <p:xfrm>
+          <a:off x="548640" y="3520440"/>
+          <a:ext cx="11091672" cy="1645920"/>
+        </p:xfrm>
+        <a:graphic>
+          <a:graphicData uri="http://schemas.openxmlformats.org/drawingml/2006/table">
+            <a:tbl>
+              <a:tblPr/>
+              <a:tblGrid>
+                <a:gridCol w="3105668">
+                  <a:extLst>
+                    <a:ext uri="{9D8B030D-6E8A-4147-A177-3AD203B41FA5}">
+                      <a16:colId xmlns:a16="http://schemas.microsoft.com/office/drawing/2014/main" val="20000"/>
+                    </a:ext>
+                  </a:extLst>
+                </a:gridCol>
+                <a:gridCol w="2662001">
+                  <a:extLst>
+                    <a:ext uri="{9D8B030D-6E8A-4147-A177-3AD203B41FA5}">
+                      <a16:colId xmlns:a16="http://schemas.microsoft.com/office/drawing/2014/main" val="20001"/>
+                    </a:ext>
+                  </a:extLst>
+                </a:gridCol>
+                <a:gridCol w="2883835">
+                  <a:extLst>
+                    <a:ext uri="{9D8B030D-6E8A-4147-A177-3AD203B41FA5}">
+                      <a16:colId xmlns:a16="http://schemas.microsoft.com/office/drawing/2014/main" val="20002"/>
+                    </a:ext>
+                  </a:extLst>
+                </a:gridCol>
+                <a:gridCol w="2440168">
+                  <a:extLst>
+                    <a:ext uri="{9D8B030D-6E8A-4147-A177-3AD203B41FA5}">
+                      <a16:colId xmlns:a16="http://schemas.microsoft.com/office/drawing/2014/main" val="20003"/>
+                    </a:ext>
+                  </a:extLst>
+                </a:gridCol>
+              </a:tblGrid>
+              <a:tr h="548640">
+                <a:tc>
+                  <a:txBody>
+                    <a:bodyPr/>
+                    <a:lstStyle/>
+                    <a:p>
+                      <a:pPr marL="0" indent="0" algn="ctr">
+                        <a:buNone/>
+                      </a:pPr>
+                      <a:r>
+                        <a:rPr lang="en-US" sz="1600" b="1" dirty="0">
+                          <a:solidFill>
+                            <a:srgbClr val="FFFFFF"/>
+                          </a:solidFill>
+                          <a:latin typeface="Arial" pitchFamily="34" charset="0"/>
+                          <a:ea typeface="Arial" pitchFamily="34" charset="-122"/>
+                          <a:cs typeface="Arial" pitchFamily="34" charset="-120"/>
+                        </a:rPr>
+                        <a:t>Nombre de la subred</a:t>
+                      </a:r>
+                      <a:endParaRPr lang="en-US" sz="1600" dirty="0">
+                        <a:latin typeface="Arial" charset="0"/>
+                        <a:ea typeface="Arial" charset="0"/>
+                        <a:cs typeface="Arial" charset="0"/>
+                      </a:endParaRPr>
+                    </a:p>
+                  </a:txBody>
+                  <a:tcPr anchor="ctr">
+                    <a:lnL w="12700" cap="flat" cmpd="sng" algn="ctr">
+                      <a:solidFill>
+                        <a:srgbClr val="EEEEEE"/>
+                      </a:solidFill>
+                      <a:prstDash val="solid"/>
+                      <a:round/>
+                      <a:headEnd type="none" w="med" len="med"/>
+                      <a:tailEnd type="none" w="med" len="med"/>
+                    </a:lnL>
+                    <a:lnR w="12700" cap="flat" cmpd="sng" algn="ctr">
+                      <a:solidFill>
+                        <a:srgbClr val="EEEEEE"/>
+                      </a:solidFill>
+                      <a:prstDash val="solid"/>
+                      <a:round/>
+                      <a:headEnd type="none" w="med" len="med"/>
+                      <a:tailEnd type="none" w="med" len="med"/>
+                    </a:lnR>
+                    <a:lnT w="12700" cap="flat" cmpd="sng" algn="ctr">
+                      <a:solidFill>
+                        <a:srgbClr val="EEEEEE"/>
+                      </a:solidFill>
+                      <a:prstDash val="solid"/>
+                      <a:round/>
+                      <a:headEnd type="none" w="med" len="med"/>
+                      <a:tailEnd type="none" w="med" len="med"/>
+                    </a:lnT>
+                    <a:lnB w="12700" cap="flat" cmpd="sng" algn="ctr">
+                      <a:solidFill>
+                        <a:srgbClr val="EEEEEE"/>
+                      </a:solidFill>
+                      <a:prstDash val="solid"/>
+                      <a:round/>
+                      <a:headEnd type="none" w="med" len="med"/>
+                      <a:tailEnd type="none" w="med" len="med"/>
+                    </a:lnB>
+                    <a:solidFill>
+                      <a:srgbClr val="3949AB"/>
+                    </a:solidFill>
+                  </a:tcPr>
+                </a:tc>
+                <a:tc>
+                  <a:txBody>
+                    <a:bodyPr/>
+                    <a:lstStyle/>
+                    <a:p>
+                      <a:pPr marL="0" indent="0" algn="ctr">
+                        <a:buNone/>
+                      </a:pPr>
+                      <a:r>
+                        <a:rPr lang="en-US" sz="1600" b="1" dirty="0">
+                          <a:solidFill>
+                            <a:srgbClr val="FFFFFF"/>
+                          </a:solidFill>
+                          <a:latin typeface="Arial" pitchFamily="34" charset="0"/>
+                          <a:ea typeface="Arial" pitchFamily="34" charset="-122"/>
+                          <a:cs typeface="Arial" pitchFamily="34" charset="-120"/>
+                        </a:rPr>
+                        <a:t>Rango CIDR</a:t>
+                      </a:r>
+                      <a:endParaRPr lang="en-US" sz="1600" dirty="0">
+                        <a:latin typeface="Arial" charset="0"/>
+                        <a:ea typeface="Arial" charset="0"/>
+                        <a:cs typeface="Arial" charset="0"/>
+                      </a:endParaRPr>
+                    </a:p>
+                  </a:txBody>
+                  <a:tcPr anchor="ctr">
+                    <a:lnL w="12700" cap="flat" cmpd="sng" algn="ctr">
+                      <a:solidFill>
+                        <a:srgbClr val="EEEEEE"/>
+                      </a:solidFill>
+                      <a:prstDash val="solid"/>
+                      <a:round/>
+                      <a:headEnd type="none" w="med" len="med"/>
+                      <a:tailEnd type="none" w="med" len="med"/>
+                    </a:lnL>
+                    <a:lnR w="12700" cap="flat" cmpd="sng" algn="ctr">
+                      <a:solidFill>
+                        <a:srgbClr val="EEEEEE"/>
+                      </a:solidFill>
+                      <a:prstDash val="solid"/>
+                      <a:round/>
+                      <a:headEnd type="none" w="med" len="med"/>
+                      <a:tailEnd type="none" w="med" len="med"/>
+                    </a:lnR>
+                    <a:lnT w="12700" cap="flat" cmpd="sng" algn="ctr">
+                      <a:solidFill>
+                        <a:srgbClr val="EEEEEE"/>
+                      </a:solidFill>
+                      <a:prstDash val="solid"/>
+                      <a:round/>
+                      <a:headEnd type="none" w="med" len="med"/>
+                      <a:tailEnd type="none" w="med" len="med"/>
+                    </a:lnT>
+                    <a:lnB w="12700" cap="flat" cmpd="sng" algn="ctr">
+                      <a:solidFill>
+                        <a:srgbClr val="EEEEEE"/>
+                      </a:solidFill>
+                      <a:prstDash val="solid"/>
+                      <a:round/>
+                      <a:headEnd type="none" w="med" len="med"/>
+                      <a:tailEnd type="none" w="med" len="med"/>
+                    </a:lnB>
+                    <a:solidFill>
+                      <a:srgbClr val="3949AB"/>
+                    </a:solidFill>
+                  </a:tcPr>
+                </a:tc>
+                <a:tc>
+                  <a:txBody>
+                    <a:bodyPr/>
+                    <a:lstStyle/>
+                    <a:p>
+                      <a:pPr marL="0" indent="0" algn="ctr">
+                        <a:buNone/>
+                      </a:pPr>
+                      <a:r>
+                        <a:rPr lang="en-US" sz="1600" b="1" dirty="0">
+                          <a:solidFill>
+                            <a:srgbClr val="FFFFFF"/>
+                          </a:solidFill>
+                          <a:latin typeface="Arial" pitchFamily="34" charset="0"/>
+                          <a:ea typeface="Arial" pitchFamily="34" charset="-122"/>
+                          <a:cs typeface="Arial" pitchFamily="34" charset="-120"/>
+                        </a:rPr>
+                        <a:t>Zona de disponibilidad</a:t>
+                      </a:r>
+                      <a:endParaRPr lang="en-US" sz="1600" dirty="0">
+                        <a:latin typeface="Arial" charset="0"/>
+                        <a:ea typeface="Arial" charset="0"/>
+                        <a:cs typeface="Arial" charset="0"/>
+                      </a:endParaRPr>
+                    </a:p>
+                  </a:txBody>
+                  <a:tcPr anchor="ctr">
+                    <a:lnL w="12700" cap="flat" cmpd="sng" algn="ctr">
+                      <a:solidFill>
+                        <a:srgbClr val="EEEEEE"/>
+                      </a:solidFill>
+                      <a:prstDash val="solid"/>
+                      <a:round/>
+                      <a:headEnd type="none" w="med" len="med"/>
+                      <a:tailEnd type="none" w="med" len="med"/>
+                    </a:lnL>
+                    <a:lnR w="12700" cap="flat" cmpd="sng" algn="ctr">
+                      <a:solidFill>
+                        <a:srgbClr val="EEEEEE"/>
+                      </a:solidFill>
+                      <a:prstDash val="solid"/>
+                      <a:round/>
+                      <a:headEnd type="none" w="med" len="med"/>
+                      <a:tailEnd type="none" w="med" len="med"/>
+                    </a:lnR>
+                    <a:lnT w="12700" cap="flat" cmpd="sng" algn="ctr">
+                      <a:solidFill>
+                        <a:srgbClr val="EEEEEE"/>
+                      </a:solidFill>
+                      <a:prstDash val="solid"/>
+                      <a:round/>
+                      <a:headEnd type="none" w="med" len="med"/>
+                      <a:tailEnd type="none" w="med" len="med"/>
+                    </a:lnT>
+                    <a:lnB w="12700" cap="flat" cmpd="sng" algn="ctr">
+                      <a:solidFill>
+                        <a:srgbClr val="EEEEEE"/>
+                      </a:solidFill>
+                      <a:prstDash val="solid"/>
+                      <a:round/>
+                      <a:headEnd type="none" w="med" len="med"/>
+                      <a:tailEnd type="none" w="med" len="med"/>
+                    </a:lnB>
+                    <a:solidFill>
+                      <a:srgbClr val="3949AB"/>
+                    </a:solidFill>
+                  </a:tcPr>
+                </a:tc>
+                <a:tc>
+                  <a:txBody>
+                    <a:bodyPr/>
+                    <a:lstStyle/>
+                    <a:p>
+                      <a:pPr marL="0" indent="0" algn="ctr">
+                        <a:buNone/>
+                      </a:pPr>
+                      <a:r>
+                        <a:rPr lang="en-US" sz="1600" b="1" dirty="0">
+                          <a:solidFill>
+                            <a:srgbClr val="FFFFFF"/>
+                          </a:solidFill>
+                          <a:latin typeface="Arial" pitchFamily="34" charset="0"/>
+                          <a:ea typeface="Arial" pitchFamily="34" charset="-122"/>
+                          <a:cs typeface="Arial" pitchFamily="34" charset="-120"/>
+                        </a:rPr>
+                        <a:t>Pública / privada</a:t>
+                      </a:r>
+                      <a:endParaRPr lang="en-US" sz="1600" dirty="0">
+                        <a:latin typeface="Arial" charset="0"/>
+                        <a:ea typeface="Arial" charset="0"/>
+                        <a:cs typeface="Arial" charset="0"/>
+                      </a:endParaRPr>
+                    </a:p>
+                  </a:txBody>
+                  <a:tcPr anchor="ctr">
+                    <a:lnL w="12700" cap="flat" cmpd="sng" algn="ctr">
+                      <a:solidFill>
+                        <a:srgbClr val="EEEEEE"/>
+                      </a:solidFill>
+                      <a:prstDash val="solid"/>
+                      <a:round/>
+                      <a:headEnd type="none" w="med" len="med"/>
+                      <a:tailEnd type="none" w="med" len="med"/>
+                    </a:lnL>
+                    <a:lnR w="12700" cap="flat" cmpd="sng" algn="ctr">
+                      <a:solidFill>
+                        <a:srgbClr val="EEEEEE"/>
+                      </a:solidFill>
+                      <a:prstDash val="solid"/>
+                      <a:round/>
+                      <a:headEnd type="none" w="med" len="med"/>
+                      <a:tailEnd type="none" w="med" len="med"/>
+                    </a:lnR>
+                    <a:lnT w="12700" cap="flat" cmpd="sng" algn="ctr">
+                      <a:solidFill>
+                        <a:srgbClr val="EEEEEE"/>
+                      </a:solidFill>
+                      <a:prstDash val="solid"/>
+                      <a:round/>
+                      <a:headEnd type="none" w="med" len="med"/>
+                      <a:tailEnd type="none" w="med" len="med"/>
+                    </a:lnT>
+                    <a:lnB w="12700" cap="flat" cmpd="sng" algn="ctr">
+                      <a:solidFill>
+                        <a:srgbClr val="EEEEEE"/>
+                      </a:solidFill>
+                      <a:prstDash val="solid"/>
+                      <a:round/>
+                      <a:headEnd type="none" w="med" len="med"/>
+                      <a:tailEnd type="none" w="med" len="med"/>
+                    </a:lnB>
+                    <a:solidFill>
+                      <a:srgbClr val="3949AB"/>
+                    </a:solidFill>
+                  </a:tcPr>
+                </a:tc>
+                <a:extLst>
+                  <a:ext uri="{0D108BD9-81ED-4DB2-BD59-A6C34878D82A}">
+                    <a16:rowId xmlns:a16="http://schemas.microsoft.com/office/drawing/2014/main" val="10000"/>
+                  </a:ext>
+                </a:extLst>
+              </a:tr>
+              <a:tr h="548640">
+                <a:tc>
+                  <a:txBody>
+                    <a:bodyPr/>
+                    <a:lstStyle/>
+                    <a:p>
+                      <a:pPr marL="0" indent="0">
+                        <a:buNone/>
+                      </a:pPr>
+                      <a:r>
+                        <a:rPr lang="en-US" sz="1500" dirty="0">
+                          <a:solidFill>
+                            <a:srgbClr val="212121"/>
+                          </a:solidFill>
+                          <a:latin typeface="Arial" pitchFamily="34" charset="0"/>
+                          <a:ea typeface="Arial" pitchFamily="34" charset="-122"/>
+                          <a:cs typeface="Arial" pitchFamily="34" charset="-120"/>
+                        </a:rPr>
+                        <a:t>...</a:t>
+                      </a:r>
+                      <a:endParaRPr lang="en-US" sz="1500" dirty="0">
+                        <a:latin typeface="Arial" charset="0"/>
+                        <a:ea typeface="Arial" charset="0"/>
+                        <a:cs typeface="Arial" charset="0"/>
+                      </a:endParaRPr>
+                    </a:p>
+                  </a:txBody>
+                  <a:tcPr anchor="ctr">
+                    <a:lnL w="12700" cap="flat" cmpd="sng" algn="ctr">
+                      <a:solidFill>
+                        <a:srgbClr val="EEEEEE"/>
+                      </a:solidFill>
+                      <a:prstDash val="solid"/>
+                      <a:round/>
+                      <a:headEnd type="none" w="med" len="med"/>
+                      <a:tailEnd type="none" w="med" len="med"/>
+                    </a:lnL>
+                    <a:lnR w="12700" cap="flat" cmpd="sng" algn="ctr">
+                      <a:solidFill>
+                        <a:srgbClr val="EEEEEE"/>
+                      </a:solidFill>
+                      <a:prstDash val="solid"/>
+                      <a:round/>
+                      <a:headEnd type="none" w="med" len="med"/>
+                      <a:tailEnd type="none" w="med" len="med"/>
+                    </a:lnR>
+                    <a:lnT w="12700" cap="flat" cmpd="sng" algn="ctr">
+                      <a:solidFill>
+                        <a:srgbClr val="EEEEEE"/>
+                      </a:solidFill>
+                      <a:prstDash val="solid"/>
+                      <a:round/>
+                      <a:headEnd type="none" w="med" len="med"/>
+                      <a:tailEnd type="none" w="med" len="med"/>
+                    </a:lnT>
+                    <a:lnB w="12700" cap="flat" cmpd="sng" algn="ctr">
+                      <a:solidFill>
+                        <a:srgbClr val="EEEEEE"/>
+                      </a:solidFill>
+                      <a:prstDash val="solid"/>
+                      <a:round/>
+                      <a:headEnd type="none" w="med" len="med"/>
+                      <a:tailEnd type="none" w="med" len="med"/>
+                    </a:lnB>
+                    <a:solidFill>
+                      <a:srgbClr val="FFFFFF"/>
+                    </a:solidFill>
+                  </a:tcPr>
+                </a:tc>
+                <a:tc>
+                  <a:txBody>
+                    <a:bodyPr/>
+                    <a:lstStyle/>
+                    <a:p>
+                      <a:pPr marL="0" indent="0">
+                        <a:buNone/>
+                      </a:pPr>
+                      <a:r>
+                        <a:rPr lang="en-US" sz="1500" dirty="0">
+                          <a:solidFill>
+                            <a:srgbClr val="212121"/>
+                          </a:solidFill>
+                          <a:latin typeface="Arial" pitchFamily="34" charset="0"/>
+                          <a:ea typeface="Arial" pitchFamily="34" charset="-122"/>
+                          <a:cs typeface="Arial" pitchFamily="34" charset="-120"/>
+                        </a:rPr>
+                        <a:t>...</a:t>
+                      </a:r>
+                      <a:endParaRPr lang="en-US" sz="1500" dirty="0">
+                        <a:latin typeface="Arial" charset="0"/>
+                        <a:ea typeface="Arial" charset="0"/>
+                        <a:cs typeface="Arial" charset="0"/>
+                      </a:endParaRPr>
+                    </a:p>
+                  </a:txBody>
+                  <a:tcPr anchor="ctr">
+                    <a:lnL w="12700" cap="flat" cmpd="sng" algn="ctr">
+                      <a:solidFill>
+                        <a:srgbClr val="EEEEEE"/>
+                      </a:solidFill>
+                      <a:prstDash val="solid"/>
+                      <a:round/>
+                      <a:headEnd type="none" w="med" len="med"/>
+                      <a:tailEnd type="none" w="med" len="med"/>
+                    </a:lnL>
+                    <a:lnR w="12700" cap="flat" cmpd="sng" algn="ctr">
+                      <a:solidFill>
+                        <a:srgbClr val="EEEEEE"/>
+                      </a:solidFill>
+                      <a:prstDash val="solid"/>
+                      <a:round/>
+                      <a:headEnd type="none" w="med" len="med"/>
+                      <a:tailEnd type="none" w="med" len="med"/>
+                    </a:lnR>
+                    <a:lnT w="12700" cap="flat" cmpd="sng" algn="ctr">
+                      <a:solidFill>
+                        <a:srgbClr val="EEEEEE"/>
+                      </a:solidFill>
+                      <a:prstDash val="solid"/>
+                      <a:round/>
+                      <a:headEnd type="none" w="med" len="med"/>
+                      <a:tailEnd type="none" w="med" len="med"/>
+                    </a:lnT>
+                    <a:lnB w="12700" cap="flat" cmpd="sng" algn="ctr">
+                      <a:solidFill>
+                        <a:srgbClr val="EEEEEE"/>
+                      </a:solidFill>
+                      <a:prstDash val="solid"/>
+                      <a:round/>
+                      <a:headEnd type="none" w="med" len="med"/>
+                      <a:tailEnd type="none" w="med" len="med"/>
+                    </a:lnB>
+                    <a:solidFill>
+                      <a:srgbClr val="FFFFFF"/>
+                    </a:solidFill>
+                  </a:tcPr>
+                </a:tc>
+                <a:tc>
+                  <a:txBody>
+                    <a:bodyPr/>
+                    <a:lstStyle/>
+                    <a:p>
+                      <a:pPr marL="0" indent="0">
+                        <a:buNone/>
+                      </a:pPr>
+                      <a:r>
+                        <a:rPr lang="en-US" sz="1500" dirty="0">
+                          <a:solidFill>
+                            <a:srgbClr val="212121"/>
+                          </a:solidFill>
+                          <a:latin typeface="Arial" pitchFamily="34" charset="0"/>
+                          <a:ea typeface="Arial" pitchFamily="34" charset="-122"/>
+                          <a:cs typeface="Arial" pitchFamily="34" charset="-120"/>
+                        </a:rPr>
+                        <a:t>...</a:t>
+                      </a:r>
+                      <a:endParaRPr lang="en-US" sz="1500" dirty="0">
+                        <a:latin typeface="Arial" charset="0"/>
+                        <a:ea typeface="Arial" charset="0"/>
+                        <a:cs typeface="Arial" charset="0"/>
+                      </a:endParaRPr>
+                    </a:p>
+                  </a:txBody>
+                  <a:tcPr anchor="ctr">
+                    <a:lnL w="12700" cap="flat" cmpd="sng" algn="ctr">
+                      <a:solidFill>
+                        <a:srgbClr val="EEEEEE"/>
+                      </a:solidFill>
+                      <a:prstDash val="solid"/>
+                      <a:round/>
+                      <a:headEnd type="none" w="med" len="med"/>
+                      <a:tailEnd type="none" w="med" len="med"/>
+                    </a:lnL>
+                    <a:lnR w="12700" cap="flat" cmpd="sng" algn="ctr">
+                      <a:solidFill>
+                        <a:srgbClr val="EEEEEE"/>
+                      </a:solidFill>
+                      <a:prstDash val="solid"/>
+                      <a:round/>
+                      <a:headEnd type="none" w="med" len="med"/>
+                      <a:tailEnd type="none" w="med" len="med"/>
+                    </a:lnR>
+                    <a:lnT w="12700" cap="flat" cmpd="sng" algn="ctr">
+                      <a:solidFill>
+                        <a:srgbClr val="EEEEEE"/>
+                      </a:solidFill>
+                      <a:prstDash val="solid"/>
+                      <a:round/>
+                      <a:headEnd type="none" w="med" len="med"/>
+                      <a:tailEnd type="none" w="med" len="med"/>
+                    </a:lnT>
+                    <a:lnB w="12700" cap="flat" cmpd="sng" algn="ctr">
+                      <a:solidFill>
+                        <a:srgbClr val="EEEEEE"/>
+                      </a:solidFill>
+                      <a:prstDash val="solid"/>
+                      <a:round/>
+                      <a:headEnd type="none" w="med" len="med"/>
+                      <a:tailEnd type="none" w="med" len="med"/>
+                    </a:lnB>
+                    <a:solidFill>
+                      <a:srgbClr val="FFFFFF"/>
+                    </a:solidFill>
+                  </a:tcPr>
+                </a:tc>
+                <a:tc>
+                  <a:txBody>
+                    <a:bodyPr/>
+                    <a:lstStyle/>
+                    <a:p>
+                      <a:pPr marL="0" indent="0">
+                        <a:buNone/>
+                      </a:pPr>
+                      <a:r>
+                        <a:rPr lang="en-US" sz="1500" dirty="0">
+                          <a:solidFill>
+                            <a:srgbClr val="212121"/>
+                          </a:solidFill>
+                          <a:latin typeface="Arial" pitchFamily="34" charset="0"/>
+                          <a:ea typeface="Arial" pitchFamily="34" charset="-122"/>
+                          <a:cs typeface="Arial" pitchFamily="34" charset="-120"/>
+                        </a:rPr>
+                        <a:t>...</a:t>
+                      </a:r>
+                      <a:endParaRPr lang="en-US" sz="1500" dirty="0">
+                        <a:latin typeface="Arial" charset="0"/>
+                        <a:ea typeface="Arial" charset="0"/>
+                        <a:cs typeface="Arial" charset="0"/>
+                      </a:endParaRPr>
+                    </a:p>
+                  </a:txBody>
+                  <a:tcPr anchor="ctr">
+                    <a:lnL w="12700" cap="flat" cmpd="sng" algn="ctr">
+                      <a:solidFill>
+                        <a:srgbClr val="EEEEEE"/>
+                      </a:solidFill>
+                      <a:prstDash val="solid"/>
+                      <a:round/>
+                      <a:headEnd type="none" w="med" len="med"/>
+                      <a:tailEnd type="none" w="med" len="med"/>
+                    </a:lnL>
+                    <a:lnR w="12700" cap="flat" cmpd="sng" algn="ctr">
+                      <a:solidFill>
+                        <a:srgbClr val="EEEEEE"/>
+                      </a:solidFill>
+                      <a:prstDash val="solid"/>
+                      <a:round/>
+                      <a:headEnd type="none" w="med" len="med"/>
+                      <a:tailEnd type="none" w="med" len="med"/>
+                    </a:lnR>
+                    <a:lnT w="12700" cap="flat" cmpd="sng" algn="ctr">
+                      <a:solidFill>
+                        <a:srgbClr val="EEEEEE"/>
+                      </a:solidFill>
+                      <a:prstDash val="solid"/>
+                      <a:round/>
+                      <a:headEnd type="none" w="med" len="med"/>
+                      <a:tailEnd type="none" w="med" len="med"/>
+                    </a:lnT>
+                    <a:lnB w="12700" cap="flat" cmpd="sng" algn="ctr">
+                      <a:solidFill>
+                        <a:srgbClr val="EEEEEE"/>
+                      </a:solidFill>
+                      <a:prstDash val="solid"/>
+                      <a:round/>
+                      <a:headEnd type="none" w="med" len="med"/>
+                      <a:tailEnd type="none" w="med" len="med"/>
+                    </a:lnB>
+                    <a:solidFill>
+                      <a:srgbClr val="FFFFFF"/>
+                    </a:solidFill>
+                  </a:tcPr>
+                </a:tc>
+                <a:extLst>
+                  <a:ext uri="{0D108BD9-81ED-4DB2-BD59-A6C34878D82A}">
+                    <a16:rowId xmlns:a16="http://schemas.microsoft.com/office/drawing/2014/main" val="10001"/>
+                  </a:ext>
+                </a:extLst>
+              </a:tr>
+              <a:tr h="548640">
+                <a:tc>
+                  <a:txBody>
+                    <a:bodyPr/>
+                    <a:lstStyle/>
+                    <a:p>
+                      <a:pPr marL="0" indent="0">
+                        <a:buNone/>
+                      </a:pPr>
+                      <a:r>
+                        <a:rPr lang="en-US" sz="1500" dirty="0">
+                          <a:solidFill>
+                            <a:srgbClr val="212121"/>
+                          </a:solidFill>
+                          <a:latin typeface="Arial" pitchFamily="34" charset="0"/>
+                          <a:ea typeface="Arial" pitchFamily="34" charset="-122"/>
+                          <a:cs typeface="Arial" pitchFamily="34" charset="-120"/>
+                        </a:rPr>
+                        <a:t>...</a:t>
+                      </a:r>
+                      <a:endParaRPr lang="en-US" sz="1500" dirty="0">
+                        <a:latin typeface="Arial" charset="0"/>
+                        <a:ea typeface="Arial" charset="0"/>
+                        <a:cs typeface="Arial" charset="0"/>
+                      </a:endParaRPr>
+                    </a:p>
+                  </a:txBody>
+                  <a:tcPr anchor="ctr">
+                    <a:lnL w="12700" cap="flat" cmpd="sng" algn="ctr">
+                      <a:solidFill>
+                        <a:srgbClr val="EEEEEE"/>
+                      </a:solidFill>
+                      <a:prstDash val="solid"/>
+                      <a:round/>
+                      <a:headEnd type="none" w="med" len="med"/>
+                      <a:tailEnd type="none" w="med" len="med"/>
+                    </a:lnL>
+                    <a:lnR w="12700" cap="flat" cmpd="sng" algn="ctr">
+                      <a:solidFill>
+                        <a:srgbClr val="EEEEEE"/>
+                      </a:solidFill>
+                      <a:prstDash val="solid"/>
+                      <a:round/>
+                      <a:headEnd type="none" w="med" len="med"/>
+                      <a:tailEnd type="none" w="med" len="med"/>
+                    </a:lnR>
+                    <a:lnT w="12700" cap="flat" cmpd="sng" algn="ctr">
+                      <a:solidFill>
+                        <a:srgbClr val="EEEEEE"/>
+                      </a:solidFill>
+                      <a:prstDash val="solid"/>
+                      <a:round/>
+                      <a:headEnd type="none" w="med" len="med"/>
+                      <a:tailEnd type="none" w="med" len="med"/>
+                    </a:lnT>
+                    <a:lnB w="12700" cap="flat" cmpd="sng" algn="ctr">
+                      <a:solidFill>
+                        <a:srgbClr val="EEEEEE"/>
+                      </a:solidFill>
+                      <a:prstDash val="solid"/>
+                      <a:round/>
+                      <a:headEnd type="none" w="med" len="med"/>
+                      <a:tailEnd type="none" w="med" len="med"/>
+                    </a:lnB>
+                    <a:solidFill>
+                      <a:srgbClr val="F5F5F5"/>
+                    </a:solidFill>
+                  </a:tcPr>
+                </a:tc>
+                <a:tc>
+                  <a:txBody>
+                    <a:bodyPr/>
+                    <a:lstStyle/>
+                    <a:p>
+                      <a:pPr marL="0" indent="0">
+                        <a:buNone/>
+                      </a:pPr>
+                      <a:r>
+                        <a:rPr lang="en-US" sz="1500" dirty="0">
+                          <a:solidFill>
+                            <a:srgbClr val="212121"/>
+                          </a:solidFill>
+                          <a:latin typeface="Arial" pitchFamily="34" charset="0"/>
+                          <a:ea typeface="Arial" pitchFamily="34" charset="-122"/>
+                          <a:cs typeface="Arial" pitchFamily="34" charset="-120"/>
+                        </a:rPr>
+                        <a:t>...</a:t>
+                      </a:r>
+                      <a:endParaRPr lang="en-US" sz="1500" dirty="0">
+                        <a:latin typeface="Arial" charset="0"/>
+                        <a:ea typeface="Arial" charset="0"/>
+                        <a:cs typeface="Arial" charset="0"/>
+                      </a:endParaRPr>
+                    </a:p>
+                  </a:txBody>
+                  <a:tcPr anchor="ctr">
+                    <a:lnL w="12700" cap="flat" cmpd="sng" algn="ctr">
+                      <a:solidFill>
+                        <a:srgbClr val="EEEEEE"/>
+                      </a:solidFill>
+                      <a:prstDash val="solid"/>
+                      <a:round/>
+                      <a:headEnd type="none" w="med" len="med"/>
+                      <a:tailEnd type="none" w="med" len="med"/>
+                    </a:lnL>
+                    <a:lnR w="12700" cap="flat" cmpd="sng" algn="ctr">
+                      <a:solidFill>
+                        <a:srgbClr val="EEEEEE"/>
+                      </a:solidFill>
+                      <a:prstDash val="solid"/>
+                      <a:round/>
+                      <a:headEnd type="none" w="med" len="med"/>
+                      <a:tailEnd type="none" w="med" len="med"/>
+                    </a:lnR>
+                    <a:lnT w="12700" cap="flat" cmpd="sng" algn="ctr">
+                      <a:solidFill>
+                        <a:srgbClr val="EEEEEE"/>
+                      </a:solidFill>
+                      <a:prstDash val="solid"/>
+                      <a:round/>
+                      <a:headEnd type="none" w="med" len="med"/>
+                      <a:tailEnd type="none" w="med" len="med"/>
+                    </a:lnT>
+                    <a:lnB w="12700" cap="flat" cmpd="sng" algn="ctr">
+                      <a:solidFill>
+                        <a:srgbClr val="EEEEEE"/>
+                      </a:solidFill>
+                      <a:prstDash val="solid"/>
+                      <a:round/>
+                      <a:headEnd type="none" w="med" len="med"/>
+                      <a:tailEnd type="none" w="med" len="med"/>
+                    </a:lnB>
+                    <a:solidFill>
+                      <a:srgbClr val="F5F5F5"/>
+                    </a:solidFill>
+                  </a:tcPr>
+                </a:tc>
+                <a:tc>
+                  <a:txBody>
+                    <a:bodyPr/>
+                    <a:lstStyle/>
+                    <a:p>
+                      <a:pPr marL="0" indent="0">
+                        <a:buNone/>
+                      </a:pPr>
+                      <a:r>
+                        <a:rPr lang="en-US" sz="1500" dirty="0">
+                          <a:solidFill>
+                            <a:srgbClr val="212121"/>
+                          </a:solidFill>
+                          <a:latin typeface="Arial" pitchFamily="34" charset="0"/>
+                          <a:ea typeface="Arial" pitchFamily="34" charset="-122"/>
+                          <a:cs typeface="Arial" pitchFamily="34" charset="-120"/>
+                        </a:rPr>
+                        <a:t>...</a:t>
+                      </a:r>
+                      <a:endParaRPr lang="en-US" sz="1500" dirty="0">
+                        <a:latin typeface="Arial" charset="0"/>
+                        <a:ea typeface="Arial" charset="0"/>
+                        <a:cs typeface="Arial" charset="0"/>
+                      </a:endParaRPr>
+                    </a:p>
+                  </a:txBody>
+                  <a:tcPr anchor="ctr">
+                    <a:lnL w="12700" cap="flat" cmpd="sng" algn="ctr">
+                      <a:solidFill>
+                        <a:srgbClr val="EEEEEE"/>
+                      </a:solidFill>
+                      <a:prstDash val="solid"/>
+                      <a:round/>
+                      <a:headEnd type="none" w="med" len="med"/>
+                      <a:tailEnd type="none" w="med" len="med"/>
+                    </a:lnL>
+                    <a:lnR w="12700" cap="flat" cmpd="sng" algn="ctr">
+                      <a:solidFill>
+                        <a:srgbClr val="EEEEEE"/>
+                      </a:solidFill>
+                      <a:prstDash val="solid"/>
+                      <a:round/>
+                      <a:headEnd type="none" w="med" len="med"/>
+                      <a:tailEnd type="none" w="med" len="med"/>
+                    </a:lnR>
+                    <a:lnT w="12700" cap="flat" cmpd="sng" algn="ctr">
+                      <a:solidFill>
+                        <a:srgbClr val="EEEEEE"/>
+                      </a:solidFill>
+                      <a:prstDash val="solid"/>
+                      <a:round/>
+                      <a:headEnd type="none" w="med" len="med"/>
+                      <a:tailEnd type="none" w="med" len="med"/>
+                    </a:lnT>
+                    <a:lnB w="12700" cap="flat" cmpd="sng" algn="ctr">
+                      <a:solidFill>
+                        <a:srgbClr val="EEEEEE"/>
+                      </a:solidFill>
+                      <a:prstDash val="solid"/>
+                      <a:round/>
+                      <a:headEnd type="none" w="med" len="med"/>
+                      <a:tailEnd type="none" w="med" len="med"/>
+                    </a:lnB>
+                    <a:solidFill>
+                      <a:srgbClr val="F5F5F5"/>
+                    </a:solidFill>
+                  </a:tcPr>
+                </a:tc>
+                <a:tc>
+                  <a:txBody>
+                    <a:bodyPr/>
+                    <a:lstStyle/>
+                    <a:p>
+                      <a:pPr marL="0" indent="0">
+                        <a:buNone/>
+                      </a:pPr>
+                      <a:r>
+                        <a:rPr lang="en-US" sz="1500" dirty="0">
+                          <a:solidFill>
+                            <a:srgbClr val="212121"/>
+                          </a:solidFill>
+                          <a:latin typeface="Arial" pitchFamily="34" charset="0"/>
+                          <a:ea typeface="Arial" pitchFamily="34" charset="-122"/>
+                          <a:cs typeface="Arial" pitchFamily="34" charset="-120"/>
+                        </a:rPr>
+                        <a:t>...</a:t>
+                      </a:r>
+                      <a:endParaRPr lang="en-US" sz="1500" dirty="0">
+                        <a:latin typeface="Arial" charset="0"/>
+                        <a:ea typeface="Arial" charset="0"/>
+                        <a:cs typeface="Arial" charset="0"/>
+                      </a:endParaRPr>
+                    </a:p>
+                  </a:txBody>
+                  <a:tcPr anchor="ctr">
+                    <a:lnL w="12700" cap="flat" cmpd="sng" algn="ctr">
+                      <a:solidFill>
+                        <a:srgbClr val="EEEEEE"/>
+                      </a:solidFill>
+                      <a:prstDash val="solid"/>
+                      <a:round/>
+                      <a:headEnd type="none" w="med" len="med"/>
+                      <a:tailEnd type="none" w="med" len="med"/>
+                    </a:lnL>
+                    <a:lnR w="12700" cap="flat" cmpd="sng" algn="ctr">
+                      <a:solidFill>
+                        <a:srgbClr val="EEEEEE"/>
+                      </a:solidFill>
+                      <a:prstDash val="solid"/>
+                      <a:round/>
+                      <a:headEnd type="none" w="med" len="med"/>
+                      <a:tailEnd type="none" w="med" len="med"/>
+                    </a:lnR>
+                    <a:lnT w="12700" cap="flat" cmpd="sng" algn="ctr">
+                      <a:solidFill>
+                        <a:srgbClr val="EEEEEE"/>
+                      </a:solidFill>
+                      <a:prstDash val="solid"/>
+                      <a:round/>
+                      <a:headEnd type="none" w="med" len="med"/>
+                      <a:tailEnd type="none" w="med" len="med"/>
+                    </a:lnT>
+                    <a:lnB w="12700" cap="flat" cmpd="sng" algn="ctr">
+                      <a:solidFill>
+                        <a:srgbClr val="EEEEEE"/>
+                      </a:solidFill>
+                      <a:prstDash val="solid"/>
+                      <a:round/>
+                      <a:headEnd type="none" w="med" len="med"/>
+                      <a:tailEnd type="none" w="med" len="med"/>
+                    </a:lnB>
+                    <a:solidFill>
+                      <a:srgbClr val="F5F5F5"/>
+                    </a:solidFill>
+                  </a:tcPr>
+                </a:tc>
+                <a:extLst>
+                  <a:ext uri="{0D108BD9-81ED-4DB2-BD59-A6C34878D82A}">
+                    <a16:rowId xmlns:a16="http://schemas.microsoft.com/office/drawing/2014/main" val="10002"/>
+                  </a:ext>
+                </a:extLst>
+              </a:tr>
+            </a:tbl>
+          </a:graphicData>
+        </a:graphic>
+      </p:graphicFrame>
+      <p:sp>
+        <p:nvSpPr>
+          <p:cNvPr id="9" name="Text 6"/>
+          <p:cNvSpPr/>
+          <p:nvPr/>
+        </p:nvSpPr>
+        <p:spPr>
+          <a:xfrm>
+            <a:off x="548640" y="5440680"/>
+            <a:ext cx="11091672" cy="457200"/>
+          </a:xfrm>
+          <a:prstGeom prst="rect">
+            <a:avLst/>
+          </a:prstGeom>
+          <a:noFill/>
+          <a:ln/>
+        </p:spPr>
+        <p:txBody>
+          <a:bodyPr wrap="square" rtlCol="0" anchor="t"/>
+          <a:lstStyle/>
+          <a:p>
+            <a:pPr marL="0" indent="0" algn="ctr">
+              <a:buNone/>
+            </a:pPr>
+            <a:r>
+              <a:rPr lang="en-US" sz="1600" dirty="0">
+                <a:solidFill>
+                  <a:srgbClr val="757575"/>
+                </a:solidFill>
+                <a:latin typeface="Arial" pitchFamily="34" charset="0"/>
+                <a:ea typeface="Arial" pitchFamily="34" charset="-122"/>
+                <a:cs typeface="Arial" pitchFamily="34" charset="-120"/>
+              </a:rPr>
+              <a:t>Con esa tabla ya puedes construir la VPC entera sin improvisar sobre la marcha.</a:t>
+            </a:r>
+            <a:endParaRPr lang="en-US" sz="1600" dirty="0"/>
           </a:p>
         </p:txBody>
       </p:sp>
@@ -2141,7 +2942,7 @@
                 <a:ea typeface="Arial" pitchFamily="34" charset="-122"/>
                 <a:cs typeface="Arial" pitchFamily="34" charset="-120"/>
               </a:rPr>
-              <a:t>Por qué la base de datos nunca vive en una subred pública</a:t>
+              <a:t>Ideas clave</a:t>
             </a:r>
             <a:endParaRPr lang="en-US" sz="2400" dirty="0"/>
           </a:p>
@@ -2188,53 +2989,14 @@
       </p:sp>
       <p:sp>
         <p:nvSpPr>
-          <p:cNvPr id="5" name="Text 3"/>
-          <p:cNvSpPr/>
-          <p:nvPr/>
-        </p:nvSpPr>
-        <p:spPr>
-          <a:xfrm>
-            <a:off x="548640" y="1371600"/>
-            <a:ext cx="11091672" cy="1371600"/>
-          </a:xfrm>
-          <a:prstGeom prst="rect">
-            <a:avLst/>
-          </a:prstGeom>
-          <a:noFill/>
-          <a:ln/>
-        </p:spPr>
-        <p:txBody>
-          <a:bodyPr wrap="square" rtlCol="0" anchor="t"/>
-          <a:lstStyle/>
-          <a:p>
-            <a:pPr marL="0" indent="0">
-              <a:buNone/>
-            </a:pPr>
-            <a:r>
-              <a:rPr lang="en-US" sz="1900" dirty="0">
-                <a:solidFill>
-                  <a:srgbClr val="212121"/>
-                </a:solidFill>
-                <a:latin typeface="Arial" pitchFamily="34" charset="0"/>
-                <a:ea typeface="Arial" pitchFamily="34" charset="-122"/>
-                <a:cs typeface="Arial" pitchFamily="34" charset="-120"/>
-              </a:rPr>
-              <a:t>La configuración de acceso a tus datos es responsabilidad tuya, no de AWS. Poner la base de datos en una subred privada traduce ese principio en una regla de red: si algo no necesita que internet lo alcance directamente, no le des un camino para que internet lo alcance.</a:t>
-            </a:r>
-            <a:endParaRPr lang="en-US" sz="1900" dirty="0"/>
-          </a:p>
-        </p:txBody>
-      </p:sp>
-      <p:sp>
-        <p:nvSpPr>
-          <p:cNvPr id="6" name="Shape 4"/>
-          <p:cNvSpPr/>
-          <p:nvPr/>
-        </p:nvSpPr>
-        <p:spPr>
-          <a:xfrm>
-            <a:off x="548640" y="3063240"/>
-            <a:ext cx="2464308" cy="1371600"/>
+          <p:cNvPr id="5" name="Shape 3"/>
+          <p:cNvSpPr/>
+          <p:nvPr/>
+        </p:nvSpPr>
+        <p:spPr>
+          <a:xfrm>
+            <a:off x="548640" y="1280160"/>
+            <a:ext cx="5431536" cy="1417320"/>
           </a:xfrm>
           <a:prstGeom prst="roundRect">
             <a:avLst/>
@@ -2259,14 +3021,46 @@
       </p:sp>
       <p:sp>
         <p:nvSpPr>
+          <p:cNvPr id="6" name="Shape 4"/>
+          <p:cNvSpPr/>
+          <p:nvPr/>
+        </p:nvSpPr>
+        <p:spPr>
+          <a:xfrm>
+            <a:off x="731520" y="1668780"/>
+            <a:ext cx="640080" cy="640080"/>
+          </a:xfrm>
+          <a:prstGeom prst="ellipse">
+            <a:avLst/>
+          </a:prstGeom>
+          <a:solidFill>
+            <a:srgbClr val="3949AB"/>
+          </a:solidFill>
+          <a:ln w="12700">
+            <a:solidFill>
+              <a:srgbClr val="3949AB"/>
+            </a:solidFill>
+            <a:prstDash val="solid"/>
+          </a:ln>
+        </p:spPr>
+        <p:txBody>
+          <a:bodyPr/>
+          <a:lstStyle/>
+          <a:p>
+            <a:endParaRPr lang="es-ES"/>
+          </a:p>
+        </p:txBody>
+      </p:sp>
+      <p:sp>
+        <p:nvSpPr>
           <p:cNvPr id="7" name="Text 5"/>
           <p:cNvSpPr/>
           <p:nvPr/>
         </p:nvSpPr>
         <p:spPr>
           <a:xfrm>
-            <a:off x="594360" y="3108960"/>
-            <a:ext cx="2372868" cy="1280160"/>
+            <a:off x="731520" y="1668780"/>
+            <a:ext cx="640080" cy="640080"/>
           </a:xfrm>
           <a:prstGeom prst="rect">
             <a:avLst/>
@@ -2282,7 +3076,46 @@
               <a:buNone/>
             </a:pPr>
             <a:r>
-              <a:rPr lang="en-US" sz="1500" dirty="0">
+              <a:rPr lang="en-US" sz="2000" b="1" dirty="0">
+                <a:solidFill>
+                  <a:srgbClr val="FFFFFF"/>
+                </a:solidFill>
+                <a:latin typeface="Arial" pitchFamily="34" charset="0"/>
+                <a:ea typeface="Arial" pitchFamily="34" charset="-122"/>
+                <a:cs typeface="Arial" pitchFamily="34" charset="-120"/>
+              </a:rPr>
+              <a:t>1</a:t>
+            </a:r>
+            <a:endParaRPr lang="en-US" sz="2000" dirty="0"/>
+          </a:p>
+        </p:txBody>
+      </p:sp>
+      <p:sp>
+        <p:nvSpPr>
+          <p:cNvPr id="8" name="Text 6"/>
+          <p:cNvSpPr/>
+          <p:nvPr/>
+        </p:nvSpPr>
+        <p:spPr>
+          <a:xfrm>
+            <a:off x="1508760" y="1280160"/>
+            <a:ext cx="4288536" cy="1417320"/>
+          </a:xfrm>
+          <a:prstGeom prst="rect">
+            <a:avLst/>
+          </a:prstGeom>
+          <a:noFill/>
+          <a:ln/>
+        </p:spPr>
+        <p:txBody>
+          <a:bodyPr wrap="square" rtlCol="0" anchor="ctr"/>
+          <a:lstStyle/>
+          <a:p>
+            <a:pPr marL="0" indent="0">
+              <a:buNone/>
+            </a:pPr>
+            <a:r>
+              <a:rPr lang="en-US" sz="1600" dirty="0">
                 <a:solidFill>
                   <a:srgbClr val="212121"/>
                 </a:solidFill>
@@ -2290,48 +3123,9 @@
                 <a:ea typeface="Arial" pitchFamily="34" charset="-122"/>
                 <a:cs typeface="Arial" pitchFamily="34" charset="-120"/>
               </a:rPr>
-              <a:t>Internet</a:t>
+              <a:t>Una VPC es tu propio espacio de red aislado dentro de AWS — vacío al crearla, con todo por construir dentro.</a:t>
             </a:r>
-            <a:endParaRPr lang="en-US" sz="1500" dirty="0"/>
-          </a:p>
-        </p:txBody>
-      </p:sp>
-      <p:sp>
-        <p:nvSpPr>
-          <p:cNvPr id="8" name="Text 6"/>
-          <p:cNvSpPr/>
-          <p:nvPr/>
-        </p:nvSpPr>
-        <p:spPr>
-          <a:xfrm>
-            <a:off x="2967228" y="3063240"/>
-            <a:ext cx="502920" cy="1371600"/>
-          </a:xfrm>
-          <a:prstGeom prst="rect">
-            <a:avLst/>
-          </a:prstGeom>
-          <a:noFill/>
-          <a:ln/>
-        </p:spPr>
-        <p:txBody>
-          <a:bodyPr wrap="square" rtlCol="0" anchor="ctr"/>
-          <a:lstStyle/>
-          <a:p>
-            <a:pPr marL="0" indent="0" algn="ctr">
-              <a:buNone/>
-            </a:pPr>
-            <a:r>
-              <a:rPr lang="en-US" sz="2200" b="1" dirty="0">
-                <a:solidFill>
-                  <a:srgbClr val="3949AB"/>
-                </a:solidFill>
-                <a:latin typeface="Arial" pitchFamily="34" charset="0"/>
-                <a:ea typeface="Arial" pitchFamily="34" charset="-122"/>
-                <a:cs typeface="Arial" pitchFamily="34" charset="-120"/>
-              </a:rPr>
-              <a:t>→</a:t>
-            </a:r>
-            <a:endParaRPr lang="en-US" sz="2200" dirty="0"/>
+            <a:endParaRPr lang="en-US" sz="1600" dirty="0"/>
           </a:p>
         </p:txBody>
       </p:sp>
@@ -2343,8 +3137,8 @@
         </p:nvSpPr>
         <p:spPr>
           <a:xfrm>
-            <a:off x="3424428" y="3063240"/>
-            <a:ext cx="2464308" cy="1371600"/>
+            <a:off x="6208776" y="1280160"/>
+            <a:ext cx="5431536" cy="1417320"/>
           </a:xfrm>
           <a:prstGeom prst="roundRect">
             <a:avLst/>
@@ -2369,14 +3163,46 @@
       </p:sp>
       <p:sp>
         <p:nvSpPr>
-          <p:cNvPr id="10" name="Text 8"/>
-          <p:cNvSpPr/>
-          <p:nvPr/>
-        </p:nvSpPr>
-        <p:spPr>
-          <a:xfrm>
-            <a:off x="3470148" y="3108960"/>
-            <a:ext cx="2372868" cy="1280160"/>
+          <p:cNvPr id="10" name="Shape 8"/>
+          <p:cNvSpPr/>
+          <p:nvPr/>
+        </p:nvSpPr>
+        <p:spPr>
+          <a:xfrm>
+            <a:off x="6391656" y="1668780"/>
+            <a:ext cx="640080" cy="640080"/>
+          </a:xfrm>
+          <a:prstGeom prst="ellipse">
+            <a:avLst/>
+          </a:prstGeom>
+          <a:solidFill>
+            <a:srgbClr val="3949AB"/>
+          </a:solidFill>
+          <a:ln w="12700">
+            <a:solidFill>
+              <a:srgbClr val="3949AB"/>
+            </a:solidFill>
+            <a:prstDash val="solid"/>
+          </a:ln>
+        </p:spPr>
+        <p:txBody>
+          <a:bodyPr/>
+          <a:lstStyle/>
+          <a:p>
+            <a:endParaRPr lang="es-ES"/>
+          </a:p>
+        </p:txBody>
+      </p:sp>
+      <p:sp>
+        <p:nvSpPr>
+          <p:cNvPr id="11" name="Text 9"/>
+          <p:cNvSpPr/>
+          <p:nvPr/>
+        </p:nvSpPr>
+        <p:spPr>
+          <a:xfrm>
+            <a:off x="6391656" y="1668780"/>
+            <a:ext cx="640080" cy="640080"/>
           </a:xfrm>
           <a:prstGeom prst="rect">
             <a:avLst/>
@@ -2392,7 +3218,46 @@
               <a:buNone/>
             </a:pPr>
             <a:r>
-              <a:rPr lang="en-US" sz="1500" dirty="0">
+              <a:rPr lang="en-US" sz="2000" b="1" dirty="0">
+                <a:solidFill>
+                  <a:srgbClr val="FFFFFF"/>
+                </a:solidFill>
+                <a:latin typeface="Arial" pitchFamily="34" charset="0"/>
+                <a:ea typeface="Arial" pitchFamily="34" charset="-122"/>
+                <a:cs typeface="Arial" pitchFamily="34" charset="-120"/>
+              </a:rPr>
+              <a:t>2</a:t>
+            </a:r>
+            <a:endParaRPr lang="en-US" sz="2000" dirty="0"/>
+          </a:p>
+        </p:txBody>
+      </p:sp>
+      <p:sp>
+        <p:nvSpPr>
+          <p:cNvPr id="12" name="Text 10"/>
+          <p:cNvSpPr/>
+          <p:nvPr/>
+        </p:nvSpPr>
+        <p:spPr>
+          <a:xfrm>
+            <a:off x="7168896" y="1280160"/>
+            <a:ext cx="4288536" cy="1417320"/>
+          </a:xfrm>
+          <a:prstGeom prst="rect">
+            <a:avLst/>
+          </a:prstGeom>
+          <a:noFill/>
+          <a:ln/>
+        </p:spPr>
+        <p:txBody>
+          <a:bodyPr wrap="square" rtlCol="0" anchor="ctr"/>
+          <a:lstStyle/>
+          <a:p>
+            <a:pPr marL="0" indent="0">
+              <a:buNone/>
+            </a:pPr>
+            <a:r>
+              <a:rPr lang="en-US" sz="1600" dirty="0">
                 <a:solidFill>
                   <a:srgbClr val="212121"/>
                 </a:solidFill>
@@ -2400,78 +3265,22 @@
                 <a:ea typeface="Arial" pitchFamily="34" charset="-122"/>
                 <a:cs typeface="Arial" pitchFamily="34" charset="-120"/>
               </a:rPr>
-              <a:t>Front</a:t>
+              <a:t>CIDR expresa un rango con un prefijo (/16, /24...): cuanto más pequeño el número, más direcciones caben.</a:t>
             </a:r>
-            <a:endParaRPr lang="en-US" sz="1500" dirty="0"/>
-          </a:p>
-          <a:p>
-            <a:pPr marL="0" indent="0" algn="ctr">
-              <a:buNone/>
-            </a:pPr>
-            <a:r>
-              <a:rPr lang="en-US" sz="1500" dirty="0">
-                <a:solidFill>
-                  <a:srgbClr val="212121"/>
-                </a:solidFill>
-                <a:latin typeface="Arial" pitchFamily="34" charset="0"/>
-                <a:ea typeface="Arial" pitchFamily="34" charset="-122"/>
-                <a:cs typeface="Arial" pitchFamily="34" charset="-120"/>
-              </a:rPr>
-              <a:t>subred pública</a:t>
-            </a:r>
-            <a:endParaRPr lang="en-US" sz="1500" dirty="0"/>
-          </a:p>
-        </p:txBody>
-      </p:sp>
-      <p:sp>
-        <p:nvSpPr>
-          <p:cNvPr id="11" name="Text 9"/>
-          <p:cNvSpPr/>
-          <p:nvPr/>
-        </p:nvSpPr>
-        <p:spPr>
-          <a:xfrm>
-            <a:off x="5843016" y="3063240"/>
-            <a:ext cx="502920" cy="1371600"/>
-          </a:xfrm>
-          <a:prstGeom prst="rect">
-            <a:avLst/>
-          </a:prstGeom>
-          <a:noFill/>
-          <a:ln/>
-        </p:spPr>
-        <p:txBody>
-          <a:bodyPr wrap="square" rtlCol="0" anchor="ctr"/>
-          <a:lstStyle/>
-          <a:p>
-            <a:pPr marL="0" indent="0" algn="ctr">
-              <a:buNone/>
-            </a:pPr>
-            <a:r>
-              <a:rPr lang="en-US" sz="2200" b="1" dirty="0">
-                <a:solidFill>
-                  <a:srgbClr val="3949AB"/>
-                </a:solidFill>
-                <a:latin typeface="Arial" pitchFamily="34" charset="0"/>
-                <a:ea typeface="Arial" pitchFamily="34" charset="-122"/>
-                <a:cs typeface="Arial" pitchFamily="34" charset="-120"/>
-              </a:rPr>
-              <a:t>→</a:t>
-            </a:r>
-            <a:endParaRPr lang="en-US" sz="2200" dirty="0"/>
-          </a:p>
-        </p:txBody>
-      </p:sp>
-      <p:sp>
-        <p:nvSpPr>
-          <p:cNvPr id="12" name="Shape 10"/>
-          <p:cNvSpPr/>
-          <p:nvPr/>
-        </p:nvSpPr>
-        <p:spPr>
-          <a:xfrm>
-            <a:off x="6300216" y="3063240"/>
-            <a:ext cx="2464308" cy="1371600"/>
+            <a:endParaRPr lang="en-US" sz="1600" dirty="0"/>
+          </a:p>
+        </p:txBody>
+      </p:sp>
+      <p:sp>
+        <p:nvSpPr>
+          <p:cNvPr id="13" name="Shape 11"/>
+          <p:cNvSpPr/>
+          <p:nvPr/>
+        </p:nvSpPr>
+        <p:spPr>
+          <a:xfrm>
+            <a:off x="548640" y="2926080"/>
+            <a:ext cx="5431536" cy="1417320"/>
           </a:xfrm>
           <a:prstGeom prst="roundRect">
             <a:avLst/>
@@ -2496,14 +3305,46 @@
       </p:sp>
       <p:sp>
         <p:nvSpPr>
-          <p:cNvPr id="13" name="Text 11"/>
-          <p:cNvSpPr/>
-          <p:nvPr/>
-        </p:nvSpPr>
-        <p:spPr>
-          <a:xfrm>
-            <a:off x="6345936" y="3108960"/>
-            <a:ext cx="2372868" cy="1280160"/>
+          <p:cNvPr id="14" name="Shape 12"/>
+          <p:cNvSpPr/>
+          <p:nvPr/>
+        </p:nvSpPr>
+        <p:spPr>
+          <a:xfrm>
+            <a:off x="731520" y="3314700"/>
+            <a:ext cx="640080" cy="640080"/>
+          </a:xfrm>
+          <a:prstGeom prst="ellipse">
+            <a:avLst/>
+          </a:prstGeom>
+          <a:solidFill>
+            <a:srgbClr val="3949AB"/>
+          </a:solidFill>
+          <a:ln w="12700">
+            <a:solidFill>
+              <a:srgbClr val="3949AB"/>
+            </a:solidFill>
+            <a:prstDash val="solid"/>
+          </a:ln>
+        </p:spPr>
+        <p:txBody>
+          <a:bodyPr/>
+          <a:lstStyle/>
+          <a:p>
+            <a:endParaRPr lang="es-ES"/>
+          </a:p>
+        </p:txBody>
+      </p:sp>
+      <p:sp>
+        <p:nvSpPr>
+          <p:cNvPr id="15" name="Text 13"/>
+          <p:cNvSpPr/>
+          <p:nvPr/>
+        </p:nvSpPr>
+        <p:spPr>
+          <a:xfrm>
+            <a:off x="731520" y="3314700"/>
+            <a:ext cx="640080" cy="640080"/>
           </a:xfrm>
           <a:prstGeom prst="rect">
             <a:avLst/>
@@ -2519,7 +3360,46 @@
               <a:buNone/>
             </a:pPr>
             <a:r>
-              <a:rPr lang="en-US" sz="1500" dirty="0">
+              <a:rPr lang="en-US" sz="2000" b="1" dirty="0">
+                <a:solidFill>
+                  <a:srgbClr val="FFFFFF"/>
+                </a:solidFill>
+                <a:latin typeface="Arial" pitchFamily="34" charset="0"/>
+                <a:ea typeface="Arial" pitchFamily="34" charset="-122"/>
+                <a:cs typeface="Arial" pitchFamily="34" charset="-120"/>
+              </a:rPr>
+              <a:t>3</a:t>
+            </a:r>
+            <a:endParaRPr lang="en-US" sz="2000" dirty="0"/>
+          </a:p>
+        </p:txBody>
+      </p:sp>
+      <p:sp>
+        <p:nvSpPr>
+          <p:cNvPr id="16" name="Text 14"/>
+          <p:cNvSpPr/>
+          <p:nvPr/>
+        </p:nvSpPr>
+        <p:spPr>
+          <a:xfrm>
+            <a:off x="1508760" y="2926080"/>
+            <a:ext cx="4288536" cy="1417320"/>
+          </a:xfrm>
+          <a:prstGeom prst="rect">
+            <a:avLst/>
+          </a:prstGeom>
+          <a:noFill/>
+          <a:ln/>
+        </p:spPr>
+        <p:txBody>
+          <a:bodyPr wrap="square" rtlCol="0" anchor="ctr"/>
+          <a:lstStyle/>
+          <a:p>
+            <a:pPr marL="0" indent="0">
+              <a:buNone/>
+            </a:pPr>
+            <a:r>
+              <a:rPr lang="en-US" sz="1600" dirty="0">
                 <a:solidFill>
                   <a:srgbClr val="212121"/>
                 </a:solidFill>
@@ -2527,78 +3407,22 @@
                 <a:ea typeface="Arial" pitchFamily="34" charset="-122"/>
                 <a:cs typeface="Arial" pitchFamily="34" charset="-120"/>
               </a:rPr>
-              <a:t>Aplicación</a:t>
+              <a:t>Una subred es pública o privada según su tabla de rutas, no según ningún atributo especial.</a:t>
             </a:r>
-            <a:endParaRPr lang="en-US" sz="1500" dirty="0"/>
-          </a:p>
-          <a:p>
-            <a:pPr marL="0" indent="0" algn="ctr">
-              <a:buNone/>
-            </a:pPr>
-            <a:r>
-              <a:rPr lang="en-US" sz="1500" dirty="0">
-                <a:solidFill>
-                  <a:srgbClr val="212121"/>
-                </a:solidFill>
-                <a:latin typeface="Arial" pitchFamily="34" charset="0"/>
-                <a:ea typeface="Arial" pitchFamily="34" charset="-122"/>
-                <a:cs typeface="Arial" pitchFamily="34" charset="-120"/>
-              </a:rPr>
-              <a:t>subred pública o privada según sesión</a:t>
-            </a:r>
-            <a:endParaRPr lang="en-US" sz="1500" dirty="0"/>
-          </a:p>
-        </p:txBody>
-      </p:sp>
-      <p:sp>
-        <p:nvSpPr>
-          <p:cNvPr id="14" name="Text 12"/>
-          <p:cNvSpPr/>
-          <p:nvPr/>
-        </p:nvSpPr>
-        <p:spPr>
-          <a:xfrm>
-            <a:off x="8718804" y="3063240"/>
-            <a:ext cx="502920" cy="1371600"/>
-          </a:xfrm>
-          <a:prstGeom prst="rect">
-            <a:avLst/>
-          </a:prstGeom>
-          <a:noFill/>
-          <a:ln/>
-        </p:spPr>
-        <p:txBody>
-          <a:bodyPr wrap="square" rtlCol="0" anchor="ctr"/>
-          <a:lstStyle/>
-          <a:p>
-            <a:pPr marL="0" indent="0" algn="ctr">
-              <a:buNone/>
-            </a:pPr>
-            <a:r>
-              <a:rPr lang="en-US" sz="2200" b="1" dirty="0">
-                <a:solidFill>
-                  <a:srgbClr val="3949AB"/>
-                </a:solidFill>
-                <a:latin typeface="Arial" pitchFamily="34" charset="0"/>
-                <a:ea typeface="Arial" pitchFamily="34" charset="-122"/>
-                <a:cs typeface="Arial" pitchFamily="34" charset="-120"/>
-              </a:rPr>
-              <a:t>→</a:t>
-            </a:r>
-            <a:endParaRPr lang="en-US" sz="2200" dirty="0"/>
-          </a:p>
-        </p:txBody>
-      </p:sp>
-      <p:sp>
-        <p:nvSpPr>
-          <p:cNvPr id="15" name="Shape 13"/>
-          <p:cNvSpPr/>
-          <p:nvPr/>
-        </p:nvSpPr>
-        <p:spPr>
-          <a:xfrm>
-            <a:off x="9176004" y="3063240"/>
-            <a:ext cx="2464308" cy="1371600"/>
+            <a:endParaRPr lang="en-US" sz="1600" dirty="0"/>
+          </a:p>
+        </p:txBody>
+      </p:sp>
+      <p:sp>
+        <p:nvSpPr>
+          <p:cNvPr id="17" name="Shape 15"/>
+          <p:cNvSpPr/>
+          <p:nvPr/>
+        </p:nvSpPr>
+        <p:spPr>
+          <a:xfrm>
+            <a:off x="6208776" y="2926080"/>
+            <a:ext cx="5431536" cy="1417320"/>
           </a:xfrm>
           <a:prstGeom prst="roundRect">
             <a:avLst/>
@@ -2623,14 +3447,46 @@
       </p:sp>
       <p:sp>
         <p:nvSpPr>
-          <p:cNvPr id="16" name="Text 14"/>
-          <p:cNvSpPr/>
-          <p:nvPr/>
-        </p:nvSpPr>
-        <p:spPr>
-          <a:xfrm>
-            <a:off x="9221724" y="3108960"/>
-            <a:ext cx="2372868" cy="1280160"/>
+          <p:cNvPr id="18" name="Shape 16"/>
+          <p:cNvSpPr/>
+          <p:nvPr/>
+        </p:nvSpPr>
+        <p:spPr>
+          <a:xfrm>
+            <a:off x="6391656" y="3314700"/>
+            <a:ext cx="640080" cy="640080"/>
+          </a:xfrm>
+          <a:prstGeom prst="ellipse">
+            <a:avLst/>
+          </a:prstGeom>
+          <a:solidFill>
+            <a:srgbClr val="3949AB"/>
+          </a:solidFill>
+          <a:ln w="12700">
+            <a:solidFill>
+              <a:srgbClr val="3949AB"/>
+            </a:solidFill>
+            <a:prstDash val="solid"/>
+          </a:ln>
+        </p:spPr>
+        <p:txBody>
+          <a:bodyPr/>
+          <a:lstStyle/>
+          <a:p>
+            <a:endParaRPr lang="es-ES"/>
+          </a:p>
+        </p:txBody>
+      </p:sp>
+      <p:sp>
+        <p:nvSpPr>
+          <p:cNvPr id="19" name="Text 17"/>
+          <p:cNvSpPr/>
+          <p:nvPr/>
+        </p:nvSpPr>
+        <p:spPr>
+          <a:xfrm>
+            <a:off x="6391656" y="3314700"/>
+            <a:ext cx="640080" cy="640080"/>
           </a:xfrm>
           <a:prstGeom prst="rect">
             <a:avLst/>
@@ -2646,7 +3502,46 @@
               <a:buNone/>
             </a:pPr>
             <a:r>
-              <a:rPr lang="en-US" sz="1500" dirty="0">
+              <a:rPr lang="en-US" sz="2000" b="1" dirty="0">
+                <a:solidFill>
+                  <a:srgbClr val="FFFFFF"/>
+                </a:solidFill>
+                <a:latin typeface="Arial" pitchFamily="34" charset="0"/>
+                <a:ea typeface="Arial" pitchFamily="34" charset="-122"/>
+                <a:cs typeface="Arial" pitchFamily="34" charset="-120"/>
+              </a:rPr>
+              <a:t>4</a:t>
+            </a:r>
+            <a:endParaRPr lang="en-US" sz="2000" dirty="0"/>
+          </a:p>
+        </p:txBody>
+      </p:sp>
+      <p:sp>
+        <p:nvSpPr>
+          <p:cNvPr id="20" name="Text 18"/>
+          <p:cNvSpPr/>
+          <p:nvPr/>
+        </p:nvSpPr>
+        <p:spPr>
+          <a:xfrm>
+            <a:off x="7168896" y="2926080"/>
+            <a:ext cx="4288536" cy="1417320"/>
+          </a:xfrm>
+          <a:prstGeom prst="rect">
+            <a:avLst/>
+          </a:prstGeom>
+          <a:noFill/>
+          <a:ln/>
+        </p:spPr>
+        <p:txBody>
+          <a:bodyPr wrap="square" rtlCol="0" anchor="ctr"/>
+          <a:lstStyle/>
+          <a:p>
+            <a:pPr marL="0" indent="0">
+              <a:buNone/>
+            </a:pPr>
+            <a:r>
+              <a:rPr lang="en-US" sz="1600" dirty="0">
                 <a:solidFill>
                   <a:srgbClr val="212121"/>
                 </a:solidFill>
@@ -2654,16 +3549,141 @@
                 <a:ea typeface="Arial" pitchFamily="34" charset="-122"/>
                 <a:cs typeface="Arial" pitchFamily="34" charset="-120"/>
               </a:rPr>
-              <a:t>Base de datos</a:t>
+              <a:t>IGW + entrada 0.0.0.0/0 en la tabla de rutas = subred pública. Sin esa combinación, queda aislada.</a:t>
             </a:r>
-            <a:endParaRPr lang="en-US" sz="1500" dirty="0"/>
-          </a:p>
+            <a:endParaRPr lang="en-US" sz="1600" dirty="0"/>
+          </a:p>
+        </p:txBody>
+      </p:sp>
+      <p:sp>
+        <p:nvSpPr>
+          <p:cNvPr id="21" name="Shape 19"/>
+          <p:cNvSpPr/>
+          <p:nvPr/>
+        </p:nvSpPr>
+        <p:spPr>
+          <a:xfrm>
+            <a:off x="548640" y="4572000"/>
+            <a:ext cx="5431536" cy="1417320"/>
+          </a:xfrm>
+          <a:prstGeom prst="roundRect">
+            <a:avLst/>
+          </a:prstGeom>
+          <a:solidFill>
+            <a:srgbClr val="E8EAF6"/>
+          </a:solidFill>
+          <a:ln w="15875">
+            <a:solidFill>
+              <a:srgbClr val="3949AB"/>
+            </a:solidFill>
+            <a:prstDash val="solid"/>
+          </a:ln>
+        </p:spPr>
+        <p:txBody>
+          <a:bodyPr/>
+          <a:lstStyle/>
+          <a:p>
+            <a:endParaRPr lang="es-ES"/>
+          </a:p>
+        </p:txBody>
+      </p:sp>
+      <p:sp>
+        <p:nvSpPr>
+          <p:cNvPr id="22" name="Shape 20"/>
+          <p:cNvSpPr/>
+          <p:nvPr/>
+        </p:nvSpPr>
+        <p:spPr>
+          <a:xfrm>
+            <a:off x="731520" y="4960620"/>
+            <a:ext cx="640080" cy="640080"/>
+          </a:xfrm>
+          <a:prstGeom prst="ellipse">
+            <a:avLst/>
+          </a:prstGeom>
+          <a:solidFill>
+            <a:srgbClr val="3949AB"/>
+          </a:solidFill>
+          <a:ln w="12700">
+            <a:solidFill>
+              <a:srgbClr val="3949AB"/>
+            </a:solidFill>
+            <a:prstDash val="solid"/>
+          </a:ln>
+        </p:spPr>
+        <p:txBody>
+          <a:bodyPr/>
+          <a:lstStyle/>
+          <a:p>
+            <a:endParaRPr lang="es-ES"/>
+          </a:p>
+        </p:txBody>
+      </p:sp>
+      <p:sp>
+        <p:nvSpPr>
+          <p:cNvPr id="23" name="Text 21"/>
+          <p:cNvSpPr/>
+          <p:nvPr/>
+        </p:nvSpPr>
+        <p:spPr>
+          <a:xfrm>
+            <a:off x="731520" y="4960620"/>
+            <a:ext cx="640080" cy="640080"/>
+          </a:xfrm>
+          <a:prstGeom prst="rect">
+            <a:avLst/>
+          </a:prstGeom>
+          <a:noFill/>
+          <a:ln/>
+        </p:spPr>
+        <p:txBody>
+          <a:bodyPr wrap="square" rtlCol="0" anchor="ctr"/>
+          <a:lstStyle/>
           <a:p>
             <a:pPr marL="0" indent="0" algn="ctr">
               <a:buNone/>
             </a:pPr>
             <a:r>
-              <a:rPr lang="en-US" sz="1500" dirty="0">
+              <a:rPr lang="en-US" sz="2000" b="1" dirty="0">
+                <a:solidFill>
+                  <a:srgbClr val="FFFFFF"/>
+                </a:solidFill>
+                <a:latin typeface="Arial" pitchFamily="34" charset="0"/>
+                <a:ea typeface="Arial" pitchFamily="34" charset="-122"/>
+                <a:cs typeface="Arial" pitchFamily="34" charset="-120"/>
+              </a:rPr>
+              <a:t>5</a:t>
+            </a:r>
+            <a:endParaRPr lang="en-US" sz="2000" dirty="0"/>
+          </a:p>
+        </p:txBody>
+      </p:sp>
+      <p:sp>
+        <p:nvSpPr>
+          <p:cNvPr id="24" name="Text 22"/>
+          <p:cNvSpPr/>
+          <p:nvPr/>
+        </p:nvSpPr>
+        <p:spPr>
+          <a:xfrm>
+            <a:off x="1508760" y="4572000"/>
+            <a:ext cx="4288536" cy="1417320"/>
+          </a:xfrm>
+          <a:prstGeom prst="rect">
+            <a:avLst/>
+          </a:prstGeom>
+          <a:noFill/>
+          <a:ln/>
+        </p:spPr>
+        <p:txBody>
+          <a:bodyPr wrap="square" rtlCol="0" anchor="ctr"/>
+          <a:lstStyle/>
+          <a:p>
+            <a:pPr marL="0" indent="0">
+              <a:buNone/>
+            </a:pPr>
+            <a:r>
+              <a:rPr lang="en-US" sz="1600" dirty="0">
                 <a:solidFill>
                   <a:srgbClr val="212121"/>
                 </a:solidFill>
@@ -2671,57 +3691,64 @@
                 <a:ea typeface="Arial" pitchFamily="34" charset="-122"/>
                 <a:cs typeface="Arial" pitchFamily="34" charset="-120"/>
               </a:rPr>
-              <a:t>subred privada, siempre</a:t>
+              <a:t>La base de datos va siempre en subred privada — la traducción práctica de la responsabilidad compartida a una regla de red.</a:t>
             </a:r>
-            <a:endParaRPr lang="en-US" sz="1500" dirty="0"/>
-          </a:p>
-        </p:txBody>
-      </p:sp>
-    </p:spTree>
-  </p:cSld>
-  <p:clrMapOvr>
-    <a:masterClrMapping/>
-  </p:clrMapOvr>
-</p:sld>
-</file>
-
-<file path=ppt/slides/slide12.xml><?xml version="1.0" encoding="utf-8"?>
-<p:sld xmlns:a="http://schemas.openxmlformats.org/drawingml/2006/main" xmlns:r="http://schemas.openxmlformats.org/officeDocument/2006/relationships" xmlns:p="http://schemas.openxmlformats.org/presentationml/2006/main">
-  <p:cSld name="Slide 12">
-    <p:spTree>
-      <p:nvGrpSpPr>
-        <p:cNvPr id="1" name=""/>
-        <p:cNvGrpSpPr/>
-        <p:nvPr/>
-      </p:nvGrpSpPr>
-      <p:grpSpPr>
-        <a:xfrm>
-          <a:off x="0" y="0"/>
-          <a:ext cx="0" cy="0"/>
-          <a:chOff x="0" y="0"/>
-          <a:chExt cx="0" cy="0"/>
-        </a:xfrm>
-      </p:grpSpPr>
-      <p:sp>
-        <p:nvSpPr>
-          <p:cNvPr id="2" name="Shape 0"/>
-          <p:cNvSpPr/>
-          <p:nvPr/>
-        </p:nvSpPr>
-        <p:spPr>
-          <a:xfrm>
-            <a:off x="0" y="0"/>
-            <a:ext cx="12188952" cy="777240"/>
-          </a:xfrm>
-          <a:prstGeom prst="rect">
+            <a:endParaRPr lang="en-US" sz="1600" dirty="0"/>
+          </a:p>
+        </p:txBody>
+      </p:sp>
+      <p:sp>
+        <p:nvSpPr>
+          <p:cNvPr id="25" name="Shape 23"/>
+          <p:cNvSpPr/>
+          <p:nvPr/>
+        </p:nvSpPr>
+        <p:spPr>
+          <a:xfrm>
+            <a:off x="6208776" y="4572000"/>
+            <a:ext cx="5431536" cy="1417320"/>
+          </a:xfrm>
+          <a:prstGeom prst="roundRect">
             <a:avLst/>
           </a:prstGeom>
           <a:solidFill>
-            <a:srgbClr val="1A237E"/>
+            <a:srgbClr val="E8EAF6"/>
+          </a:solidFill>
+          <a:ln w="15875">
+            <a:solidFill>
+              <a:srgbClr val="3949AB"/>
+            </a:solidFill>
+            <a:prstDash val="solid"/>
+          </a:ln>
+        </p:spPr>
+        <p:txBody>
+          <a:bodyPr/>
+          <a:lstStyle/>
+          <a:p>
+            <a:endParaRPr lang="es-ES"/>
+          </a:p>
+        </p:txBody>
+      </p:sp>
+      <p:sp>
+        <p:nvSpPr>
+          <p:cNvPr id="26" name="Shape 24"/>
+          <p:cNvSpPr/>
+          <p:nvPr/>
+        </p:nvSpPr>
+        <p:spPr>
+          <a:xfrm>
+            <a:off x="6391656" y="4960620"/>
+            <a:ext cx="640080" cy="640080"/>
+          </a:xfrm>
+          <a:prstGeom prst="ellipse">
+            <a:avLst/>
+          </a:prstGeom>
+          <a:solidFill>
+            <a:srgbClr val="3949AB"/>
           </a:solidFill>
           <a:ln w="12700">
             <a:solidFill>
-              <a:srgbClr val="1A237E"/>
+              <a:srgbClr val="3949AB"/>
             </a:solidFill>
             <a:prstDash val="solid"/>
           </a:ln>
@@ -2736,14 +3763,14 @@
       </p:sp>
       <p:sp>
         <p:nvSpPr>
-          <p:cNvPr id="3" name="Text 1"/>
-          <p:cNvSpPr/>
-          <p:nvPr/>
-        </p:nvSpPr>
-        <p:spPr>
-          <a:xfrm>
-            <a:off x="365760" y="0"/>
-            <a:ext cx="11457432" cy="777240"/>
+          <p:cNvPr id="27" name="Text 25"/>
+          <p:cNvSpPr/>
+          <p:nvPr/>
+        </p:nvSpPr>
+        <p:spPr>
+          <a:xfrm>
+            <a:off x="6391656" y="4960620"/>
+            <a:ext cx="640080" cy="640080"/>
           </a:xfrm>
           <a:prstGeom prst="rect">
             <a:avLst/>
@@ -2755,11 +3782,11 @@
           <a:bodyPr wrap="square" rtlCol="0" anchor="ctr"/>
           <a:lstStyle/>
           <a:p>
-            <a:pPr marL="0" indent="0">
+            <a:pPr marL="0" indent="0" algn="ctr">
               <a:buNone/>
             </a:pPr>
             <a:r>
-              <a:rPr lang="en-US" sz="2400" b="1" dirty="0">
+              <a:rPr lang="en-US" sz="2000" b="1" dirty="0">
                 <a:solidFill>
                   <a:srgbClr val="FFFFFF"/>
                 </a:solidFill>
@@ -2767,22 +3794,22 @@
                 <a:ea typeface="Arial" pitchFamily="34" charset="-122"/>
                 <a:cs typeface="Arial" pitchFamily="34" charset="-120"/>
               </a:rPr>
-              <a:t>Diagramar antes de construir</a:t>
+              <a:t>6</a:t>
             </a:r>
-            <a:endParaRPr lang="en-US" sz="2400" dirty="0"/>
-          </a:p>
-        </p:txBody>
-      </p:sp>
-      <p:sp>
-        <p:nvSpPr>
-          <p:cNvPr id="4" name="Text 2"/>
-          <p:cNvSpPr/>
-          <p:nvPr/>
-        </p:nvSpPr>
-        <p:spPr>
-          <a:xfrm>
-            <a:off x="548640" y="6473952"/>
-            <a:ext cx="11091672" cy="292608"/>
+            <a:endParaRPr lang="en-US" sz="2000" dirty="0"/>
+          </a:p>
+        </p:txBody>
+      </p:sp>
+      <p:sp>
+        <p:nvSpPr>
+          <p:cNvPr id="28" name="Text 26"/>
+          <p:cNvSpPr/>
+          <p:nvPr/>
+        </p:nvSpPr>
+        <p:spPr>
+          <a:xfrm>
+            <a:off x="7168896" y="4572000"/>
+            <a:ext cx="4288536" cy="1417320"/>
           </a:xfrm>
           <a:prstGeom prst="rect">
             <a:avLst/>
@@ -2792,406 +3819,13 @@
         </p:spPr>
         <p:txBody>
           <a:bodyPr wrap="square" rtlCol="0" anchor="ctr"/>
-          <a:lstStyle/>
-          <a:p>
-            <a:pPr marL="0" indent="0" algn="r">
-              <a:buNone/>
-            </a:pPr>
-            <a:r>
-              <a:rPr lang="en-US" sz="1100" dirty="0">
-                <a:solidFill>
-                  <a:srgbClr val="757575"/>
-                </a:solidFill>
-                <a:latin typeface="Arial" pitchFamily="34" charset="0"/>
-                <a:ea typeface="Arial" pitchFamily="34" charset="-122"/>
-                <a:cs typeface="Arial" pitchFamily="34" charset="-120"/>
-              </a:rPr>
-              <a:t>Introducción a la Nube Pública — Tema 2: Diseño de la red virtual</a:t>
-            </a:r>
-            <a:endParaRPr lang="en-US" sz="1100" dirty="0"/>
-          </a:p>
-        </p:txBody>
-      </p:sp>
-      <p:sp>
-        <p:nvSpPr>
-          <p:cNvPr id="5" name="Text 3"/>
-          <p:cNvSpPr/>
-          <p:nvPr/>
-        </p:nvSpPr>
-        <p:spPr>
-          <a:xfrm>
-            <a:off x="548640" y="1874520"/>
-            <a:ext cx="11091672" cy="1920240"/>
-          </a:xfrm>
-          <a:prstGeom prst="rect">
-            <a:avLst/>
-          </a:prstGeom>
-          <a:noFill/>
-          <a:ln/>
-        </p:spPr>
-        <p:txBody>
-          <a:bodyPr wrap="square" rtlCol="0" anchor="t"/>
           <a:lstStyle/>
           <a:p>
             <a:pPr marL="0" indent="0">
               <a:buNone/>
             </a:pPr>
             <a:r>
-              <a:rPr lang="en-US" sz="2100" dirty="0">
-                <a:solidFill>
-                  <a:srgbClr val="212121"/>
-                </a:solidFill>
-                <a:latin typeface="Arial" pitchFamily="34" charset="0"/>
-                <a:ea typeface="Arial" pitchFamily="34" charset="-122"/>
-                <a:cs typeface="Arial" pitchFamily="34" charset="-120"/>
-              </a:rPr>
-              <a:t>Antes de crear una sola subred en consola, dibuja el reparto en papel: cuántas subredes, en qué zonas, qué rango CIDR tiene cada una, cuáles son públicas y cuáles privadas. No es burocracia — es la única forma de detectar un solapamiento antes de que cueste deshacerlo en consola.</a:t>
-            </a:r>
-            <a:endParaRPr lang="en-US" sz="2100" dirty="0"/>
-          </a:p>
-        </p:txBody>
-      </p:sp>
-      <p:sp>
-        <p:nvSpPr>
-          <p:cNvPr id="6" name="Shape 4"/>
-          <p:cNvSpPr/>
-          <p:nvPr/>
-        </p:nvSpPr>
-        <p:spPr>
-          <a:xfrm>
-            <a:off x="548640" y="4160520"/>
-            <a:ext cx="11091672" cy="1463040"/>
-          </a:xfrm>
-          <a:prstGeom prst="roundRect">
-            <a:avLst/>
-          </a:prstGeom>
-          <a:solidFill>
-            <a:srgbClr val="FFF8E1"/>
-          </a:solidFill>
-          <a:ln w="19050">
-            <a:solidFill>
-              <a:srgbClr val="FFA000"/>
-            </a:solidFill>
-            <a:prstDash val="solid"/>
-          </a:ln>
-        </p:spPr>
-        <p:txBody>
-          <a:bodyPr/>
-          <a:lstStyle/>
-          <a:p>
-            <a:endParaRPr lang="es-ES"/>
-          </a:p>
-        </p:txBody>
-      </p:sp>
-      <p:sp>
-        <p:nvSpPr>
-          <p:cNvPr id="7" name="Text 5"/>
-          <p:cNvSpPr/>
-          <p:nvPr/>
-        </p:nvSpPr>
-        <p:spPr>
-          <a:xfrm>
-            <a:off x="822960" y="4251960"/>
-            <a:ext cx="10543032" cy="1280160"/>
-          </a:xfrm>
-          <a:prstGeom prst="rect">
-            <a:avLst/>
-          </a:prstGeom>
-          <a:noFill/>
-          <a:ln/>
-        </p:spPr>
-        <p:txBody>
-          <a:bodyPr wrap="square" rtlCol="0" anchor="ctr"/>
-          <a:lstStyle/>
-          <a:p>
-            <a:pPr marL="0" indent="0">
-              <a:buNone/>
-            </a:pPr>
-            <a:r>
-              <a:rPr lang="en-US" sz="2100" dirty="0">
-                <a:solidFill>
-                  <a:srgbClr val="212121"/>
-                </a:solidFill>
-                <a:latin typeface="Arial" pitchFamily="34" charset="0"/>
-                <a:ea typeface="Arial" pitchFamily="34" charset="-122"/>
-                <a:cs typeface="Arial" pitchFamily="34" charset="-120"/>
-              </a:rPr>
-              <a:t>La plantilla que vas a rellenar en la actividad necesita cuatro columnas: nombre de la subred, rango CIDR, zona de disponibilidad, y si es pública o privada.</a:t>
-            </a:r>
-            <a:endParaRPr lang="en-US" sz="2100" dirty="0"/>
-          </a:p>
-        </p:txBody>
-      </p:sp>
-    </p:spTree>
-  </p:cSld>
-  <p:clrMapOvr>
-    <a:masterClrMapping/>
-  </p:clrMapOvr>
-</p:sld>
-</file>
-
-<file path=ppt/slides/slide13.xml><?xml version="1.0" encoding="utf-8"?>
-<p:sld xmlns:a="http://schemas.openxmlformats.org/drawingml/2006/main" xmlns:r="http://schemas.openxmlformats.org/officeDocument/2006/relationships" xmlns:p="http://schemas.openxmlformats.org/presentationml/2006/main">
-  <p:cSld name="Slide 13">
-    <p:spTree>
-      <p:nvGrpSpPr>
-        <p:cNvPr id="1" name=""/>
-        <p:cNvGrpSpPr/>
-        <p:nvPr/>
-      </p:nvGrpSpPr>
-      <p:grpSpPr>
-        <a:xfrm>
-          <a:off x="0" y="0"/>
-          <a:ext cx="0" cy="0"/>
-          <a:chOff x="0" y="0"/>
-          <a:chExt cx="0" cy="0"/>
-        </a:xfrm>
-      </p:grpSpPr>
-      <p:sp>
-        <p:nvSpPr>
-          <p:cNvPr id="2" name="Shape 0"/>
-          <p:cNvSpPr/>
-          <p:nvPr/>
-        </p:nvSpPr>
-        <p:spPr>
-          <a:xfrm>
-            <a:off x="0" y="0"/>
-            <a:ext cx="12188952" cy="777240"/>
-          </a:xfrm>
-          <a:prstGeom prst="rect">
-            <a:avLst/>
-          </a:prstGeom>
-          <a:solidFill>
-            <a:srgbClr val="1A237E"/>
-          </a:solidFill>
-          <a:ln w="12700">
-            <a:solidFill>
-              <a:srgbClr val="1A237E"/>
-            </a:solidFill>
-            <a:prstDash val="solid"/>
-          </a:ln>
-        </p:spPr>
-        <p:txBody>
-          <a:bodyPr/>
-          <a:lstStyle/>
-          <a:p>
-            <a:endParaRPr lang="es-ES"/>
-          </a:p>
-        </p:txBody>
-      </p:sp>
-      <p:sp>
-        <p:nvSpPr>
-          <p:cNvPr id="3" name="Text 1"/>
-          <p:cNvSpPr/>
-          <p:nvPr/>
-        </p:nvSpPr>
-        <p:spPr>
-          <a:xfrm>
-            <a:off x="365760" y="0"/>
-            <a:ext cx="11457432" cy="777240"/>
-          </a:xfrm>
-          <a:prstGeom prst="rect">
-            <a:avLst/>
-          </a:prstGeom>
-          <a:noFill/>
-          <a:ln/>
-        </p:spPr>
-        <p:txBody>
-          <a:bodyPr wrap="square" rtlCol="0" anchor="ctr"/>
-          <a:lstStyle/>
-          <a:p>
-            <a:pPr marL="0" indent="0">
-              <a:buNone/>
-            </a:pPr>
-            <a:r>
-              <a:rPr lang="en-US" sz="2400" b="1" dirty="0">
-                <a:solidFill>
-                  <a:srgbClr val="FFFFFF"/>
-                </a:solidFill>
-                <a:latin typeface="Arial" pitchFamily="34" charset="0"/>
-                <a:ea typeface="Arial" pitchFamily="34" charset="-122"/>
-                <a:cs typeface="Arial" pitchFamily="34" charset="-120"/>
-              </a:rPr>
-              <a:t>Ideas clave</a:t>
-            </a:r>
-            <a:endParaRPr lang="en-US" sz="2400" dirty="0"/>
-          </a:p>
-        </p:txBody>
-      </p:sp>
-      <p:sp>
-        <p:nvSpPr>
-          <p:cNvPr id="4" name="Text 2"/>
-          <p:cNvSpPr/>
-          <p:nvPr/>
-        </p:nvSpPr>
-        <p:spPr>
-          <a:xfrm>
-            <a:off x="548640" y="6473952"/>
-            <a:ext cx="11091672" cy="292608"/>
-          </a:xfrm>
-          <a:prstGeom prst="rect">
-            <a:avLst/>
-          </a:prstGeom>
-          <a:noFill/>
-          <a:ln/>
-        </p:spPr>
-        <p:txBody>
-          <a:bodyPr wrap="square" rtlCol="0" anchor="ctr"/>
-          <a:lstStyle/>
-          <a:p>
-            <a:pPr marL="0" indent="0" algn="r">
-              <a:buNone/>
-            </a:pPr>
-            <a:r>
-              <a:rPr lang="en-US" sz="1100" dirty="0">
-                <a:solidFill>
-                  <a:srgbClr val="757575"/>
-                </a:solidFill>
-                <a:latin typeface="Arial" pitchFamily="34" charset="0"/>
-                <a:ea typeface="Arial" pitchFamily="34" charset="-122"/>
-                <a:cs typeface="Arial" pitchFamily="34" charset="-120"/>
-              </a:rPr>
-              <a:t>Introducción a la Nube Pública — Tema 2: Diseño de la red virtual</a:t>
-            </a:r>
-            <a:endParaRPr lang="en-US" sz="1100" dirty="0"/>
-          </a:p>
-        </p:txBody>
-      </p:sp>
-      <p:sp>
-        <p:nvSpPr>
-          <p:cNvPr id="5" name="Text 3"/>
-          <p:cNvSpPr/>
-          <p:nvPr/>
-        </p:nvSpPr>
-        <p:spPr>
-          <a:xfrm>
-            <a:off x="548640" y="1234440"/>
-            <a:ext cx="11091672" cy="4297680"/>
-          </a:xfrm>
-          <a:prstGeom prst="rect">
-            <a:avLst/>
-          </a:prstGeom>
-          <a:noFill/>
-          <a:ln/>
-        </p:spPr>
-        <p:txBody>
-          <a:bodyPr wrap="square" rtlCol="0" anchor="t"/>
-          <a:lstStyle/>
-          <a:p>
-            <a:pPr marL="190500" indent="-190500">
-              <a:spcAft>
-                <a:spcPts val="1800"/>
-              </a:spcAft>
-              <a:buSzPct val="100000"/>
-              <a:buChar char="•"/>
-            </a:pPr>
-            <a:r>
-              <a:rPr lang="en-US" sz="1800" dirty="0">
-                <a:solidFill>
-                  <a:srgbClr val="212121"/>
-                </a:solidFill>
-                <a:latin typeface="Arial" pitchFamily="34" charset="0"/>
-                <a:ea typeface="Arial" pitchFamily="34" charset="-122"/>
-                <a:cs typeface="Arial" pitchFamily="34" charset="-120"/>
-              </a:rPr>
-              <a:t>Una VPC es tu propio espacio de red aislado dentro de AWS — vacío al crearla, con todo por construir dentro.</a:t>
-            </a:r>
-            <a:endParaRPr lang="en-US" sz="1800" dirty="0"/>
-          </a:p>
-          <a:p>
-            <a:pPr marL="190500" indent="-190500">
-              <a:spcAft>
-                <a:spcPts val="1800"/>
-              </a:spcAft>
-              <a:buSzPct val="100000"/>
-              <a:buChar char="•"/>
-            </a:pPr>
-            <a:r>
-              <a:rPr lang="en-US" sz="1800" dirty="0">
-                <a:solidFill>
-                  <a:srgbClr val="212121"/>
-                </a:solidFill>
-                <a:latin typeface="Arial" pitchFamily="34" charset="0"/>
-                <a:ea typeface="Arial" pitchFamily="34" charset="-122"/>
-                <a:cs typeface="Arial" pitchFamily="34" charset="-120"/>
-              </a:rPr>
-              <a:t>CIDR expresa un rango de direcciones con un prefijo (/16, /24...): cuanto más pequeño el número, más direcciones caben.</a:t>
-            </a:r>
-            <a:endParaRPr lang="en-US" sz="1800" dirty="0"/>
-          </a:p>
-          <a:p>
-            <a:pPr marL="190500" indent="-190500">
-              <a:spcAft>
-                <a:spcPts val="1800"/>
-              </a:spcAft>
-              <a:buSzPct val="100000"/>
-              <a:buChar char="•"/>
-            </a:pPr>
-            <a:r>
-              <a:rPr lang="en-US" sz="1800" dirty="0">
-                <a:solidFill>
-                  <a:srgbClr val="212121"/>
-                </a:solidFill>
-                <a:latin typeface="Arial" pitchFamily="34" charset="0"/>
-                <a:ea typeface="Arial" pitchFamily="34" charset="-122"/>
-                <a:cs typeface="Arial" pitchFamily="34" charset="-120"/>
-              </a:rPr>
-              <a:t>Una subred es pública o privada según su tabla de rutas, no según ningún atributo especial.</a:t>
-            </a:r>
-            <a:endParaRPr lang="en-US" sz="1800" dirty="0"/>
-          </a:p>
-          <a:p>
-            <a:pPr marL="190500" indent="-190500">
-              <a:spcAft>
-                <a:spcPts val="1800"/>
-              </a:spcAft>
-              <a:buSzPct val="100000"/>
-              <a:buChar char="•"/>
-            </a:pPr>
-            <a:r>
-              <a:rPr lang="en-US" sz="1800" dirty="0">
-                <a:solidFill>
-                  <a:srgbClr val="212121"/>
-                </a:solidFill>
-                <a:latin typeface="Arial" pitchFamily="34" charset="0"/>
-                <a:ea typeface="Arial" pitchFamily="34" charset="-122"/>
-                <a:cs typeface="Arial" pitchFamily="34" charset="-120"/>
-              </a:rPr>
-              <a:t>Pasarela de internet (IGW) + entrada 0.0.0.0/0 en la tabla de rutas = subred pública.</a:t>
-            </a:r>
-            <a:endParaRPr lang="en-US" sz="1800" dirty="0"/>
-          </a:p>
-          <a:p>
-            <a:pPr marL="190500" indent="-190500">
-              <a:spcAft>
-                <a:spcPts val="1800"/>
-              </a:spcAft>
-              <a:buSzPct val="100000"/>
-              <a:buChar char="•"/>
-            </a:pPr>
-            <a:r>
-              <a:rPr lang="en-US" sz="1800" dirty="0">
-                <a:solidFill>
-                  <a:srgbClr val="212121"/>
-                </a:solidFill>
-                <a:latin typeface="Arial" pitchFamily="34" charset="0"/>
-                <a:ea typeface="Arial" pitchFamily="34" charset="-122"/>
-                <a:cs typeface="Arial" pitchFamily="34" charset="-120"/>
-              </a:rPr>
-              <a:t>La base de datos va siempre en subred privada — traducción práctica del modelo de responsabilidad compartida a una regla de red.</a:t>
-            </a:r>
-            <a:endParaRPr lang="en-US" sz="1800" dirty="0"/>
-          </a:p>
-          <a:p>
-            <a:pPr marL="190500" indent="-190500">
-              <a:spcAft>
-                <a:spcPts val="1800"/>
-              </a:spcAft>
-              <a:buSzPct val="100000"/>
-              <a:buChar char="•"/>
-            </a:pPr>
-            <a:r>
-              <a:rPr lang="en-US" sz="1800" dirty="0">
+              <a:rPr lang="en-US" sz="1600" dirty="0">
                 <a:solidFill>
                   <a:srgbClr val="212121"/>
                 </a:solidFill>
@@ -3201,7 +3835,7 @@
               </a:rPr>
               <a:t>Diagramar el reparto de subredes en papel antes de construir evita solapamientos y subredes olvidadas.</a:t>
             </a:r>
-            <a:endParaRPr lang="en-US" sz="1800" dirty="0"/>
+            <a:endParaRPr lang="en-US" sz="1600" dirty="0"/>
           </a:p>
         </p:txBody>
       </p:sp>
@@ -3295,7 +3929,7 @@
                 <a:ea typeface="Arial" pitchFamily="34" charset="-122"/>
                 <a:cs typeface="Arial" pitchFamily="34" charset="-120"/>
               </a:rPr>
-              <a:t>Hoy diseñas el espacio donde vive todo lo demás</a:t>
+              <a:t>Diseño de la red virtual</a:t>
             </a:r>
             <a:endParaRPr lang="en-US" sz="2400" dirty="0"/>
           </a:p>
@@ -3342,14 +3976,46 @@
       </p:sp>
       <p:sp>
         <p:nvSpPr>
-          <p:cNvPr id="5" name="Text 3"/>
-          <p:cNvSpPr/>
-          <p:nvPr/>
-        </p:nvSpPr>
-        <p:spPr>
-          <a:xfrm>
-            <a:off x="548640" y="1737360"/>
-            <a:ext cx="11091672" cy="1828800"/>
+          <p:cNvPr id="5" name="Shape 3"/>
+          <p:cNvSpPr/>
+          <p:nvPr/>
+        </p:nvSpPr>
+        <p:spPr>
+          <a:xfrm>
+            <a:off x="548640" y="1280160"/>
+            <a:ext cx="11091672" cy="1554480"/>
+          </a:xfrm>
+          <a:prstGeom prst="roundRect">
+            <a:avLst/>
+          </a:prstGeom>
+          <a:solidFill>
+            <a:srgbClr val="E8EAF6"/>
+          </a:solidFill>
+          <a:ln w="15875">
+            <a:solidFill>
+              <a:srgbClr val="3949AB"/>
+            </a:solidFill>
+            <a:prstDash val="solid"/>
+          </a:ln>
+        </p:spPr>
+        <p:txBody>
+          <a:bodyPr/>
+          <a:lstStyle/>
+          <a:p>
+            <a:endParaRPr lang="es-ES"/>
+          </a:p>
+        </p:txBody>
+      </p:sp>
+      <p:sp>
+        <p:nvSpPr>
+          <p:cNvPr id="6" name="Text 4"/>
+          <p:cNvSpPr/>
+          <p:nvPr/>
+        </p:nvSpPr>
+        <p:spPr>
+          <a:xfrm>
+            <a:off x="731520" y="1353312"/>
+            <a:ext cx="10725912" cy="548640"/>
           </a:xfrm>
           <a:prstGeom prst="rect">
             <a:avLst/>
@@ -3358,14 +4024,53 @@
           <a:ln/>
         </p:spPr>
         <p:txBody>
-          <a:bodyPr wrap="square" rtlCol="0" anchor="t"/>
+          <a:bodyPr wrap="square" rtlCol="0" anchor="ctr"/>
           <a:lstStyle/>
           <a:p>
             <a:pPr marL="0" indent="0">
               <a:buNone/>
             </a:pPr>
             <a:r>
-              <a:rPr lang="en-US" sz="2200" dirty="0">
+              <a:rPr lang="en-US" sz="2200" b="1" dirty="0">
+                <a:solidFill>
+                  <a:srgbClr val="1A237E"/>
+                </a:solidFill>
+                <a:latin typeface="Arial" pitchFamily="34" charset="0"/>
+                <a:ea typeface="Arial" pitchFamily="34" charset="-122"/>
+                <a:cs typeface="Arial" pitchFamily="34" charset="-120"/>
+              </a:rPr>
+              <a:t>S3 no necesitó ni una decisión de red</a:t>
+            </a:r>
+            <a:endParaRPr lang="en-US" sz="2200" dirty="0"/>
+          </a:p>
+        </p:txBody>
+      </p:sp>
+      <p:sp>
+        <p:nvSpPr>
+          <p:cNvPr id="7" name="Text 5"/>
+          <p:cNvSpPr/>
+          <p:nvPr/>
+        </p:nvSpPr>
+        <p:spPr>
+          <a:xfrm>
+            <a:off x="731520" y="1901952"/>
+            <a:ext cx="10725912" cy="859536"/>
+          </a:xfrm>
+          <a:prstGeom prst="rect">
+            <a:avLst/>
+          </a:prstGeom>
+          <a:noFill/>
+          <a:ln/>
+        </p:spPr>
+        <p:txBody>
+          <a:bodyPr wrap="square" rtlCol="0" anchor="t"/>
+          <a:lstStyle/>
+          <a:p>
+            <a:pPr marL="0" indent="0">
+              <a:buNone/>
+            </a:pPr>
+            <a:r>
+              <a:rPr lang="en-US" sz="1800" dirty="0">
                 <a:solidFill>
                   <a:srgbClr val="212121"/>
                 </a:solidFill>
@@ -3373,22 +4078,22 @@
                 <a:ea typeface="Arial" pitchFamily="34" charset="-122"/>
                 <a:cs typeface="Arial" pitchFamily="34" charset="-120"/>
               </a:rPr>
-              <a:t>El front que publicaste la sesión pasada no necesitó ni una decisión de red: S3 ya viene con su propia conectividad puesta. Eso ha sido la excepción, no la norma. Casi todo lo demás que vas a construir en este módulo va a vivir dentro de un espacio con reglas propias.</a:t>
+              <a:t>Viene con su propia conectividad puesta. Eso ha sido la excepción, no la norma.</a:t>
             </a:r>
-            <a:endParaRPr lang="en-US" sz="2200" dirty="0"/>
-          </a:p>
-        </p:txBody>
-      </p:sp>
-      <p:sp>
-        <p:nvSpPr>
-          <p:cNvPr id="6" name="Shape 4"/>
-          <p:cNvSpPr/>
-          <p:nvPr/>
-        </p:nvSpPr>
-        <p:spPr>
-          <a:xfrm>
-            <a:off x="548640" y="3886200"/>
-            <a:ext cx="11091672" cy="1280160"/>
+            <a:endParaRPr lang="en-US" sz="1800" dirty="0"/>
+          </a:p>
+        </p:txBody>
+      </p:sp>
+      <p:sp>
+        <p:nvSpPr>
+          <p:cNvPr id="8" name="Shape 6"/>
+          <p:cNvSpPr/>
+          <p:nvPr/>
+        </p:nvSpPr>
+        <p:spPr>
+          <a:xfrm>
+            <a:off x="548640" y="3200400"/>
+            <a:ext cx="11091672" cy="1600200"/>
           </a:xfrm>
           <a:prstGeom prst="roundRect">
             <a:avLst/>
@@ -3396,7 +4101,7 @@
           <a:solidFill>
             <a:srgbClr val="FFF8E1"/>
           </a:solidFill>
-          <a:ln w="19050">
+          <a:ln w="28575">
             <a:solidFill>
               <a:srgbClr val="FFA000"/>
             </a:solidFill>
@@ -3413,14 +4118,14 @@
       </p:sp>
       <p:sp>
         <p:nvSpPr>
-          <p:cNvPr id="7" name="Text 5"/>
-          <p:cNvSpPr/>
-          <p:nvPr/>
-        </p:nvSpPr>
-        <p:spPr>
-          <a:xfrm>
-            <a:off x="822960" y="3977640"/>
-            <a:ext cx="10543032" cy="1097280"/>
+          <p:cNvPr id="9" name="Text 7"/>
+          <p:cNvSpPr/>
+          <p:nvPr/>
+        </p:nvSpPr>
+        <p:spPr>
+          <a:xfrm>
+            <a:off x="822960" y="3310128"/>
+            <a:ext cx="10543032" cy="1380744"/>
           </a:xfrm>
           <a:prstGeom prst="rect">
             <a:avLst/>
@@ -3429,14 +4134,32 @@
           <a:ln/>
         </p:spPr>
         <p:txBody>
-          <a:bodyPr wrap="square" rtlCol="0" anchor="ctr"/>
+          <a:bodyPr wrap="square" rtlCol="0" anchor="t"/>
           <a:lstStyle/>
           <a:p>
             <a:pPr marL="0" indent="0">
               <a:buNone/>
             </a:pPr>
             <a:r>
-              <a:rPr lang="en-US" sz="2000" dirty="0">
+              <a:rPr lang="en-US" sz="2000" b="1" dirty="0">
+                <a:solidFill>
+                  <a:srgbClr val="1A237E"/>
+                </a:solidFill>
+                <a:latin typeface="Arial" pitchFamily="34" charset="0"/>
+                <a:ea typeface="Arial" pitchFamily="34" charset="-122"/>
+                <a:cs typeface="Arial" pitchFamily="34" charset="-120"/>
+              </a:rPr>
+              <a:t>Casi todo lo demás vive dentro de un espacio con reglas propias
+</a:t>
+            </a:r>
+            <a:endParaRPr lang="en-US" sz="2000" dirty="0"/>
+          </a:p>
+          <a:p>
+            <a:pPr marL="0" indent="0">
+              <a:buNone/>
+            </a:pPr>
+            <a:r>
+              <a:rPr lang="en-US" sz="1900" dirty="0">
                 <a:solidFill>
                   <a:srgbClr val="212121"/>
                 </a:solidFill>
@@ -3444,9 +4167,48 @@
                 <a:ea typeface="Arial" pitchFamily="34" charset="-122"/>
                 <a:cs typeface="Arial" pitchFamily="34" charset="-120"/>
               </a:rPr>
-              <a:t>Hoy diseñas ese espacio: primero en papel, después en consola, repartido en dos zonas de disponibilidad. En la Actividad 2.1 lo construyes tú mismo, siguiendo tu propio diseño.</a:t>
+              <a:t>Partes abiertas a internet y partes que no lo están nunca. Hoy diseñas ese espacio: primero en papel, después en consola, repartido en dos zonas de disponibilidad.</a:t>
             </a:r>
             <a:endParaRPr lang="en-US" sz="2000" dirty="0"/>
+          </a:p>
+        </p:txBody>
+      </p:sp>
+      <p:sp>
+        <p:nvSpPr>
+          <p:cNvPr id="10" name="Text 8"/>
+          <p:cNvSpPr/>
+          <p:nvPr/>
+        </p:nvSpPr>
+        <p:spPr>
+          <a:xfrm>
+            <a:off x="548640" y="5074920"/>
+            <a:ext cx="11091672" cy="548640"/>
+          </a:xfrm>
+          <a:prstGeom prst="rect">
+            <a:avLst/>
+          </a:prstGeom>
+          <a:noFill/>
+          <a:ln/>
+        </p:spPr>
+        <p:txBody>
+          <a:bodyPr wrap="square" rtlCol="0" anchor="t"/>
+          <a:lstStyle/>
+          <a:p>
+            <a:pPr marL="0" indent="0" algn="ctr">
+              <a:buNone/>
+            </a:pPr>
+            <a:r>
+              <a:rPr lang="en-US" sz="1800" i="1" dirty="0">
+                <a:solidFill>
+                  <a:srgbClr val="757575"/>
+                </a:solidFill>
+                <a:latin typeface="Arial" pitchFamily="34" charset="0"/>
+                <a:ea typeface="Arial" pitchFamily="34" charset="-122"/>
+                <a:cs typeface="Arial" pitchFamily="34" charset="-120"/>
+              </a:rPr>
+              <a:t>En la Actividad 2.1 lo construyes tú mismo, siguiendo tu propio diseño.</a:t>
+            </a:r>
+            <a:endParaRPr lang="en-US" sz="1800" dirty="0"/>
           </a:p>
         </p:txBody>
       </p:sp>
@@ -3540,7 +4302,7 @@
                 <a:ea typeface="Arial" pitchFamily="34" charset="-122"/>
                 <a:cs typeface="Arial" pitchFamily="34" charset="-120"/>
               </a:rPr>
-              <a:t>Red virtual privada (VPC)</a:t>
+              <a:t>Red virtual privada: la VPC</a:t>
             </a:r>
             <a:endParaRPr lang="en-US" sz="2400" dirty="0"/>
           </a:p>
@@ -3587,14 +4349,46 @@
       </p:sp>
       <p:sp>
         <p:nvSpPr>
-          <p:cNvPr id="5" name="Text 3"/>
-          <p:cNvSpPr/>
-          <p:nvPr/>
-        </p:nvSpPr>
-        <p:spPr>
-          <a:xfrm>
-            <a:off x="548640" y="1280160"/>
-            <a:ext cx="11091672" cy="1737360"/>
+          <p:cNvPr id="5" name="Shape 3"/>
+          <p:cNvSpPr/>
+          <p:nvPr/>
+        </p:nvSpPr>
+        <p:spPr>
+          <a:xfrm>
+            <a:off x="548640" y="1188720"/>
+            <a:ext cx="11091672" cy="1417320"/>
+          </a:xfrm>
+          <a:prstGeom prst="roundRect">
+            <a:avLst/>
+          </a:prstGeom>
+          <a:solidFill>
+            <a:srgbClr val="E8EAF6"/>
+          </a:solidFill>
+          <a:ln w="15875">
+            <a:solidFill>
+              <a:srgbClr val="3949AB"/>
+            </a:solidFill>
+            <a:prstDash val="solid"/>
+          </a:ln>
+        </p:spPr>
+        <p:txBody>
+          <a:bodyPr/>
+          <a:lstStyle/>
+          <a:p>
+            <a:endParaRPr lang="es-ES"/>
+          </a:p>
+        </p:txBody>
+      </p:sp>
+      <p:sp>
+        <p:nvSpPr>
+          <p:cNvPr id="6" name="Text 4"/>
+          <p:cNvSpPr/>
+          <p:nvPr/>
+        </p:nvSpPr>
+        <p:spPr>
+          <a:xfrm>
+            <a:off x="731520" y="1261872"/>
+            <a:ext cx="10725912" cy="548640"/>
           </a:xfrm>
           <a:prstGeom prst="rect">
             <a:avLst/>
@@ -3603,14 +4397,53 @@
           <a:ln/>
         </p:spPr>
         <p:txBody>
-          <a:bodyPr wrap="square" rtlCol="0" anchor="t"/>
+          <a:bodyPr wrap="square" rtlCol="0" anchor="ctr"/>
           <a:lstStyle/>
           <a:p>
             <a:pPr marL="0" indent="0">
               <a:buNone/>
             </a:pPr>
             <a:r>
-              <a:rPr lang="en-US" sz="2000" dirty="0">
+              <a:rPr lang="en-US" sz="2000" b="1" dirty="0">
+                <a:solidFill>
+                  <a:srgbClr val="1A237E"/>
+                </a:solidFill>
+                <a:latin typeface="Arial" pitchFamily="34" charset="0"/>
+                <a:ea typeface="Arial" pitchFamily="34" charset="-122"/>
+                <a:cs typeface="Arial" pitchFamily="34" charset="-120"/>
+              </a:rPr>
+              <a:t>VPC (Virtual Private Cloud)</a:t>
+            </a:r>
+            <a:endParaRPr lang="en-US" sz="2000" dirty="0"/>
+          </a:p>
+        </p:txBody>
+      </p:sp>
+      <p:sp>
+        <p:nvSpPr>
+          <p:cNvPr id="7" name="Text 5"/>
+          <p:cNvSpPr/>
+          <p:nvPr/>
+        </p:nvSpPr>
+        <p:spPr>
+          <a:xfrm>
+            <a:off x="731520" y="1810512"/>
+            <a:ext cx="10725912" cy="722376"/>
+          </a:xfrm>
+          <a:prstGeom prst="rect">
+            <a:avLst/>
+          </a:prstGeom>
+          <a:noFill/>
+          <a:ln/>
+        </p:spPr>
+        <p:txBody>
+          <a:bodyPr wrap="square" rtlCol="0" anchor="t"/>
+          <a:lstStyle/>
+          <a:p>
+            <a:pPr marL="0" indent="0">
+              <a:buNone/>
+            </a:pPr>
+            <a:r>
+              <a:rPr lang="en-US" sz="1600" dirty="0">
                 <a:solidFill>
                   <a:srgbClr val="212121"/>
                 </a:solidFill>
@@ -3618,22 +4451,22 @@
                 <a:ea typeface="Arial" pitchFamily="34" charset="-122"/>
                 <a:cs typeface="Arial" pitchFamily="34" charset="-120"/>
               </a:rPr>
-              <a:t>Una VPC (Virtual Private Cloud) es tu propio trozo de red dentro de AWS, aislado del resto de clientes por defecto. Piensa en ella como en la parcela de un polígono industrial: dentro puedes levantar los edificios que quieras, pero nadie de fuera entra sin que tú abras una puerta expresamente.</a:t>
+              <a:t>Tu propio trozo de red dentro de AWS, aislado del resto de clientes por defecto. Como la parcela de un polígono industrial: dentro decides tú, pero nadie de fuera entra sin que abras una puerta.</a:t>
             </a:r>
-            <a:endParaRPr lang="en-US" sz="2000" dirty="0"/>
-          </a:p>
-        </p:txBody>
-      </p:sp>
-      <p:sp>
-        <p:nvSpPr>
-          <p:cNvPr id="6" name="Shape 4"/>
-          <p:cNvSpPr/>
-          <p:nvPr/>
-        </p:nvSpPr>
-        <p:spPr>
-          <a:xfrm>
-            <a:off x="548640" y="3291840"/>
-            <a:ext cx="11091672" cy="1371600"/>
+            <a:endParaRPr lang="en-US" sz="1600" dirty="0"/>
+          </a:p>
+        </p:txBody>
+      </p:sp>
+      <p:sp>
+        <p:nvSpPr>
+          <p:cNvPr id="8" name="Shape 6"/>
+          <p:cNvSpPr/>
+          <p:nvPr/>
+        </p:nvSpPr>
+        <p:spPr>
+          <a:xfrm>
+            <a:off x="548640" y="2788920"/>
+            <a:ext cx="11091672" cy="1325880"/>
           </a:xfrm>
           <a:prstGeom prst="roundRect">
             <a:avLst/>
@@ -3641,7 +4474,7 @@
           <a:solidFill>
             <a:srgbClr val="FFF8E1"/>
           </a:solidFill>
-          <a:ln w="19050">
+          <a:ln w="28575">
             <a:solidFill>
               <a:srgbClr val="FFA000"/>
             </a:solidFill>
@@ -3658,14 +4491,14 @@
       </p:sp>
       <p:sp>
         <p:nvSpPr>
-          <p:cNvPr id="7" name="Text 5"/>
-          <p:cNvSpPr/>
-          <p:nvPr/>
-        </p:nvSpPr>
-        <p:spPr>
-          <a:xfrm>
-            <a:off x="822960" y="3383280"/>
-            <a:ext cx="10543032" cy="1188720"/>
+          <p:cNvPr id="9" name="Text 7"/>
+          <p:cNvSpPr/>
+          <p:nvPr/>
+        </p:nvSpPr>
+        <p:spPr>
+          <a:xfrm>
+            <a:off x="822960" y="2898648"/>
+            <a:ext cx="10543032" cy="1106424"/>
           </a:xfrm>
           <a:prstGeom prst="rect">
             <a:avLst/>
@@ -3674,14 +4507,32 @@
           <a:ln/>
         </p:spPr>
         <p:txBody>
-          <a:bodyPr wrap="square" rtlCol="0" anchor="ctr"/>
+          <a:bodyPr wrap="square" rtlCol="0" anchor="t"/>
           <a:lstStyle/>
           <a:p>
             <a:pPr marL="0" indent="0">
               <a:buNone/>
             </a:pPr>
             <a:r>
-              <a:rPr lang="en-US" sz="2000" dirty="0">
+              <a:rPr lang="en-US" sz="1800" b="1" dirty="0">
+                <a:solidFill>
+                  <a:srgbClr val="1A237E"/>
+                </a:solidFill>
+                <a:latin typeface="Arial" pitchFamily="34" charset="0"/>
+                <a:ea typeface="Arial" pitchFamily="34" charset="-122"/>
+                <a:cs typeface="Arial" pitchFamily="34" charset="-120"/>
+              </a:rPr>
+              <a:t>Vacía al crearla
+</a:t>
+            </a:r>
+            <a:endParaRPr lang="en-US" sz="1800" dirty="0"/>
+          </a:p>
+          <a:p>
+            <a:pPr marL="0" indent="0">
+              <a:buNone/>
+            </a:pPr>
+            <a:r>
+              <a:rPr lang="en-US" sz="1700" dirty="0">
                 <a:solidFill>
                   <a:srgbClr val="212121"/>
                 </a:solidFill>
@@ -3689,9 +4540,119 @@
                 <a:ea typeface="Arial" pitchFamily="34" charset="-122"/>
                 <a:cs typeface="Arial" pitchFamily="34" charset="-120"/>
               </a:rPr>
-              <a:t>Idea clave: una VPC no tiene nada dentro al crearla — ni servidores, ni bases de datos, ni salida a internet. Es solo el espacio de direcciones IP donde vas a construir todo lo demás.</a:t>
+              <a:t>Ni servidores, ni bases de datos, ni salida a internet. Solo el espacio de direcciones IP donde vas a construir todo lo demás.</a:t>
             </a:r>
-            <a:endParaRPr lang="en-US" sz="2000" dirty="0"/>
+            <a:endParaRPr lang="en-US" sz="1800" dirty="0"/>
+          </a:p>
+        </p:txBody>
+      </p:sp>
+      <p:sp>
+        <p:nvSpPr>
+          <p:cNvPr id="10" name="Shape 8"/>
+          <p:cNvSpPr/>
+          <p:nvPr/>
+        </p:nvSpPr>
+        <p:spPr>
+          <a:xfrm>
+            <a:off x="548640" y="4297680"/>
+            <a:ext cx="11091672" cy="1600200"/>
+          </a:xfrm>
+          <a:prstGeom prst="roundRect">
+            <a:avLst/>
+          </a:prstGeom>
+          <a:solidFill>
+            <a:srgbClr val="E8EAF6"/>
+          </a:solidFill>
+          <a:ln w="15875">
+            <a:solidFill>
+              <a:srgbClr val="3949AB"/>
+            </a:solidFill>
+            <a:prstDash val="solid"/>
+          </a:ln>
+        </p:spPr>
+        <p:txBody>
+          <a:bodyPr/>
+          <a:lstStyle/>
+          <a:p>
+            <a:endParaRPr lang="es-ES"/>
+          </a:p>
+        </p:txBody>
+      </p:sp>
+      <p:sp>
+        <p:nvSpPr>
+          <p:cNvPr id="11" name="Text 9"/>
+          <p:cNvSpPr/>
+          <p:nvPr/>
+        </p:nvSpPr>
+        <p:spPr>
+          <a:xfrm>
+            <a:off x="731520" y="4370832"/>
+            <a:ext cx="10725912" cy="548640"/>
+          </a:xfrm>
+          <a:prstGeom prst="rect">
+            <a:avLst/>
+          </a:prstGeom>
+          <a:noFill/>
+          <a:ln/>
+        </p:spPr>
+        <p:txBody>
+          <a:bodyPr wrap="square" rtlCol="0" anchor="ctr"/>
+          <a:lstStyle/>
+          <a:p>
+            <a:pPr marL="0" indent="0">
+              <a:buNone/>
+            </a:pPr>
+            <a:r>
+              <a:rPr lang="en-US" sz="1800" b="1" dirty="0">
+                <a:solidFill>
+                  <a:srgbClr val="1A237E"/>
+                </a:solidFill>
+                <a:latin typeface="Arial" pitchFamily="34" charset="0"/>
+                <a:ea typeface="Arial" pitchFamily="34" charset="-122"/>
+                <a:cs typeface="Arial" pitchFamily="34" charset="-120"/>
+              </a:rPr>
+              <a:t>La pieza que más vas a repetir: la instancia</a:t>
+            </a:r>
+            <a:endParaRPr lang="en-US" sz="1800" dirty="0"/>
+          </a:p>
+        </p:txBody>
+      </p:sp>
+      <p:sp>
+        <p:nvSpPr>
+          <p:cNvPr id="12" name="Text 10"/>
+          <p:cNvSpPr/>
+          <p:nvPr/>
+        </p:nvSpPr>
+        <p:spPr>
+          <a:xfrm>
+            <a:off x="731520" y="4919472"/>
+            <a:ext cx="10725912" cy="905256"/>
+          </a:xfrm>
+          <a:prstGeom prst="rect">
+            <a:avLst/>
+          </a:prstGeom>
+          <a:noFill/>
+          <a:ln/>
+        </p:spPr>
+        <p:txBody>
+          <a:bodyPr wrap="square" rtlCol="0" anchor="t"/>
+          <a:lstStyle/>
+          <a:p>
+            <a:pPr marL="0" indent="0">
+              <a:buNone/>
+            </a:pPr>
+            <a:r>
+              <a:rPr lang="en-US" sz="1500" dirty="0">
+                <a:solidFill>
+                  <a:srgbClr val="212121"/>
+                </a:solidFill>
+                <a:latin typeface="Arial" pitchFamily="34" charset="0"/>
+                <a:ea typeface="Arial" pitchFamily="34" charset="-122"/>
+                <a:cs typeface="Arial" pitchFamily="34" charset="-120"/>
+              </a:rPr>
+              <a:t>Una máquina virtual completa (SO, CPU, memoria, disco), una porción de un servidor físico que alquilas por horas. La lanzas en la 2.1; el detalle de qué plantilla arranca lo ves en «Máquinas virtuales».</a:t>
+            </a:r>
+            <a:endParaRPr lang="en-US" sz="1500" dirty="0"/>
           </a:p>
         </p:txBody>
       </p:sp>
@@ -3785,7 +4746,7 @@
                 <a:ea typeface="Arial" pitchFamily="34" charset="-122"/>
                 <a:cs typeface="Arial" pitchFamily="34" charset="-120"/>
               </a:rPr>
-              <a:t>La instancia: lo que vive dentro de la VPC</a:t>
+              <a:t>CIDR y subnetting aplicado</a:t>
             </a:r>
             <a:endParaRPr lang="en-US" sz="2400" dirty="0"/>
           </a:p>
@@ -3832,53 +4793,14 @@
       </p:sp>
       <p:sp>
         <p:nvSpPr>
-          <p:cNvPr id="5" name="Text 3"/>
-          <p:cNvSpPr/>
-          <p:nvPr/>
-        </p:nvSpPr>
-        <p:spPr>
-          <a:xfrm>
-            <a:off x="548640" y="1920240"/>
-            <a:ext cx="11091672" cy="1828800"/>
-          </a:xfrm>
-          <a:prstGeom prst="rect">
-            <a:avLst/>
-          </a:prstGeom>
-          <a:noFill/>
-          <a:ln/>
-        </p:spPr>
-        <p:txBody>
-          <a:bodyPr wrap="square" rtlCol="0" anchor="t"/>
-          <a:lstStyle/>
-          <a:p>
-            <a:pPr marL="0" indent="0">
-              <a:buNone/>
-            </a:pPr>
-            <a:r>
-              <a:rPr lang="en-US" sz="2200" dirty="0">
-                <a:solidFill>
-                  <a:srgbClr val="212121"/>
-                </a:solidFill>
-                <a:latin typeface="Arial" pitchFamily="34" charset="0"/>
-                <a:ea typeface="Arial" pitchFamily="34" charset="-122"/>
-                <a:cs typeface="Arial" pitchFamily="34" charset="-120"/>
-              </a:rPr>
-              <a:t>La pieza que más vas a repetir dentro de una VPC es la instancia: una máquina virtual — un ordenador completo, con su propio sistema operativo, CPU, memoria y disco, pero que en realidad es una porción de un servidor físico de AWS que alquilas por horas, no una máquina que compras.</a:t>
-            </a:r>
-            <a:endParaRPr lang="en-US" sz="2200" dirty="0"/>
-          </a:p>
-        </p:txBody>
-      </p:sp>
-      <p:sp>
-        <p:nvSpPr>
-          <p:cNvPr id="6" name="Shape 4"/>
-          <p:cNvSpPr/>
-          <p:nvPr/>
-        </p:nvSpPr>
-        <p:spPr>
-          <a:xfrm>
-            <a:off x="548640" y="4069080"/>
-            <a:ext cx="11091672" cy="1097280"/>
+          <p:cNvPr id="5" name="Shape 3"/>
+          <p:cNvSpPr/>
+          <p:nvPr/>
+        </p:nvSpPr>
+        <p:spPr>
+          <a:xfrm>
+            <a:off x="548640" y="1143000"/>
+            <a:ext cx="11091672" cy="914400"/>
           </a:xfrm>
           <a:prstGeom prst="roundRect">
             <a:avLst/>
@@ -3903,14 +4825,14 @@
       </p:sp>
       <p:sp>
         <p:nvSpPr>
-          <p:cNvPr id="7" name="Text 5"/>
-          <p:cNvSpPr/>
-          <p:nvPr/>
-        </p:nvSpPr>
-        <p:spPr>
-          <a:xfrm>
-            <a:off x="822960" y="4160520"/>
-            <a:ext cx="10543032" cy="914400"/>
+          <p:cNvPr id="6" name="Text 4"/>
+          <p:cNvSpPr/>
+          <p:nvPr/>
+        </p:nvSpPr>
+        <p:spPr>
+          <a:xfrm>
+            <a:off x="822960" y="1234440"/>
+            <a:ext cx="10543032" cy="731520"/>
           </a:xfrm>
           <a:prstGeom prst="rect">
             <a:avLst/>
@@ -3926,7 +4848,7 @@
               <a:buNone/>
             </a:pPr>
             <a:r>
-              <a:rPr lang="en-US" sz="2000" dirty="0">
+              <a:rPr lang="en-US" sz="1700" dirty="0">
                 <a:solidFill>
                   <a:srgbClr val="212121"/>
                 </a:solidFill>
@@ -3934,9 +4856,1051 @@
                 <a:ea typeface="Arial" pitchFamily="34" charset="-122"/>
                 <a:cs typeface="Arial" pitchFamily="34" charset="-120"/>
               </a:rPr>
-              <a:t>La vas a lanzar por primera vez en la Actividad 2.1; en «Máquinas virtuales» ves con detalle de qué plantilla exacta arranca y cómo la eliges.</a:t>
+              <a:t>Cada máquina necesita una dirección IP, su matrícula (10.0.5.23). El rango de una VPC se escribe en notación CIDR: una IP + una barra + un prefijo, como 10.0.0.0/16.</a:t>
             </a:r>
-            <a:endParaRPr lang="en-US" sz="2000" dirty="0"/>
+            <a:endParaRPr lang="en-US" sz="1700" dirty="0"/>
+          </a:p>
+        </p:txBody>
+      </p:sp>
+      <p:graphicFrame>
+        <p:nvGraphicFramePr>
+          <p:cNvPr id="7" name="Table 0"/>
+          <p:cNvGraphicFramePr>
+            <a:graphicFrameLocks noGrp="1"/>
+          </p:cNvGraphicFramePr>
+          <p:nvPr>
+            <p:extLst>
+              <p:ext uri="{D42A27DB-BD31-4B8C-83A1-F6EECF244321}">
+                <p14:modId xmlns:p14="http://schemas.microsoft.com/office/powerpoint/2010/main" val="1579011935"/>
+              </p:ext>
+            </p:extLst>
+          </p:nvPr>
+        </p:nvGraphicFramePr>
+        <p:xfrm>
+          <a:off x="548640" y="2194560"/>
+          <a:ext cx="11091672" cy="2011680"/>
+        </p:xfrm>
+        <a:graphic>
+          <a:graphicData uri="http://schemas.openxmlformats.org/drawingml/2006/table">
+            <a:tbl>
+              <a:tblPr/>
+              <a:tblGrid>
+                <a:gridCol w="1996501">
+                  <a:extLst>
+                    <a:ext uri="{9D8B030D-6E8A-4147-A177-3AD203B41FA5}">
+                      <a16:colId xmlns:a16="http://schemas.microsoft.com/office/drawing/2014/main" val="20000"/>
+                    </a:ext>
+                  </a:extLst>
+                </a:gridCol>
+                <a:gridCol w="3549335">
+                  <a:extLst>
+                    <a:ext uri="{9D8B030D-6E8A-4147-A177-3AD203B41FA5}">
+                      <a16:colId xmlns:a16="http://schemas.microsoft.com/office/drawing/2014/main" val="20001"/>
+                    </a:ext>
+                  </a:extLst>
+                </a:gridCol>
+                <a:gridCol w="5545836">
+                  <a:extLst>
+                    <a:ext uri="{9D8B030D-6E8A-4147-A177-3AD203B41FA5}">
+                      <a16:colId xmlns:a16="http://schemas.microsoft.com/office/drawing/2014/main" val="20002"/>
+                    </a:ext>
+                  </a:extLst>
+                </a:gridCol>
+              </a:tblGrid>
+              <a:tr h="502920">
+                <a:tc>
+                  <a:txBody>
+                    <a:bodyPr/>
+                    <a:lstStyle/>
+                    <a:p>
+                      <a:pPr marL="0" indent="0" algn="ctr">
+                        <a:buNone/>
+                      </a:pPr>
+                      <a:r>
+                        <a:rPr lang="en-US" sz="1600" b="1" dirty="0">
+                          <a:solidFill>
+                            <a:srgbClr val="FFFFFF"/>
+                          </a:solidFill>
+                          <a:latin typeface="Arial" pitchFamily="34" charset="0"/>
+                          <a:ea typeface="Arial" pitchFamily="34" charset="-122"/>
+                          <a:cs typeface="Arial" pitchFamily="34" charset="-120"/>
+                        </a:rPr>
+                        <a:t>Prefijo</a:t>
+                      </a:r>
+                      <a:endParaRPr lang="en-US" sz="1600" dirty="0">
+                        <a:latin typeface="Arial" charset="0"/>
+                        <a:ea typeface="Arial" charset="0"/>
+                        <a:cs typeface="Arial" charset="0"/>
+                      </a:endParaRPr>
+                    </a:p>
+                  </a:txBody>
+                  <a:tcPr anchor="ctr">
+                    <a:lnL w="12700" cap="flat" cmpd="sng" algn="ctr">
+                      <a:solidFill>
+                        <a:srgbClr val="EEEEEE"/>
+                      </a:solidFill>
+                      <a:prstDash val="solid"/>
+                      <a:round/>
+                      <a:headEnd type="none" w="med" len="med"/>
+                      <a:tailEnd type="none" w="med" len="med"/>
+                    </a:lnL>
+                    <a:lnR w="12700" cap="flat" cmpd="sng" algn="ctr">
+                      <a:solidFill>
+                        <a:srgbClr val="EEEEEE"/>
+                      </a:solidFill>
+                      <a:prstDash val="solid"/>
+                      <a:round/>
+                      <a:headEnd type="none" w="med" len="med"/>
+                      <a:tailEnd type="none" w="med" len="med"/>
+                    </a:lnR>
+                    <a:lnT w="12700" cap="flat" cmpd="sng" algn="ctr">
+                      <a:solidFill>
+                        <a:srgbClr val="EEEEEE"/>
+                      </a:solidFill>
+                      <a:prstDash val="solid"/>
+                      <a:round/>
+                      <a:headEnd type="none" w="med" len="med"/>
+                      <a:tailEnd type="none" w="med" len="med"/>
+                    </a:lnT>
+                    <a:lnB w="12700" cap="flat" cmpd="sng" algn="ctr">
+                      <a:solidFill>
+                        <a:srgbClr val="EEEEEE"/>
+                      </a:solidFill>
+                      <a:prstDash val="solid"/>
+                      <a:round/>
+                      <a:headEnd type="none" w="med" len="med"/>
+                      <a:tailEnd type="none" w="med" len="med"/>
+                    </a:lnB>
+                    <a:solidFill>
+                      <a:srgbClr val="3949AB"/>
+                    </a:solidFill>
+                  </a:tcPr>
+                </a:tc>
+                <a:tc>
+                  <a:txBody>
+                    <a:bodyPr/>
+                    <a:lstStyle/>
+                    <a:p>
+                      <a:pPr marL="0" indent="0" algn="ctr">
+                        <a:buNone/>
+                      </a:pPr>
+                      <a:r>
+                        <a:rPr lang="en-US" sz="1600" b="1" dirty="0">
+                          <a:solidFill>
+                            <a:srgbClr val="FFFFFF"/>
+                          </a:solidFill>
+                          <a:latin typeface="Arial" pitchFamily="34" charset="0"/>
+                          <a:ea typeface="Arial" pitchFamily="34" charset="-122"/>
+                          <a:cs typeface="Arial" pitchFamily="34" charset="-120"/>
+                        </a:rPr>
+                        <a:t>Direcciones totales</a:t>
+                      </a:r>
+                      <a:endParaRPr lang="en-US" sz="1600" dirty="0">
+                        <a:latin typeface="Arial" charset="0"/>
+                        <a:ea typeface="Arial" charset="0"/>
+                        <a:cs typeface="Arial" charset="0"/>
+                      </a:endParaRPr>
+                    </a:p>
+                  </a:txBody>
+                  <a:tcPr anchor="ctr">
+                    <a:lnL w="12700" cap="flat" cmpd="sng" algn="ctr">
+                      <a:solidFill>
+                        <a:srgbClr val="EEEEEE"/>
+                      </a:solidFill>
+                      <a:prstDash val="solid"/>
+                      <a:round/>
+                      <a:headEnd type="none" w="med" len="med"/>
+                      <a:tailEnd type="none" w="med" len="med"/>
+                    </a:lnL>
+                    <a:lnR w="12700" cap="flat" cmpd="sng" algn="ctr">
+                      <a:solidFill>
+                        <a:srgbClr val="EEEEEE"/>
+                      </a:solidFill>
+                      <a:prstDash val="solid"/>
+                      <a:round/>
+                      <a:headEnd type="none" w="med" len="med"/>
+                      <a:tailEnd type="none" w="med" len="med"/>
+                    </a:lnR>
+                    <a:lnT w="12700" cap="flat" cmpd="sng" algn="ctr">
+                      <a:solidFill>
+                        <a:srgbClr val="EEEEEE"/>
+                      </a:solidFill>
+                      <a:prstDash val="solid"/>
+                      <a:round/>
+                      <a:headEnd type="none" w="med" len="med"/>
+                      <a:tailEnd type="none" w="med" len="med"/>
+                    </a:lnT>
+                    <a:lnB w="12700" cap="flat" cmpd="sng" algn="ctr">
+                      <a:solidFill>
+                        <a:srgbClr val="EEEEEE"/>
+                      </a:solidFill>
+                      <a:prstDash val="solid"/>
+                      <a:round/>
+                      <a:headEnd type="none" w="med" len="med"/>
+                      <a:tailEnd type="none" w="med" len="med"/>
+                    </a:lnB>
+                    <a:solidFill>
+                      <a:srgbClr val="3949AB"/>
+                    </a:solidFill>
+                  </a:tcPr>
+                </a:tc>
+                <a:tc>
+                  <a:txBody>
+                    <a:bodyPr/>
+                    <a:lstStyle/>
+                    <a:p>
+                      <a:pPr marL="0" indent="0" algn="ctr">
+                        <a:buNone/>
+                      </a:pPr>
+                      <a:r>
+                        <a:rPr lang="en-US" sz="1600" b="1" dirty="0">
+                          <a:solidFill>
+                            <a:srgbClr val="FFFFFF"/>
+                          </a:solidFill>
+                          <a:latin typeface="Arial" pitchFamily="34" charset="0"/>
+                          <a:ea typeface="Arial" pitchFamily="34" charset="-122"/>
+                          <a:cs typeface="Arial" pitchFamily="34" charset="-120"/>
+                        </a:rPr>
+                        <a:t>Uso típico en el módulo</a:t>
+                      </a:r>
+                      <a:endParaRPr lang="en-US" sz="1600" dirty="0">
+                        <a:latin typeface="Arial" charset="0"/>
+                        <a:ea typeface="Arial" charset="0"/>
+                        <a:cs typeface="Arial" charset="0"/>
+                      </a:endParaRPr>
+                    </a:p>
+                  </a:txBody>
+                  <a:tcPr anchor="ctr">
+                    <a:lnL w="12700" cap="flat" cmpd="sng" algn="ctr">
+                      <a:solidFill>
+                        <a:srgbClr val="EEEEEE"/>
+                      </a:solidFill>
+                      <a:prstDash val="solid"/>
+                      <a:round/>
+                      <a:headEnd type="none" w="med" len="med"/>
+                      <a:tailEnd type="none" w="med" len="med"/>
+                    </a:lnL>
+                    <a:lnR w="12700" cap="flat" cmpd="sng" algn="ctr">
+                      <a:solidFill>
+                        <a:srgbClr val="EEEEEE"/>
+                      </a:solidFill>
+                      <a:prstDash val="solid"/>
+                      <a:round/>
+                      <a:headEnd type="none" w="med" len="med"/>
+                      <a:tailEnd type="none" w="med" len="med"/>
+                    </a:lnR>
+                    <a:lnT w="12700" cap="flat" cmpd="sng" algn="ctr">
+                      <a:solidFill>
+                        <a:srgbClr val="EEEEEE"/>
+                      </a:solidFill>
+                      <a:prstDash val="solid"/>
+                      <a:round/>
+                      <a:headEnd type="none" w="med" len="med"/>
+                      <a:tailEnd type="none" w="med" len="med"/>
+                    </a:lnT>
+                    <a:lnB w="12700" cap="flat" cmpd="sng" algn="ctr">
+                      <a:solidFill>
+                        <a:srgbClr val="EEEEEE"/>
+                      </a:solidFill>
+                      <a:prstDash val="solid"/>
+                      <a:round/>
+                      <a:headEnd type="none" w="med" len="med"/>
+                      <a:tailEnd type="none" w="med" len="med"/>
+                    </a:lnB>
+                    <a:solidFill>
+                      <a:srgbClr val="3949AB"/>
+                    </a:solidFill>
+                  </a:tcPr>
+                </a:tc>
+                <a:extLst>
+                  <a:ext uri="{0D108BD9-81ED-4DB2-BD59-A6C34878D82A}">
+                    <a16:rowId xmlns:a16="http://schemas.microsoft.com/office/drawing/2014/main" val="10000"/>
+                  </a:ext>
+                </a:extLst>
+              </a:tr>
+              <a:tr h="502920">
+                <a:tc>
+                  <a:txBody>
+                    <a:bodyPr/>
+                    <a:lstStyle/>
+                    <a:p>
+                      <a:pPr marL="0" indent="0">
+                        <a:buNone/>
+                      </a:pPr>
+                      <a:r>
+                        <a:rPr lang="en-US" sz="1500" b="1" dirty="0">
+                          <a:solidFill>
+                            <a:srgbClr val="212121"/>
+                          </a:solidFill>
+                          <a:latin typeface="Arial" pitchFamily="34" charset="0"/>
+                          <a:ea typeface="Arial" pitchFamily="34" charset="-122"/>
+                          <a:cs typeface="Arial" pitchFamily="34" charset="-120"/>
+                        </a:rPr>
+                        <a:t>/16</a:t>
+                      </a:r>
+                      <a:endParaRPr lang="en-US" sz="1500" dirty="0">
+                        <a:latin typeface="Arial" charset="0"/>
+                        <a:ea typeface="Arial" charset="0"/>
+                        <a:cs typeface="Arial" charset="0"/>
+                      </a:endParaRPr>
+                    </a:p>
+                  </a:txBody>
+                  <a:tcPr anchor="ctr">
+                    <a:lnL w="12700" cap="flat" cmpd="sng" algn="ctr">
+                      <a:solidFill>
+                        <a:srgbClr val="EEEEEE"/>
+                      </a:solidFill>
+                      <a:prstDash val="solid"/>
+                      <a:round/>
+                      <a:headEnd type="none" w="med" len="med"/>
+                      <a:tailEnd type="none" w="med" len="med"/>
+                    </a:lnL>
+                    <a:lnR w="12700" cap="flat" cmpd="sng" algn="ctr">
+                      <a:solidFill>
+                        <a:srgbClr val="EEEEEE"/>
+                      </a:solidFill>
+                      <a:prstDash val="solid"/>
+                      <a:round/>
+                      <a:headEnd type="none" w="med" len="med"/>
+                      <a:tailEnd type="none" w="med" len="med"/>
+                    </a:lnR>
+                    <a:lnT w="12700" cap="flat" cmpd="sng" algn="ctr">
+                      <a:solidFill>
+                        <a:srgbClr val="EEEEEE"/>
+                      </a:solidFill>
+                      <a:prstDash val="solid"/>
+                      <a:round/>
+                      <a:headEnd type="none" w="med" len="med"/>
+                      <a:tailEnd type="none" w="med" len="med"/>
+                    </a:lnT>
+                    <a:lnB w="12700" cap="flat" cmpd="sng" algn="ctr">
+                      <a:solidFill>
+                        <a:srgbClr val="EEEEEE"/>
+                      </a:solidFill>
+                      <a:prstDash val="solid"/>
+                      <a:round/>
+                      <a:headEnd type="none" w="med" len="med"/>
+                      <a:tailEnd type="none" w="med" len="med"/>
+                    </a:lnB>
+                    <a:solidFill>
+                      <a:srgbClr val="FFFFFF"/>
+                    </a:solidFill>
+                  </a:tcPr>
+                </a:tc>
+                <a:tc>
+                  <a:txBody>
+                    <a:bodyPr/>
+                    <a:lstStyle/>
+                    <a:p>
+                      <a:pPr marL="0" indent="0">
+                        <a:buNone/>
+                      </a:pPr>
+                      <a:r>
+                        <a:rPr lang="en-US" sz="1500" dirty="0">
+                          <a:solidFill>
+                            <a:srgbClr val="212121"/>
+                          </a:solidFill>
+                          <a:latin typeface="Arial" pitchFamily="34" charset="0"/>
+                          <a:ea typeface="Arial" pitchFamily="34" charset="-122"/>
+                          <a:cs typeface="Arial" pitchFamily="34" charset="-120"/>
+                        </a:rPr>
+                        <a:t>65.536</a:t>
+                      </a:r>
+                      <a:endParaRPr lang="en-US" sz="1500" dirty="0">
+                        <a:latin typeface="Arial" charset="0"/>
+                        <a:ea typeface="Arial" charset="0"/>
+                        <a:cs typeface="Arial" charset="0"/>
+                      </a:endParaRPr>
+                    </a:p>
+                  </a:txBody>
+                  <a:tcPr anchor="ctr">
+                    <a:lnL w="12700" cap="flat" cmpd="sng" algn="ctr">
+                      <a:solidFill>
+                        <a:srgbClr val="EEEEEE"/>
+                      </a:solidFill>
+                      <a:prstDash val="solid"/>
+                      <a:round/>
+                      <a:headEnd type="none" w="med" len="med"/>
+                      <a:tailEnd type="none" w="med" len="med"/>
+                    </a:lnL>
+                    <a:lnR w="12700" cap="flat" cmpd="sng" algn="ctr">
+                      <a:solidFill>
+                        <a:srgbClr val="EEEEEE"/>
+                      </a:solidFill>
+                      <a:prstDash val="solid"/>
+                      <a:round/>
+                      <a:headEnd type="none" w="med" len="med"/>
+                      <a:tailEnd type="none" w="med" len="med"/>
+                    </a:lnR>
+                    <a:lnT w="12700" cap="flat" cmpd="sng" algn="ctr">
+                      <a:solidFill>
+                        <a:srgbClr val="EEEEEE"/>
+                      </a:solidFill>
+                      <a:prstDash val="solid"/>
+                      <a:round/>
+                      <a:headEnd type="none" w="med" len="med"/>
+                      <a:tailEnd type="none" w="med" len="med"/>
+                    </a:lnT>
+                    <a:lnB w="12700" cap="flat" cmpd="sng" algn="ctr">
+                      <a:solidFill>
+                        <a:srgbClr val="EEEEEE"/>
+                      </a:solidFill>
+                      <a:prstDash val="solid"/>
+                      <a:round/>
+                      <a:headEnd type="none" w="med" len="med"/>
+                      <a:tailEnd type="none" w="med" len="med"/>
+                    </a:lnB>
+                    <a:solidFill>
+                      <a:srgbClr val="FFFFFF"/>
+                    </a:solidFill>
+                  </a:tcPr>
+                </a:tc>
+                <a:tc>
+                  <a:txBody>
+                    <a:bodyPr/>
+                    <a:lstStyle/>
+                    <a:p>
+                      <a:pPr marL="0" indent="0">
+                        <a:buNone/>
+                      </a:pPr>
+                      <a:r>
+                        <a:rPr lang="en-US" sz="1500" dirty="0">
+                          <a:solidFill>
+                            <a:srgbClr val="212121"/>
+                          </a:solidFill>
+                          <a:latin typeface="Arial" pitchFamily="34" charset="0"/>
+                          <a:ea typeface="Arial" pitchFamily="34" charset="-122"/>
+                          <a:cs typeface="Arial" pitchFamily="34" charset="-120"/>
+                        </a:rPr>
+                        <a:t>Rango completo de la VPC</a:t>
+                      </a:r>
+                      <a:endParaRPr lang="en-US" sz="1500" dirty="0">
+                        <a:latin typeface="Arial" charset="0"/>
+                        <a:ea typeface="Arial" charset="0"/>
+                        <a:cs typeface="Arial" charset="0"/>
+                      </a:endParaRPr>
+                    </a:p>
+                  </a:txBody>
+                  <a:tcPr anchor="ctr">
+                    <a:lnL w="12700" cap="flat" cmpd="sng" algn="ctr">
+                      <a:solidFill>
+                        <a:srgbClr val="EEEEEE"/>
+                      </a:solidFill>
+                      <a:prstDash val="solid"/>
+                      <a:round/>
+                      <a:headEnd type="none" w="med" len="med"/>
+                      <a:tailEnd type="none" w="med" len="med"/>
+                    </a:lnL>
+                    <a:lnR w="12700" cap="flat" cmpd="sng" algn="ctr">
+                      <a:solidFill>
+                        <a:srgbClr val="EEEEEE"/>
+                      </a:solidFill>
+                      <a:prstDash val="solid"/>
+                      <a:round/>
+                      <a:headEnd type="none" w="med" len="med"/>
+                      <a:tailEnd type="none" w="med" len="med"/>
+                    </a:lnR>
+                    <a:lnT w="12700" cap="flat" cmpd="sng" algn="ctr">
+                      <a:solidFill>
+                        <a:srgbClr val="EEEEEE"/>
+                      </a:solidFill>
+                      <a:prstDash val="solid"/>
+                      <a:round/>
+                      <a:headEnd type="none" w="med" len="med"/>
+                      <a:tailEnd type="none" w="med" len="med"/>
+                    </a:lnT>
+                    <a:lnB w="12700" cap="flat" cmpd="sng" algn="ctr">
+                      <a:solidFill>
+                        <a:srgbClr val="EEEEEE"/>
+                      </a:solidFill>
+                      <a:prstDash val="solid"/>
+                      <a:round/>
+                      <a:headEnd type="none" w="med" len="med"/>
+                      <a:tailEnd type="none" w="med" len="med"/>
+                    </a:lnB>
+                    <a:solidFill>
+                      <a:srgbClr val="FFFFFF"/>
+                    </a:solidFill>
+                  </a:tcPr>
+                </a:tc>
+                <a:extLst>
+                  <a:ext uri="{0D108BD9-81ED-4DB2-BD59-A6C34878D82A}">
+                    <a16:rowId xmlns:a16="http://schemas.microsoft.com/office/drawing/2014/main" val="10001"/>
+                  </a:ext>
+                </a:extLst>
+              </a:tr>
+              <a:tr h="502920">
+                <a:tc>
+                  <a:txBody>
+                    <a:bodyPr/>
+                    <a:lstStyle/>
+                    <a:p>
+                      <a:pPr marL="0" indent="0">
+                        <a:buNone/>
+                      </a:pPr>
+                      <a:r>
+                        <a:rPr lang="en-US" sz="1500" b="1" dirty="0">
+                          <a:solidFill>
+                            <a:srgbClr val="212121"/>
+                          </a:solidFill>
+                          <a:latin typeface="Arial" pitchFamily="34" charset="0"/>
+                          <a:ea typeface="Arial" pitchFamily="34" charset="-122"/>
+                          <a:cs typeface="Arial" pitchFamily="34" charset="-120"/>
+                        </a:rPr>
+                        <a:t>/24</a:t>
+                      </a:r>
+                      <a:endParaRPr lang="en-US" sz="1500" dirty="0">
+                        <a:latin typeface="Arial" charset="0"/>
+                        <a:ea typeface="Arial" charset="0"/>
+                        <a:cs typeface="Arial" charset="0"/>
+                      </a:endParaRPr>
+                    </a:p>
+                  </a:txBody>
+                  <a:tcPr anchor="ctr">
+                    <a:lnL w="12700" cap="flat" cmpd="sng" algn="ctr">
+                      <a:solidFill>
+                        <a:srgbClr val="EEEEEE"/>
+                      </a:solidFill>
+                      <a:prstDash val="solid"/>
+                      <a:round/>
+                      <a:headEnd type="none" w="med" len="med"/>
+                      <a:tailEnd type="none" w="med" len="med"/>
+                    </a:lnL>
+                    <a:lnR w="12700" cap="flat" cmpd="sng" algn="ctr">
+                      <a:solidFill>
+                        <a:srgbClr val="EEEEEE"/>
+                      </a:solidFill>
+                      <a:prstDash val="solid"/>
+                      <a:round/>
+                      <a:headEnd type="none" w="med" len="med"/>
+                      <a:tailEnd type="none" w="med" len="med"/>
+                    </a:lnR>
+                    <a:lnT w="12700" cap="flat" cmpd="sng" algn="ctr">
+                      <a:solidFill>
+                        <a:srgbClr val="EEEEEE"/>
+                      </a:solidFill>
+                      <a:prstDash val="solid"/>
+                      <a:round/>
+                      <a:headEnd type="none" w="med" len="med"/>
+                      <a:tailEnd type="none" w="med" len="med"/>
+                    </a:lnT>
+                    <a:lnB w="12700" cap="flat" cmpd="sng" algn="ctr">
+                      <a:solidFill>
+                        <a:srgbClr val="EEEEEE"/>
+                      </a:solidFill>
+                      <a:prstDash val="solid"/>
+                      <a:round/>
+                      <a:headEnd type="none" w="med" len="med"/>
+                      <a:tailEnd type="none" w="med" len="med"/>
+                    </a:lnB>
+                    <a:solidFill>
+                      <a:srgbClr val="F5F5F5"/>
+                    </a:solidFill>
+                  </a:tcPr>
+                </a:tc>
+                <a:tc>
+                  <a:txBody>
+                    <a:bodyPr/>
+                    <a:lstStyle/>
+                    <a:p>
+                      <a:pPr marL="0" indent="0">
+                        <a:buNone/>
+                      </a:pPr>
+                      <a:r>
+                        <a:rPr lang="en-US" sz="1500" dirty="0">
+                          <a:solidFill>
+                            <a:srgbClr val="212121"/>
+                          </a:solidFill>
+                          <a:latin typeface="Arial" pitchFamily="34" charset="0"/>
+                          <a:ea typeface="Arial" pitchFamily="34" charset="-122"/>
+                          <a:cs typeface="Arial" pitchFamily="34" charset="-120"/>
+                        </a:rPr>
+                        <a:t>256</a:t>
+                      </a:r>
+                      <a:endParaRPr lang="en-US" sz="1500" dirty="0">
+                        <a:latin typeface="Arial" charset="0"/>
+                        <a:ea typeface="Arial" charset="0"/>
+                        <a:cs typeface="Arial" charset="0"/>
+                      </a:endParaRPr>
+                    </a:p>
+                  </a:txBody>
+                  <a:tcPr anchor="ctr">
+                    <a:lnL w="12700" cap="flat" cmpd="sng" algn="ctr">
+                      <a:solidFill>
+                        <a:srgbClr val="EEEEEE"/>
+                      </a:solidFill>
+                      <a:prstDash val="solid"/>
+                      <a:round/>
+                      <a:headEnd type="none" w="med" len="med"/>
+                      <a:tailEnd type="none" w="med" len="med"/>
+                    </a:lnL>
+                    <a:lnR w="12700" cap="flat" cmpd="sng" algn="ctr">
+                      <a:solidFill>
+                        <a:srgbClr val="EEEEEE"/>
+                      </a:solidFill>
+                      <a:prstDash val="solid"/>
+                      <a:round/>
+                      <a:headEnd type="none" w="med" len="med"/>
+                      <a:tailEnd type="none" w="med" len="med"/>
+                    </a:lnR>
+                    <a:lnT w="12700" cap="flat" cmpd="sng" algn="ctr">
+                      <a:solidFill>
+                        <a:srgbClr val="EEEEEE"/>
+                      </a:solidFill>
+                      <a:prstDash val="solid"/>
+                      <a:round/>
+                      <a:headEnd type="none" w="med" len="med"/>
+                      <a:tailEnd type="none" w="med" len="med"/>
+                    </a:lnT>
+                    <a:lnB w="12700" cap="flat" cmpd="sng" algn="ctr">
+                      <a:solidFill>
+                        <a:srgbClr val="EEEEEE"/>
+                      </a:solidFill>
+                      <a:prstDash val="solid"/>
+                      <a:round/>
+                      <a:headEnd type="none" w="med" len="med"/>
+                      <a:tailEnd type="none" w="med" len="med"/>
+                    </a:lnB>
+                    <a:solidFill>
+                      <a:srgbClr val="F5F5F5"/>
+                    </a:solidFill>
+                  </a:tcPr>
+                </a:tc>
+                <a:tc>
+                  <a:txBody>
+                    <a:bodyPr/>
+                    <a:lstStyle/>
+                    <a:p>
+                      <a:pPr marL="0" indent="0">
+                        <a:buNone/>
+                      </a:pPr>
+                      <a:r>
+                        <a:rPr lang="en-US" sz="1500" dirty="0">
+                          <a:solidFill>
+                            <a:srgbClr val="212121"/>
+                          </a:solidFill>
+                          <a:latin typeface="Arial" pitchFamily="34" charset="0"/>
+                          <a:ea typeface="Arial" pitchFamily="34" charset="-122"/>
+                          <a:cs typeface="Arial" pitchFamily="34" charset="-120"/>
+                        </a:rPr>
+                        <a:t>Una subred individual dentro de la VPC</a:t>
+                      </a:r>
+                      <a:endParaRPr lang="en-US" sz="1500" dirty="0">
+                        <a:latin typeface="Arial" charset="0"/>
+                        <a:ea typeface="Arial" charset="0"/>
+                        <a:cs typeface="Arial" charset="0"/>
+                      </a:endParaRPr>
+                    </a:p>
+                  </a:txBody>
+                  <a:tcPr anchor="ctr">
+                    <a:lnL w="12700" cap="flat" cmpd="sng" algn="ctr">
+                      <a:solidFill>
+                        <a:srgbClr val="EEEEEE"/>
+                      </a:solidFill>
+                      <a:prstDash val="solid"/>
+                      <a:round/>
+                      <a:headEnd type="none" w="med" len="med"/>
+                      <a:tailEnd type="none" w="med" len="med"/>
+                    </a:lnL>
+                    <a:lnR w="12700" cap="flat" cmpd="sng" algn="ctr">
+                      <a:solidFill>
+                        <a:srgbClr val="EEEEEE"/>
+                      </a:solidFill>
+                      <a:prstDash val="solid"/>
+                      <a:round/>
+                      <a:headEnd type="none" w="med" len="med"/>
+                      <a:tailEnd type="none" w="med" len="med"/>
+                    </a:lnR>
+                    <a:lnT w="12700" cap="flat" cmpd="sng" algn="ctr">
+                      <a:solidFill>
+                        <a:srgbClr val="EEEEEE"/>
+                      </a:solidFill>
+                      <a:prstDash val="solid"/>
+                      <a:round/>
+                      <a:headEnd type="none" w="med" len="med"/>
+                      <a:tailEnd type="none" w="med" len="med"/>
+                    </a:lnT>
+                    <a:lnB w="12700" cap="flat" cmpd="sng" algn="ctr">
+                      <a:solidFill>
+                        <a:srgbClr val="EEEEEE"/>
+                      </a:solidFill>
+                      <a:prstDash val="solid"/>
+                      <a:round/>
+                      <a:headEnd type="none" w="med" len="med"/>
+                      <a:tailEnd type="none" w="med" len="med"/>
+                    </a:lnB>
+                    <a:solidFill>
+                      <a:srgbClr val="F5F5F5"/>
+                    </a:solidFill>
+                  </a:tcPr>
+                </a:tc>
+                <a:extLst>
+                  <a:ext uri="{0D108BD9-81ED-4DB2-BD59-A6C34878D82A}">
+                    <a16:rowId xmlns:a16="http://schemas.microsoft.com/office/drawing/2014/main" val="10002"/>
+                  </a:ext>
+                </a:extLst>
+              </a:tr>
+              <a:tr h="502920">
+                <a:tc>
+                  <a:txBody>
+                    <a:bodyPr/>
+                    <a:lstStyle/>
+                    <a:p>
+                      <a:pPr marL="0" indent="0">
+                        <a:buNone/>
+                      </a:pPr>
+                      <a:r>
+                        <a:rPr lang="en-US" sz="1500" b="1" dirty="0">
+                          <a:solidFill>
+                            <a:srgbClr val="212121"/>
+                          </a:solidFill>
+                          <a:latin typeface="Arial" pitchFamily="34" charset="0"/>
+                          <a:ea typeface="Arial" pitchFamily="34" charset="-122"/>
+                          <a:cs typeface="Arial" pitchFamily="34" charset="-120"/>
+                        </a:rPr>
+                        <a:t>/28</a:t>
+                      </a:r>
+                      <a:endParaRPr lang="en-US" sz="1500" dirty="0">
+                        <a:latin typeface="Arial" charset="0"/>
+                        <a:ea typeface="Arial" charset="0"/>
+                        <a:cs typeface="Arial" charset="0"/>
+                      </a:endParaRPr>
+                    </a:p>
+                  </a:txBody>
+                  <a:tcPr anchor="ctr">
+                    <a:lnL w="12700" cap="flat" cmpd="sng" algn="ctr">
+                      <a:solidFill>
+                        <a:srgbClr val="EEEEEE"/>
+                      </a:solidFill>
+                      <a:prstDash val="solid"/>
+                      <a:round/>
+                      <a:headEnd type="none" w="med" len="med"/>
+                      <a:tailEnd type="none" w="med" len="med"/>
+                    </a:lnL>
+                    <a:lnR w="12700" cap="flat" cmpd="sng" algn="ctr">
+                      <a:solidFill>
+                        <a:srgbClr val="EEEEEE"/>
+                      </a:solidFill>
+                      <a:prstDash val="solid"/>
+                      <a:round/>
+                      <a:headEnd type="none" w="med" len="med"/>
+                      <a:tailEnd type="none" w="med" len="med"/>
+                    </a:lnR>
+                    <a:lnT w="12700" cap="flat" cmpd="sng" algn="ctr">
+                      <a:solidFill>
+                        <a:srgbClr val="EEEEEE"/>
+                      </a:solidFill>
+                      <a:prstDash val="solid"/>
+                      <a:round/>
+                      <a:headEnd type="none" w="med" len="med"/>
+                      <a:tailEnd type="none" w="med" len="med"/>
+                    </a:lnT>
+                    <a:lnB w="12700" cap="flat" cmpd="sng" algn="ctr">
+                      <a:solidFill>
+                        <a:srgbClr val="EEEEEE"/>
+                      </a:solidFill>
+                      <a:prstDash val="solid"/>
+                      <a:round/>
+                      <a:headEnd type="none" w="med" len="med"/>
+                      <a:tailEnd type="none" w="med" len="med"/>
+                    </a:lnB>
+                    <a:solidFill>
+                      <a:srgbClr val="FFFFFF"/>
+                    </a:solidFill>
+                  </a:tcPr>
+                </a:tc>
+                <a:tc>
+                  <a:txBody>
+                    <a:bodyPr/>
+                    <a:lstStyle/>
+                    <a:p>
+                      <a:pPr marL="0" indent="0">
+                        <a:buNone/>
+                      </a:pPr>
+                      <a:r>
+                        <a:rPr lang="en-US" sz="1500" dirty="0">
+                          <a:solidFill>
+                            <a:srgbClr val="212121"/>
+                          </a:solidFill>
+                          <a:latin typeface="Arial" pitchFamily="34" charset="0"/>
+                          <a:ea typeface="Arial" pitchFamily="34" charset="-122"/>
+                          <a:cs typeface="Arial" pitchFamily="34" charset="-120"/>
+                        </a:rPr>
+                        <a:t>16</a:t>
+                      </a:r>
+                      <a:endParaRPr lang="en-US" sz="1500" dirty="0">
+                        <a:latin typeface="Arial" charset="0"/>
+                        <a:ea typeface="Arial" charset="0"/>
+                        <a:cs typeface="Arial" charset="0"/>
+                      </a:endParaRPr>
+                    </a:p>
+                  </a:txBody>
+                  <a:tcPr anchor="ctr">
+                    <a:lnL w="12700" cap="flat" cmpd="sng" algn="ctr">
+                      <a:solidFill>
+                        <a:srgbClr val="EEEEEE"/>
+                      </a:solidFill>
+                      <a:prstDash val="solid"/>
+                      <a:round/>
+                      <a:headEnd type="none" w="med" len="med"/>
+                      <a:tailEnd type="none" w="med" len="med"/>
+                    </a:lnL>
+                    <a:lnR w="12700" cap="flat" cmpd="sng" algn="ctr">
+                      <a:solidFill>
+                        <a:srgbClr val="EEEEEE"/>
+                      </a:solidFill>
+                      <a:prstDash val="solid"/>
+                      <a:round/>
+                      <a:headEnd type="none" w="med" len="med"/>
+                      <a:tailEnd type="none" w="med" len="med"/>
+                    </a:lnR>
+                    <a:lnT w="12700" cap="flat" cmpd="sng" algn="ctr">
+                      <a:solidFill>
+                        <a:srgbClr val="EEEEEE"/>
+                      </a:solidFill>
+                      <a:prstDash val="solid"/>
+                      <a:round/>
+                      <a:headEnd type="none" w="med" len="med"/>
+                      <a:tailEnd type="none" w="med" len="med"/>
+                    </a:lnT>
+                    <a:lnB w="12700" cap="flat" cmpd="sng" algn="ctr">
+                      <a:solidFill>
+                        <a:srgbClr val="EEEEEE"/>
+                      </a:solidFill>
+                      <a:prstDash val="solid"/>
+                      <a:round/>
+                      <a:headEnd type="none" w="med" len="med"/>
+                      <a:tailEnd type="none" w="med" len="med"/>
+                    </a:lnB>
+                    <a:solidFill>
+                      <a:srgbClr val="FFFFFF"/>
+                    </a:solidFill>
+                  </a:tcPr>
+                </a:tc>
+                <a:tc>
+                  <a:txBody>
+                    <a:bodyPr/>
+                    <a:lstStyle/>
+                    <a:p>
+                      <a:pPr marL="0" indent="0">
+                        <a:buNone/>
+                      </a:pPr>
+                      <a:r>
+                        <a:rPr lang="en-US" sz="1500" dirty="0">
+                          <a:solidFill>
+                            <a:srgbClr val="212121"/>
+                          </a:solidFill>
+                          <a:latin typeface="Arial" pitchFamily="34" charset="0"/>
+                          <a:ea typeface="Arial" pitchFamily="34" charset="-122"/>
+                          <a:cs typeface="Arial" pitchFamily="34" charset="-120"/>
+                        </a:rPr>
+                        <a:t>Subred muy pequeña, para casos puntuales</a:t>
+                      </a:r>
+                      <a:endParaRPr lang="en-US" sz="1500" dirty="0">
+                        <a:latin typeface="Arial" charset="0"/>
+                        <a:ea typeface="Arial" charset="0"/>
+                        <a:cs typeface="Arial" charset="0"/>
+                      </a:endParaRPr>
+                    </a:p>
+                  </a:txBody>
+                  <a:tcPr anchor="ctr">
+                    <a:lnL w="12700" cap="flat" cmpd="sng" algn="ctr">
+                      <a:solidFill>
+                        <a:srgbClr val="EEEEEE"/>
+                      </a:solidFill>
+                      <a:prstDash val="solid"/>
+                      <a:round/>
+                      <a:headEnd type="none" w="med" len="med"/>
+                      <a:tailEnd type="none" w="med" len="med"/>
+                    </a:lnL>
+                    <a:lnR w="12700" cap="flat" cmpd="sng" algn="ctr">
+                      <a:solidFill>
+                        <a:srgbClr val="EEEEEE"/>
+                      </a:solidFill>
+                      <a:prstDash val="solid"/>
+                      <a:round/>
+                      <a:headEnd type="none" w="med" len="med"/>
+                      <a:tailEnd type="none" w="med" len="med"/>
+                    </a:lnR>
+                    <a:lnT w="12700" cap="flat" cmpd="sng" algn="ctr">
+                      <a:solidFill>
+                        <a:srgbClr val="EEEEEE"/>
+                      </a:solidFill>
+                      <a:prstDash val="solid"/>
+                      <a:round/>
+                      <a:headEnd type="none" w="med" len="med"/>
+                      <a:tailEnd type="none" w="med" len="med"/>
+                    </a:lnT>
+                    <a:lnB w="12700" cap="flat" cmpd="sng" algn="ctr">
+                      <a:solidFill>
+                        <a:srgbClr val="EEEEEE"/>
+                      </a:solidFill>
+                      <a:prstDash val="solid"/>
+                      <a:round/>
+                      <a:headEnd type="none" w="med" len="med"/>
+                      <a:tailEnd type="none" w="med" len="med"/>
+                    </a:lnB>
+                    <a:solidFill>
+                      <a:srgbClr val="FFFFFF"/>
+                    </a:solidFill>
+                  </a:tcPr>
+                </a:tc>
+                <a:extLst>
+                  <a:ext uri="{0D108BD9-81ED-4DB2-BD59-A6C34878D82A}">
+                    <a16:rowId xmlns:a16="http://schemas.microsoft.com/office/drawing/2014/main" val="10003"/>
+                  </a:ext>
+                </a:extLst>
+              </a:tr>
+            </a:tbl>
+          </a:graphicData>
+        </a:graphic>
+      </p:graphicFrame>
+      <p:sp>
+        <p:nvSpPr>
+          <p:cNvPr id="8" name="Shape 5"/>
+          <p:cNvSpPr/>
+          <p:nvPr/>
+        </p:nvSpPr>
+        <p:spPr>
+          <a:xfrm>
+            <a:off x="548640" y="4343400"/>
+            <a:ext cx="11091672" cy="1188720"/>
+          </a:xfrm>
+          <a:prstGeom prst="roundRect">
+            <a:avLst/>
+          </a:prstGeom>
+          <a:solidFill>
+            <a:srgbClr val="E8EAF6"/>
+          </a:solidFill>
+          <a:ln w="15875">
+            <a:solidFill>
+              <a:srgbClr val="3949AB"/>
+            </a:solidFill>
+            <a:prstDash val="solid"/>
+          </a:ln>
+        </p:spPr>
+        <p:txBody>
+          <a:bodyPr/>
+          <a:lstStyle/>
+          <a:p>
+            <a:endParaRPr lang="es-ES"/>
+          </a:p>
+        </p:txBody>
+      </p:sp>
+      <p:sp>
+        <p:nvSpPr>
+          <p:cNvPr id="9" name="Text 6"/>
+          <p:cNvSpPr/>
+          <p:nvPr/>
+        </p:nvSpPr>
+        <p:spPr>
+          <a:xfrm>
+            <a:off x="731520" y="4416552"/>
+            <a:ext cx="10725912" cy="548640"/>
+          </a:xfrm>
+          <a:prstGeom prst="rect">
+            <a:avLst/>
+          </a:prstGeom>
+          <a:noFill/>
+          <a:ln/>
+        </p:spPr>
+        <p:txBody>
+          <a:bodyPr wrap="square" rtlCol="0" anchor="ctr"/>
+          <a:lstStyle/>
+          <a:p>
+            <a:pPr marL="0" indent="0">
+              <a:buNone/>
+            </a:pPr>
+            <a:r>
+              <a:rPr lang="en-US" sz="1800" b="1" dirty="0">
+                <a:solidFill>
+                  <a:srgbClr val="1A237E"/>
+                </a:solidFill>
+                <a:latin typeface="Courier New" pitchFamily="34" charset="0"/>
+                <a:ea typeface="Courier New" pitchFamily="34" charset="-122"/>
+                <a:cs typeface="Courier New" pitchFamily="34" charset="-120"/>
+              </a:rPr>
+              <a:t>De la VPC a la subred, con números reales</a:t>
+            </a:r>
+            <a:endParaRPr lang="en-US" sz="1800" dirty="0"/>
+          </a:p>
+        </p:txBody>
+      </p:sp>
+      <p:sp>
+        <p:nvSpPr>
+          <p:cNvPr id="10" name="Text 7"/>
+          <p:cNvSpPr/>
+          <p:nvPr/>
+        </p:nvSpPr>
+        <p:spPr>
+          <a:xfrm>
+            <a:off x="731520" y="4965192"/>
+            <a:ext cx="10725912" cy="493776"/>
+          </a:xfrm>
+          <a:prstGeom prst="rect">
+            <a:avLst/>
+          </a:prstGeom>
+          <a:noFill/>
+          <a:ln/>
+        </p:spPr>
+        <p:txBody>
+          <a:bodyPr wrap="square" rtlCol="0" anchor="t"/>
+          <a:lstStyle/>
+          <a:p>
+            <a:pPr marL="0" indent="0">
+              <a:buNone/>
+            </a:pPr>
+            <a:r>
+              <a:rPr lang="en-US" sz="1500" dirty="0">
+                <a:solidFill>
+                  <a:srgbClr val="212121"/>
+                </a:solidFill>
+                <a:latin typeface="Arial" pitchFamily="34" charset="0"/>
+                <a:ea typeface="Arial" pitchFamily="34" charset="-122"/>
+                <a:cs typeface="Arial" pitchFamily="34" charset="-120"/>
+              </a:rPr>
+              <a:t>10.0.0.0/16 → subredes /24: 10.0.0.0/24, 10.0.1.0/24, 10.0.2.0/24... Con dos o tres ya sobra espacio para todo el módulo.</a:t>
+            </a:r>
+            <a:endParaRPr lang="en-US" sz="1500" dirty="0"/>
+          </a:p>
+        </p:txBody>
+      </p:sp>
+      <p:sp>
+        <p:nvSpPr>
+          <p:cNvPr id="11" name="Text 8"/>
+          <p:cNvSpPr/>
+          <p:nvPr/>
+        </p:nvSpPr>
+        <p:spPr>
+          <a:xfrm>
+            <a:off x="548640" y="5760720"/>
+            <a:ext cx="11091672" cy="548640"/>
+          </a:xfrm>
+          <a:prstGeom prst="rect">
+            <a:avLst/>
+          </a:prstGeom>
+          <a:noFill/>
+          <a:ln/>
+        </p:spPr>
+        <p:txBody>
+          <a:bodyPr wrap="square" rtlCol="0" anchor="t"/>
+          <a:lstStyle/>
+          <a:p>
+            <a:pPr marL="0" indent="0" algn="ctr">
+              <a:buNone/>
+            </a:pPr>
+            <a:r>
+              <a:rPr lang="en-US" sz="1400" dirty="0">
+                <a:solidFill>
+                  <a:srgbClr val="757575"/>
+                </a:solidFill>
+                <a:latin typeface="Arial" pitchFamily="34" charset="0"/>
+                <a:ea typeface="Arial" pitchFamily="34" charset="-122"/>
+                <a:cs typeface="Arial" pitchFamily="34" charset="-120"/>
+              </a:rPr>
+              <a:t>El error típico es repetir sin querer el mismo rango en dos subredes. El reparto debe quedar documentado antes de crear nada.</a:t>
+            </a:r>
+            <a:endParaRPr lang="en-US" sz="1400" dirty="0"/>
           </a:p>
         </p:txBody>
       </p:sp>
@@ -4030,7 +5994,7 @@
                 <a:ea typeface="Arial" pitchFamily="34" charset="-122"/>
                 <a:cs typeface="Arial" pitchFamily="34" charset="-120"/>
               </a:rPr>
-              <a:t>CIDR: cómo se escribe un rango de direcciones</a:t>
+              <a:t>Subredes públicas y privadas</a:t>
             </a:r>
             <a:endParaRPr lang="en-US" sz="2400" dirty="0"/>
           </a:p>
@@ -4077,14 +6041,46 @@
       </p:sp>
       <p:sp>
         <p:nvSpPr>
-          <p:cNvPr id="5" name="Text 3"/>
-          <p:cNvSpPr/>
-          <p:nvPr/>
-        </p:nvSpPr>
-        <p:spPr>
-          <a:xfrm>
-            <a:off x="548640" y="1188720"/>
-            <a:ext cx="11091672" cy="1371600"/>
+          <p:cNvPr id="5" name="Shape 3"/>
+          <p:cNvSpPr/>
+          <p:nvPr/>
+        </p:nvSpPr>
+        <p:spPr>
+          <a:xfrm>
+            <a:off x="548640" y="1143000"/>
+            <a:ext cx="11091672" cy="914400"/>
+          </a:xfrm>
+          <a:prstGeom prst="roundRect">
+            <a:avLst/>
+          </a:prstGeom>
+          <a:solidFill>
+            <a:srgbClr val="FFF8E1"/>
+          </a:solidFill>
+          <a:ln w="19050">
+            <a:solidFill>
+              <a:srgbClr val="FFA000"/>
+            </a:solidFill>
+            <a:prstDash val="solid"/>
+          </a:ln>
+        </p:spPr>
+        <p:txBody>
+          <a:bodyPr/>
+          <a:lstStyle/>
+          <a:p>
+            <a:endParaRPr lang="es-ES"/>
+          </a:p>
+        </p:txBody>
+      </p:sp>
+      <p:sp>
+        <p:nvSpPr>
+          <p:cNvPr id="6" name="Text 4"/>
+          <p:cNvSpPr/>
+          <p:nvPr/>
+        </p:nvSpPr>
+        <p:spPr>
+          <a:xfrm>
+            <a:off x="822960" y="1234440"/>
+            <a:ext cx="10543032" cy="731520"/>
           </a:xfrm>
           <a:prstGeom prst="rect">
             <a:avLst/>
@@ -4093,14 +6089,14 @@
           <a:ln/>
         </p:spPr>
         <p:txBody>
-          <a:bodyPr wrap="square" rtlCol="0" anchor="t"/>
+          <a:bodyPr wrap="square" rtlCol="0" anchor="ctr"/>
           <a:lstStyle/>
           <a:p>
             <a:pPr marL="0" indent="0">
               <a:buNone/>
             </a:pPr>
             <a:r>
-              <a:rPr lang="en-US" sz="1800" dirty="0">
+              <a:rPr lang="en-US" sz="1700" dirty="0">
                 <a:solidFill>
                   <a:srgbClr val="212121"/>
                 </a:solidFill>
@@ -4108,905 +6104,36 @@
                 <a:ea typeface="Arial" pitchFamily="34" charset="-122"/>
                 <a:cs typeface="Arial" pitchFamily="34" charset="-120"/>
               </a:rPr>
-              <a:t>El rango de direcciones de una VPC se escribe en notación CIDR: una dirección IP seguida de una barra y un número, como 10.0.0.0/16. Ese número —el prefijo— indica cuántos de los 32 bits están fijos (la red) y cuántos quedan libres para repartir.</a:t>
+              <a:t>Como un edificio de oficinas: la recepción tiene puerta a la calle; la sala de servidores está en el sótano. No hay ningún interruptor especial — es solo si tienen puerta a internet o no.</a:t>
             </a:r>
-            <a:endParaRPr lang="en-US" sz="1800" dirty="0"/>
-          </a:p>
-        </p:txBody>
-      </p:sp>
-      <p:graphicFrame>
-        <p:nvGraphicFramePr>
-          <p:cNvPr id="6" name="Table 0"/>
-          <p:cNvGraphicFramePr>
-            <a:graphicFrameLocks noGrp="1"/>
-          </p:cNvGraphicFramePr>
-          <p:nvPr>
-            <p:extLst>
-              <p:ext uri="{D42A27DB-BD31-4B8C-83A1-F6EECF244321}">
-                <p14:modId xmlns:p14="http://schemas.microsoft.com/office/powerpoint/2010/main" val="1579011935"/>
-              </p:ext>
-            </p:extLst>
-          </p:nvPr>
-        </p:nvGraphicFramePr>
-        <p:xfrm>
-          <a:off x="548640" y="2788920"/>
-          <a:ext cx="11091672" cy="3108960"/>
-        </p:xfrm>
-        <a:graphic>
-          <a:graphicData uri="http://schemas.openxmlformats.org/drawingml/2006/table">
-            <a:tbl>
-              <a:tblPr/>
-              <a:tblGrid>
-                <a:gridCol w="2218334">
-                  <a:extLst>
-                    <a:ext uri="{9D8B030D-6E8A-4147-A177-3AD203B41FA5}">
-                      <a16:colId xmlns:a16="http://schemas.microsoft.com/office/drawing/2014/main" val="20000"/>
-                    </a:ext>
-                  </a:extLst>
-                </a:gridCol>
-                <a:gridCol w="3327502">
-                  <a:extLst>
-                    <a:ext uri="{9D8B030D-6E8A-4147-A177-3AD203B41FA5}">
-                      <a16:colId xmlns:a16="http://schemas.microsoft.com/office/drawing/2014/main" val="20001"/>
-                    </a:ext>
-                  </a:extLst>
-                </a:gridCol>
-                <a:gridCol w="5545836">
-                  <a:extLst>
-                    <a:ext uri="{9D8B030D-6E8A-4147-A177-3AD203B41FA5}">
-                      <a16:colId xmlns:a16="http://schemas.microsoft.com/office/drawing/2014/main" val="20002"/>
-                    </a:ext>
-                  </a:extLst>
-                </a:gridCol>
-              </a:tblGrid>
-              <a:tr h="777240">
-                <a:tc>
-                  <a:txBody>
-                    <a:bodyPr/>
-                    <a:lstStyle/>
-                    <a:p>
-                      <a:pPr marL="0" indent="0" algn="ctr">
-                        <a:buNone/>
-                      </a:pPr>
-                      <a:r>
-                        <a:rPr lang="en-US" sz="1800" b="1" dirty="0">
-                          <a:solidFill>
-                            <a:srgbClr val="FFFFFF"/>
-                          </a:solidFill>
-                          <a:latin typeface="Arial" pitchFamily="34" charset="0"/>
-                          <a:ea typeface="Arial" pitchFamily="34" charset="-122"/>
-                          <a:cs typeface="Arial" pitchFamily="34" charset="-120"/>
-                        </a:rPr>
-                        <a:t>Prefijo</a:t>
-                      </a:r>
-                      <a:endParaRPr lang="en-US" sz="1800" dirty="0">
-                        <a:latin typeface="Arial" charset="0"/>
-                        <a:ea typeface="Arial" charset="0"/>
-                        <a:cs typeface="Arial" charset="0"/>
-                      </a:endParaRPr>
-                    </a:p>
-                  </a:txBody>
-                  <a:tcPr anchor="ctr">
-                    <a:lnL w="12700" cap="flat" cmpd="sng" algn="ctr">
-                      <a:solidFill>
-                        <a:srgbClr val="EEEEEE"/>
-                      </a:solidFill>
-                      <a:prstDash val="solid"/>
-                      <a:round/>
-                      <a:headEnd type="none" w="med" len="med"/>
-                      <a:tailEnd type="none" w="med" len="med"/>
-                    </a:lnL>
-                    <a:lnR w="12700" cap="flat" cmpd="sng" algn="ctr">
-                      <a:solidFill>
-                        <a:srgbClr val="EEEEEE"/>
-                      </a:solidFill>
-                      <a:prstDash val="solid"/>
-                      <a:round/>
-                      <a:headEnd type="none" w="med" len="med"/>
-                      <a:tailEnd type="none" w="med" len="med"/>
-                    </a:lnR>
-                    <a:lnT w="12700" cap="flat" cmpd="sng" algn="ctr">
-                      <a:solidFill>
-                        <a:srgbClr val="EEEEEE"/>
-                      </a:solidFill>
-                      <a:prstDash val="solid"/>
-                      <a:round/>
-                      <a:headEnd type="none" w="med" len="med"/>
-                      <a:tailEnd type="none" w="med" len="med"/>
-                    </a:lnT>
-                    <a:lnB w="12700" cap="flat" cmpd="sng" algn="ctr">
-                      <a:solidFill>
-                        <a:srgbClr val="EEEEEE"/>
-                      </a:solidFill>
-                      <a:prstDash val="solid"/>
-                      <a:round/>
-                      <a:headEnd type="none" w="med" len="med"/>
-                      <a:tailEnd type="none" w="med" len="med"/>
-                    </a:lnB>
-                    <a:solidFill>
-                      <a:srgbClr val="3949AB"/>
-                    </a:solidFill>
-                  </a:tcPr>
-                </a:tc>
-                <a:tc>
-                  <a:txBody>
-                    <a:bodyPr/>
-                    <a:lstStyle/>
-                    <a:p>
-                      <a:pPr marL="0" indent="0" algn="ctr">
-                        <a:buNone/>
-                      </a:pPr>
-                      <a:r>
-                        <a:rPr lang="en-US" sz="1800" b="1" dirty="0">
-                          <a:solidFill>
-                            <a:srgbClr val="FFFFFF"/>
-                          </a:solidFill>
-                          <a:latin typeface="Arial" pitchFamily="34" charset="0"/>
-                          <a:ea typeface="Arial" pitchFamily="34" charset="-122"/>
-                          <a:cs typeface="Arial" pitchFamily="34" charset="-120"/>
-                        </a:rPr>
-                        <a:t>Direcciones totales</a:t>
-                      </a:r>
-                      <a:endParaRPr lang="en-US" sz="1800" dirty="0">
-                        <a:latin typeface="Arial" charset="0"/>
-                        <a:ea typeface="Arial" charset="0"/>
-                        <a:cs typeface="Arial" charset="0"/>
-                      </a:endParaRPr>
-                    </a:p>
-                  </a:txBody>
-                  <a:tcPr anchor="ctr">
-                    <a:lnL w="12700" cap="flat" cmpd="sng" algn="ctr">
-                      <a:solidFill>
-                        <a:srgbClr val="EEEEEE"/>
-                      </a:solidFill>
-                      <a:prstDash val="solid"/>
-                      <a:round/>
-                      <a:headEnd type="none" w="med" len="med"/>
-                      <a:tailEnd type="none" w="med" len="med"/>
-                    </a:lnL>
-                    <a:lnR w="12700" cap="flat" cmpd="sng" algn="ctr">
-                      <a:solidFill>
-                        <a:srgbClr val="EEEEEE"/>
-                      </a:solidFill>
-                      <a:prstDash val="solid"/>
-                      <a:round/>
-                      <a:headEnd type="none" w="med" len="med"/>
-                      <a:tailEnd type="none" w="med" len="med"/>
-                    </a:lnR>
-                    <a:lnT w="12700" cap="flat" cmpd="sng" algn="ctr">
-                      <a:solidFill>
-                        <a:srgbClr val="EEEEEE"/>
-                      </a:solidFill>
-                      <a:prstDash val="solid"/>
-                      <a:round/>
-                      <a:headEnd type="none" w="med" len="med"/>
-                      <a:tailEnd type="none" w="med" len="med"/>
-                    </a:lnT>
-                    <a:lnB w="12700" cap="flat" cmpd="sng" algn="ctr">
-                      <a:solidFill>
-                        <a:srgbClr val="EEEEEE"/>
-                      </a:solidFill>
-                      <a:prstDash val="solid"/>
-                      <a:round/>
-                      <a:headEnd type="none" w="med" len="med"/>
-                      <a:tailEnd type="none" w="med" len="med"/>
-                    </a:lnB>
-                    <a:solidFill>
-                      <a:srgbClr val="3949AB"/>
-                    </a:solidFill>
-                  </a:tcPr>
-                </a:tc>
-                <a:tc>
-                  <a:txBody>
-                    <a:bodyPr/>
-                    <a:lstStyle/>
-                    <a:p>
-                      <a:pPr marL="0" indent="0" algn="ctr">
-                        <a:buNone/>
-                      </a:pPr>
-                      <a:r>
-                        <a:rPr lang="en-US" sz="1800" b="1" dirty="0">
-                          <a:solidFill>
-                            <a:srgbClr val="FFFFFF"/>
-                          </a:solidFill>
-                          <a:latin typeface="Arial" pitchFamily="34" charset="0"/>
-                          <a:ea typeface="Arial" pitchFamily="34" charset="-122"/>
-                          <a:cs typeface="Arial" pitchFamily="34" charset="-120"/>
-                        </a:rPr>
-                        <a:t>Uso típico en este módulo</a:t>
-                      </a:r>
-                      <a:endParaRPr lang="en-US" sz="1800" dirty="0">
-                        <a:latin typeface="Arial" charset="0"/>
-                        <a:ea typeface="Arial" charset="0"/>
-                        <a:cs typeface="Arial" charset="0"/>
-                      </a:endParaRPr>
-                    </a:p>
-                  </a:txBody>
-                  <a:tcPr anchor="ctr">
-                    <a:lnL w="12700" cap="flat" cmpd="sng" algn="ctr">
-                      <a:solidFill>
-                        <a:srgbClr val="EEEEEE"/>
-                      </a:solidFill>
-                      <a:prstDash val="solid"/>
-                      <a:round/>
-                      <a:headEnd type="none" w="med" len="med"/>
-                      <a:tailEnd type="none" w="med" len="med"/>
-                    </a:lnL>
-                    <a:lnR w="12700" cap="flat" cmpd="sng" algn="ctr">
-                      <a:solidFill>
-                        <a:srgbClr val="EEEEEE"/>
-                      </a:solidFill>
-                      <a:prstDash val="solid"/>
-                      <a:round/>
-                      <a:headEnd type="none" w="med" len="med"/>
-                      <a:tailEnd type="none" w="med" len="med"/>
-                    </a:lnR>
-                    <a:lnT w="12700" cap="flat" cmpd="sng" algn="ctr">
-                      <a:solidFill>
-                        <a:srgbClr val="EEEEEE"/>
-                      </a:solidFill>
-                      <a:prstDash val="solid"/>
-                      <a:round/>
-                      <a:headEnd type="none" w="med" len="med"/>
-                      <a:tailEnd type="none" w="med" len="med"/>
-                    </a:lnT>
-                    <a:lnB w="12700" cap="flat" cmpd="sng" algn="ctr">
-                      <a:solidFill>
-                        <a:srgbClr val="EEEEEE"/>
-                      </a:solidFill>
-                      <a:prstDash val="solid"/>
-                      <a:round/>
-                      <a:headEnd type="none" w="med" len="med"/>
-                      <a:tailEnd type="none" w="med" len="med"/>
-                    </a:lnB>
-                    <a:solidFill>
-                      <a:srgbClr val="3949AB"/>
-                    </a:solidFill>
-                  </a:tcPr>
-                </a:tc>
-                <a:extLst>
-                  <a:ext uri="{0D108BD9-81ED-4DB2-BD59-A6C34878D82A}">
-                    <a16:rowId xmlns:a16="http://schemas.microsoft.com/office/drawing/2014/main" val="10000"/>
-                  </a:ext>
-                </a:extLst>
-              </a:tr>
-              <a:tr h="777240">
-                <a:tc>
-                  <a:txBody>
-                    <a:bodyPr/>
-                    <a:lstStyle/>
-                    <a:p>
-                      <a:pPr marL="0" indent="0">
-                        <a:buNone/>
-                      </a:pPr>
-                      <a:r>
-                        <a:rPr lang="en-US" sz="1700" b="1" dirty="0">
-                          <a:solidFill>
-                            <a:srgbClr val="212121"/>
-                          </a:solidFill>
-                          <a:latin typeface="Arial" pitchFamily="34" charset="0"/>
-                          <a:ea typeface="Arial" pitchFamily="34" charset="-122"/>
-                          <a:cs typeface="Arial" pitchFamily="34" charset="-120"/>
-                        </a:rPr>
-                        <a:t>/16</a:t>
-                      </a:r>
-                      <a:endParaRPr lang="en-US" sz="1700" dirty="0">
-                        <a:latin typeface="Arial" charset="0"/>
-                        <a:ea typeface="Arial" charset="0"/>
-                        <a:cs typeface="Arial" charset="0"/>
-                      </a:endParaRPr>
-                    </a:p>
-                  </a:txBody>
-                  <a:tcPr anchor="ctr">
-                    <a:lnL w="12700" cap="flat" cmpd="sng" algn="ctr">
-                      <a:solidFill>
-                        <a:srgbClr val="EEEEEE"/>
-                      </a:solidFill>
-                      <a:prstDash val="solid"/>
-                      <a:round/>
-                      <a:headEnd type="none" w="med" len="med"/>
-                      <a:tailEnd type="none" w="med" len="med"/>
-                    </a:lnL>
-                    <a:lnR w="12700" cap="flat" cmpd="sng" algn="ctr">
-                      <a:solidFill>
-                        <a:srgbClr val="EEEEEE"/>
-                      </a:solidFill>
-                      <a:prstDash val="solid"/>
-                      <a:round/>
-                      <a:headEnd type="none" w="med" len="med"/>
-                      <a:tailEnd type="none" w="med" len="med"/>
-                    </a:lnR>
-                    <a:lnT w="12700" cap="flat" cmpd="sng" algn="ctr">
-                      <a:solidFill>
-                        <a:srgbClr val="EEEEEE"/>
-                      </a:solidFill>
-                      <a:prstDash val="solid"/>
-                      <a:round/>
-                      <a:headEnd type="none" w="med" len="med"/>
-                      <a:tailEnd type="none" w="med" len="med"/>
-                    </a:lnT>
-                    <a:lnB w="12700" cap="flat" cmpd="sng" algn="ctr">
-                      <a:solidFill>
-                        <a:srgbClr val="EEEEEE"/>
-                      </a:solidFill>
-                      <a:prstDash val="solid"/>
-                      <a:round/>
-                      <a:headEnd type="none" w="med" len="med"/>
-                      <a:tailEnd type="none" w="med" len="med"/>
-                    </a:lnB>
-                    <a:solidFill>
-                      <a:srgbClr val="FFFFFF"/>
-                    </a:solidFill>
-                  </a:tcPr>
-                </a:tc>
-                <a:tc>
-                  <a:txBody>
-                    <a:bodyPr/>
-                    <a:lstStyle/>
-                    <a:p>
-                      <a:pPr marL="0" indent="0">
-                        <a:buNone/>
-                      </a:pPr>
-                      <a:r>
-                        <a:rPr lang="en-US" sz="1700" dirty="0">
-                          <a:solidFill>
-                            <a:srgbClr val="212121"/>
-                          </a:solidFill>
-                          <a:latin typeface="Arial" pitchFamily="34" charset="0"/>
-                          <a:ea typeface="Arial" pitchFamily="34" charset="-122"/>
-                          <a:cs typeface="Arial" pitchFamily="34" charset="-120"/>
-                        </a:rPr>
-                        <a:t>65.536</a:t>
-                      </a:r>
-                      <a:endParaRPr lang="en-US" sz="1700" dirty="0">
-                        <a:latin typeface="Arial" charset="0"/>
-                        <a:ea typeface="Arial" charset="0"/>
-                        <a:cs typeface="Arial" charset="0"/>
-                      </a:endParaRPr>
-                    </a:p>
-                  </a:txBody>
-                  <a:tcPr anchor="ctr">
-                    <a:lnL w="12700" cap="flat" cmpd="sng" algn="ctr">
-                      <a:solidFill>
-                        <a:srgbClr val="EEEEEE"/>
-                      </a:solidFill>
-                      <a:prstDash val="solid"/>
-                      <a:round/>
-                      <a:headEnd type="none" w="med" len="med"/>
-                      <a:tailEnd type="none" w="med" len="med"/>
-                    </a:lnL>
-                    <a:lnR w="12700" cap="flat" cmpd="sng" algn="ctr">
-                      <a:solidFill>
-                        <a:srgbClr val="EEEEEE"/>
-                      </a:solidFill>
-                      <a:prstDash val="solid"/>
-                      <a:round/>
-                      <a:headEnd type="none" w="med" len="med"/>
-                      <a:tailEnd type="none" w="med" len="med"/>
-                    </a:lnR>
-                    <a:lnT w="12700" cap="flat" cmpd="sng" algn="ctr">
-                      <a:solidFill>
-                        <a:srgbClr val="EEEEEE"/>
-                      </a:solidFill>
-                      <a:prstDash val="solid"/>
-                      <a:round/>
-                      <a:headEnd type="none" w="med" len="med"/>
-                      <a:tailEnd type="none" w="med" len="med"/>
-                    </a:lnT>
-                    <a:lnB w="12700" cap="flat" cmpd="sng" algn="ctr">
-                      <a:solidFill>
-                        <a:srgbClr val="EEEEEE"/>
-                      </a:solidFill>
-                      <a:prstDash val="solid"/>
-                      <a:round/>
-                      <a:headEnd type="none" w="med" len="med"/>
-                      <a:tailEnd type="none" w="med" len="med"/>
-                    </a:lnB>
-                    <a:solidFill>
-                      <a:srgbClr val="FFFFFF"/>
-                    </a:solidFill>
-                  </a:tcPr>
-                </a:tc>
-                <a:tc>
-                  <a:txBody>
-                    <a:bodyPr/>
-                    <a:lstStyle/>
-                    <a:p>
-                      <a:pPr marL="0" indent="0">
-                        <a:buNone/>
-                      </a:pPr>
-                      <a:r>
-                        <a:rPr lang="en-US" sz="1700" dirty="0">
-                          <a:solidFill>
-                            <a:srgbClr val="212121"/>
-                          </a:solidFill>
-                          <a:latin typeface="Arial" pitchFamily="34" charset="0"/>
-                          <a:ea typeface="Arial" pitchFamily="34" charset="-122"/>
-                          <a:cs typeface="Arial" pitchFamily="34" charset="-120"/>
-                        </a:rPr>
-                        <a:t>Rango completo de la VPC</a:t>
-                      </a:r>
-                      <a:endParaRPr lang="en-US" sz="1700" dirty="0">
-                        <a:latin typeface="Arial" charset="0"/>
-                        <a:ea typeface="Arial" charset="0"/>
-                        <a:cs typeface="Arial" charset="0"/>
-                      </a:endParaRPr>
-                    </a:p>
-                  </a:txBody>
-                  <a:tcPr anchor="ctr">
-                    <a:lnL w="12700" cap="flat" cmpd="sng" algn="ctr">
-                      <a:solidFill>
-                        <a:srgbClr val="EEEEEE"/>
-                      </a:solidFill>
-                      <a:prstDash val="solid"/>
-                      <a:round/>
-                      <a:headEnd type="none" w="med" len="med"/>
-                      <a:tailEnd type="none" w="med" len="med"/>
-                    </a:lnL>
-                    <a:lnR w="12700" cap="flat" cmpd="sng" algn="ctr">
-                      <a:solidFill>
-                        <a:srgbClr val="EEEEEE"/>
-                      </a:solidFill>
-                      <a:prstDash val="solid"/>
-                      <a:round/>
-                      <a:headEnd type="none" w="med" len="med"/>
-                      <a:tailEnd type="none" w="med" len="med"/>
-                    </a:lnR>
-                    <a:lnT w="12700" cap="flat" cmpd="sng" algn="ctr">
-                      <a:solidFill>
-                        <a:srgbClr val="EEEEEE"/>
-                      </a:solidFill>
-                      <a:prstDash val="solid"/>
-                      <a:round/>
-                      <a:headEnd type="none" w="med" len="med"/>
-                      <a:tailEnd type="none" w="med" len="med"/>
-                    </a:lnT>
-                    <a:lnB w="12700" cap="flat" cmpd="sng" algn="ctr">
-                      <a:solidFill>
-                        <a:srgbClr val="EEEEEE"/>
-                      </a:solidFill>
-                      <a:prstDash val="solid"/>
-                      <a:round/>
-                      <a:headEnd type="none" w="med" len="med"/>
-                      <a:tailEnd type="none" w="med" len="med"/>
-                    </a:lnB>
-                    <a:solidFill>
-                      <a:srgbClr val="FFFFFF"/>
-                    </a:solidFill>
-                  </a:tcPr>
-                </a:tc>
-                <a:extLst>
-                  <a:ext uri="{0D108BD9-81ED-4DB2-BD59-A6C34878D82A}">
-                    <a16:rowId xmlns:a16="http://schemas.microsoft.com/office/drawing/2014/main" val="10001"/>
-                  </a:ext>
-                </a:extLst>
-              </a:tr>
-              <a:tr h="777240">
-                <a:tc>
-                  <a:txBody>
-                    <a:bodyPr/>
-                    <a:lstStyle/>
-                    <a:p>
-                      <a:pPr marL="0" indent="0">
-                        <a:buNone/>
-                      </a:pPr>
-                      <a:r>
-                        <a:rPr lang="en-US" sz="1700" b="1" dirty="0">
-                          <a:solidFill>
-                            <a:srgbClr val="212121"/>
-                          </a:solidFill>
-                          <a:latin typeface="Arial" pitchFamily="34" charset="0"/>
-                          <a:ea typeface="Arial" pitchFamily="34" charset="-122"/>
-                          <a:cs typeface="Arial" pitchFamily="34" charset="-120"/>
-                        </a:rPr>
-                        <a:t>/24</a:t>
-                      </a:r>
-                      <a:endParaRPr lang="en-US" sz="1700" dirty="0">
-                        <a:latin typeface="Arial" charset="0"/>
-                        <a:ea typeface="Arial" charset="0"/>
-                        <a:cs typeface="Arial" charset="0"/>
-                      </a:endParaRPr>
-                    </a:p>
-                  </a:txBody>
-                  <a:tcPr anchor="ctr">
-                    <a:lnL w="12700" cap="flat" cmpd="sng" algn="ctr">
-                      <a:solidFill>
-                        <a:srgbClr val="EEEEEE"/>
-                      </a:solidFill>
-                      <a:prstDash val="solid"/>
-                      <a:round/>
-                      <a:headEnd type="none" w="med" len="med"/>
-                      <a:tailEnd type="none" w="med" len="med"/>
-                    </a:lnL>
-                    <a:lnR w="12700" cap="flat" cmpd="sng" algn="ctr">
-                      <a:solidFill>
-                        <a:srgbClr val="EEEEEE"/>
-                      </a:solidFill>
-                      <a:prstDash val="solid"/>
-                      <a:round/>
-                      <a:headEnd type="none" w="med" len="med"/>
-                      <a:tailEnd type="none" w="med" len="med"/>
-                    </a:lnR>
-                    <a:lnT w="12700" cap="flat" cmpd="sng" algn="ctr">
-                      <a:solidFill>
-                        <a:srgbClr val="EEEEEE"/>
-                      </a:solidFill>
-                      <a:prstDash val="solid"/>
-                      <a:round/>
-                      <a:headEnd type="none" w="med" len="med"/>
-                      <a:tailEnd type="none" w="med" len="med"/>
-                    </a:lnT>
-                    <a:lnB w="12700" cap="flat" cmpd="sng" algn="ctr">
-                      <a:solidFill>
-                        <a:srgbClr val="EEEEEE"/>
-                      </a:solidFill>
-                      <a:prstDash val="solid"/>
-                      <a:round/>
-                      <a:headEnd type="none" w="med" len="med"/>
-                      <a:tailEnd type="none" w="med" len="med"/>
-                    </a:lnB>
-                    <a:solidFill>
-                      <a:srgbClr val="F5F5F5"/>
-                    </a:solidFill>
-                  </a:tcPr>
-                </a:tc>
-                <a:tc>
-                  <a:txBody>
-                    <a:bodyPr/>
-                    <a:lstStyle/>
-                    <a:p>
-                      <a:pPr marL="0" indent="0">
-                        <a:buNone/>
-                      </a:pPr>
-                      <a:r>
-                        <a:rPr lang="en-US" sz="1700" dirty="0">
-                          <a:solidFill>
-                            <a:srgbClr val="212121"/>
-                          </a:solidFill>
-                          <a:latin typeface="Arial" pitchFamily="34" charset="0"/>
-                          <a:ea typeface="Arial" pitchFamily="34" charset="-122"/>
-                          <a:cs typeface="Arial" pitchFamily="34" charset="-120"/>
-                        </a:rPr>
-                        <a:t>256</a:t>
-                      </a:r>
-                      <a:endParaRPr lang="en-US" sz="1700" dirty="0">
-                        <a:latin typeface="Arial" charset="0"/>
-                        <a:ea typeface="Arial" charset="0"/>
-                        <a:cs typeface="Arial" charset="0"/>
-                      </a:endParaRPr>
-                    </a:p>
-                  </a:txBody>
-                  <a:tcPr anchor="ctr">
-                    <a:lnL w="12700" cap="flat" cmpd="sng" algn="ctr">
-                      <a:solidFill>
-                        <a:srgbClr val="EEEEEE"/>
-                      </a:solidFill>
-                      <a:prstDash val="solid"/>
-                      <a:round/>
-                      <a:headEnd type="none" w="med" len="med"/>
-                      <a:tailEnd type="none" w="med" len="med"/>
-                    </a:lnL>
-                    <a:lnR w="12700" cap="flat" cmpd="sng" algn="ctr">
-                      <a:solidFill>
-                        <a:srgbClr val="EEEEEE"/>
-                      </a:solidFill>
-                      <a:prstDash val="solid"/>
-                      <a:round/>
-                      <a:headEnd type="none" w="med" len="med"/>
-                      <a:tailEnd type="none" w="med" len="med"/>
-                    </a:lnR>
-                    <a:lnT w="12700" cap="flat" cmpd="sng" algn="ctr">
-                      <a:solidFill>
-                        <a:srgbClr val="EEEEEE"/>
-                      </a:solidFill>
-                      <a:prstDash val="solid"/>
-                      <a:round/>
-                      <a:headEnd type="none" w="med" len="med"/>
-                      <a:tailEnd type="none" w="med" len="med"/>
-                    </a:lnT>
-                    <a:lnB w="12700" cap="flat" cmpd="sng" algn="ctr">
-                      <a:solidFill>
-                        <a:srgbClr val="EEEEEE"/>
-                      </a:solidFill>
-                      <a:prstDash val="solid"/>
-                      <a:round/>
-                      <a:headEnd type="none" w="med" len="med"/>
-                      <a:tailEnd type="none" w="med" len="med"/>
-                    </a:lnB>
-                    <a:solidFill>
-                      <a:srgbClr val="F5F5F5"/>
-                    </a:solidFill>
-                  </a:tcPr>
-                </a:tc>
-                <a:tc>
-                  <a:txBody>
-                    <a:bodyPr/>
-                    <a:lstStyle/>
-                    <a:p>
-                      <a:pPr marL="0" indent="0">
-                        <a:buNone/>
-                      </a:pPr>
-                      <a:r>
-                        <a:rPr lang="en-US" sz="1700" dirty="0">
-                          <a:solidFill>
-                            <a:srgbClr val="212121"/>
-                          </a:solidFill>
-                          <a:latin typeface="Arial" pitchFamily="34" charset="0"/>
-                          <a:ea typeface="Arial" pitchFamily="34" charset="-122"/>
-                          <a:cs typeface="Arial" pitchFamily="34" charset="-120"/>
-                        </a:rPr>
-                        <a:t>Una subred individual dentro de la VPC</a:t>
-                      </a:r>
-                      <a:endParaRPr lang="en-US" sz="1700" dirty="0">
-                        <a:latin typeface="Arial" charset="0"/>
-                        <a:ea typeface="Arial" charset="0"/>
-                        <a:cs typeface="Arial" charset="0"/>
-                      </a:endParaRPr>
-                    </a:p>
-                  </a:txBody>
-                  <a:tcPr anchor="ctr">
-                    <a:lnL w="12700" cap="flat" cmpd="sng" algn="ctr">
-                      <a:solidFill>
-                        <a:srgbClr val="EEEEEE"/>
-                      </a:solidFill>
-                      <a:prstDash val="solid"/>
-                      <a:round/>
-                      <a:headEnd type="none" w="med" len="med"/>
-                      <a:tailEnd type="none" w="med" len="med"/>
-                    </a:lnL>
-                    <a:lnR w="12700" cap="flat" cmpd="sng" algn="ctr">
-                      <a:solidFill>
-                        <a:srgbClr val="EEEEEE"/>
-                      </a:solidFill>
-                      <a:prstDash val="solid"/>
-                      <a:round/>
-                      <a:headEnd type="none" w="med" len="med"/>
-                      <a:tailEnd type="none" w="med" len="med"/>
-                    </a:lnR>
-                    <a:lnT w="12700" cap="flat" cmpd="sng" algn="ctr">
-                      <a:solidFill>
-                        <a:srgbClr val="EEEEEE"/>
-                      </a:solidFill>
-                      <a:prstDash val="solid"/>
-                      <a:round/>
-                      <a:headEnd type="none" w="med" len="med"/>
-                      <a:tailEnd type="none" w="med" len="med"/>
-                    </a:lnT>
-                    <a:lnB w="12700" cap="flat" cmpd="sng" algn="ctr">
-                      <a:solidFill>
-                        <a:srgbClr val="EEEEEE"/>
-                      </a:solidFill>
-                      <a:prstDash val="solid"/>
-                      <a:round/>
-                      <a:headEnd type="none" w="med" len="med"/>
-                      <a:tailEnd type="none" w="med" len="med"/>
-                    </a:lnB>
-                    <a:solidFill>
-                      <a:srgbClr val="F5F5F5"/>
-                    </a:solidFill>
-                  </a:tcPr>
-                </a:tc>
-                <a:extLst>
-                  <a:ext uri="{0D108BD9-81ED-4DB2-BD59-A6C34878D82A}">
-                    <a16:rowId xmlns:a16="http://schemas.microsoft.com/office/drawing/2014/main" val="10002"/>
-                  </a:ext>
-                </a:extLst>
-              </a:tr>
-              <a:tr h="777240">
-                <a:tc>
-                  <a:txBody>
-                    <a:bodyPr/>
-                    <a:lstStyle/>
-                    <a:p>
-                      <a:pPr marL="0" indent="0">
-                        <a:buNone/>
-                      </a:pPr>
-                      <a:r>
-                        <a:rPr lang="en-US" sz="1700" b="1" dirty="0">
-                          <a:solidFill>
-                            <a:srgbClr val="212121"/>
-                          </a:solidFill>
-                          <a:latin typeface="Arial" pitchFamily="34" charset="0"/>
-                          <a:ea typeface="Arial" pitchFamily="34" charset="-122"/>
-                          <a:cs typeface="Arial" pitchFamily="34" charset="-120"/>
-                        </a:rPr>
-                        <a:t>/28</a:t>
-                      </a:r>
-                      <a:endParaRPr lang="en-US" sz="1700" dirty="0">
-                        <a:latin typeface="Arial" charset="0"/>
-                        <a:ea typeface="Arial" charset="0"/>
-                        <a:cs typeface="Arial" charset="0"/>
-                      </a:endParaRPr>
-                    </a:p>
-                  </a:txBody>
-                  <a:tcPr anchor="ctr">
-                    <a:lnL w="12700" cap="flat" cmpd="sng" algn="ctr">
-                      <a:solidFill>
-                        <a:srgbClr val="EEEEEE"/>
-                      </a:solidFill>
-                      <a:prstDash val="solid"/>
-                      <a:round/>
-                      <a:headEnd type="none" w="med" len="med"/>
-                      <a:tailEnd type="none" w="med" len="med"/>
-                    </a:lnL>
-                    <a:lnR w="12700" cap="flat" cmpd="sng" algn="ctr">
-                      <a:solidFill>
-                        <a:srgbClr val="EEEEEE"/>
-                      </a:solidFill>
-                      <a:prstDash val="solid"/>
-                      <a:round/>
-                      <a:headEnd type="none" w="med" len="med"/>
-                      <a:tailEnd type="none" w="med" len="med"/>
-                    </a:lnR>
-                    <a:lnT w="12700" cap="flat" cmpd="sng" algn="ctr">
-                      <a:solidFill>
-                        <a:srgbClr val="EEEEEE"/>
-                      </a:solidFill>
-                      <a:prstDash val="solid"/>
-                      <a:round/>
-                      <a:headEnd type="none" w="med" len="med"/>
-                      <a:tailEnd type="none" w="med" len="med"/>
-                    </a:lnT>
-                    <a:lnB w="12700" cap="flat" cmpd="sng" algn="ctr">
-                      <a:solidFill>
-                        <a:srgbClr val="EEEEEE"/>
-                      </a:solidFill>
-                      <a:prstDash val="solid"/>
-                      <a:round/>
-                      <a:headEnd type="none" w="med" len="med"/>
-                      <a:tailEnd type="none" w="med" len="med"/>
-                    </a:lnB>
-                    <a:solidFill>
-                      <a:srgbClr val="FFFFFF"/>
-                    </a:solidFill>
-                  </a:tcPr>
-                </a:tc>
-                <a:tc>
-                  <a:txBody>
-                    <a:bodyPr/>
-                    <a:lstStyle/>
-                    <a:p>
-                      <a:pPr marL="0" indent="0">
-                        <a:buNone/>
-                      </a:pPr>
-                      <a:r>
-                        <a:rPr lang="en-US" sz="1700" dirty="0">
-                          <a:solidFill>
-                            <a:srgbClr val="212121"/>
-                          </a:solidFill>
-                          <a:latin typeface="Arial" pitchFamily="34" charset="0"/>
-                          <a:ea typeface="Arial" pitchFamily="34" charset="-122"/>
-                          <a:cs typeface="Arial" pitchFamily="34" charset="-120"/>
-                        </a:rPr>
-                        <a:t>16</a:t>
-                      </a:r>
-                      <a:endParaRPr lang="en-US" sz="1700" dirty="0">
-                        <a:latin typeface="Arial" charset="0"/>
-                        <a:ea typeface="Arial" charset="0"/>
-                        <a:cs typeface="Arial" charset="0"/>
-                      </a:endParaRPr>
-                    </a:p>
-                  </a:txBody>
-                  <a:tcPr anchor="ctr">
-                    <a:lnL w="12700" cap="flat" cmpd="sng" algn="ctr">
-                      <a:solidFill>
-                        <a:srgbClr val="EEEEEE"/>
-                      </a:solidFill>
-                      <a:prstDash val="solid"/>
-                      <a:round/>
-                      <a:headEnd type="none" w="med" len="med"/>
-                      <a:tailEnd type="none" w="med" len="med"/>
-                    </a:lnL>
-                    <a:lnR w="12700" cap="flat" cmpd="sng" algn="ctr">
-                      <a:solidFill>
-                        <a:srgbClr val="EEEEEE"/>
-                      </a:solidFill>
-                      <a:prstDash val="solid"/>
-                      <a:round/>
-                      <a:headEnd type="none" w="med" len="med"/>
-                      <a:tailEnd type="none" w="med" len="med"/>
-                    </a:lnR>
-                    <a:lnT w="12700" cap="flat" cmpd="sng" algn="ctr">
-                      <a:solidFill>
-                        <a:srgbClr val="EEEEEE"/>
-                      </a:solidFill>
-                      <a:prstDash val="solid"/>
-                      <a:round/>
-                      <a:headEnd type="none" w="med" len="med"/>
-                      <a:tailEnd type="none" w="med" len="med"/>
-                    </a:lnT>
-                    <a:lnB w="12700" cap="flat" cmpd="sng" algn="ctr">
-                      <a:solidFill>
-                        <a:srgbClr val="EEEEEE"/>
-                      </a:solidFill>
-                      <a:prstDash val="solid"/>
-                      <a:round/>
-                      <a:headEnd type="none" w="med" len="med"/>
-                      <a:tailEnd type="none" w="med" len="med"/>
-                    </a:lnB>
-                    <a:solidFill>
-                      <a:srgbClr val="FFFFFF"/>
-                    </a:solidFill>
-                  </a:tcPr>
-                </a:tc>
-                <a:tc>
-                  <a:txBody>
-                    <a:bodyPr/>
-                    <a:lstStyle/>
-                    <a:p>
-                      <a:pPr marL="0" indent="0">
-                        <a:buNone/>
-                      </a:pPr>
-                      <a:r>
-                        <a:rPr lang="en-US" sz="1700" dirty="0">
-                          <a:solidFill>
-                            <a:srgbClr val="212121"/>
-                          </a:solidFill>
-                          <a:latin typeface="Arial" pitchFamily="34" charset="0"/>
-                          <a:ea typeface="Arial" pitchFamily="34" charset="-122"/>
-                          <a:cs typeface="Arial" pitchFamily="34" charset="-120"/>
-                        </a:rPr>
-                        <a:t>Subred muy pequeña, para casos puntuales</a:t>
-                      </a:r>
-                      <a:endParaRPr lang="en-US" sz="1700" dirty="0">
-                        <a:latin typeface="Arial" charset="0"/>
-                        <a:ea typeface="Arial" charset="0"/>
-                        <a:cs typeface="Arial" charset="0"/>
-                      </a:endParaRPr>
-                    </a:p>
-                  </a:txBody>
-                  <a:tcPr anchor="ctr">
-                    <a:lnL w="12700" cap="flat" cmpd="sng" algn="ctr">
-                      <a:solidFill>
-                        <a:srgbClr val="EEEEEE"/>
-                      </a:solidFill>
-                      <a:prstDash val="solid"/>
-                      <a:round/>
-                      <a:headEnd type="none" w="med" len="med"/>
-                      <a:tailEnd type="none" w="med" len="med"/>
-                    </a:lnL>
-                    <a:lnR w="12700" cap="flat" cmpd="sng" algn="ctr">
-                      <a:solidFill>
-                        <a:srgbClr val="EEEEEE"/>
-                      </a:solidFill>
-                      <a:prstDash val="solid"/>
-                      <a:round/>
-                      <a:headEnd type="none" w="med" len="med"/>
-                      <a:tailEnd type="none" w="med" len="med"/>
-                    </a:lnR>
-                    <a:lnT w="12700" cap="flat" cmpd="sng" algn="ctr">
-                      <a:solidFill>
-                        <a:srgbClr val="EEEEEE"/>
-                      </a:solidFill>
-                      <a:prstDash val="solid"/>
-                      <a:round/>
-                      <a:headEnd type="none" w="med" len="med"/>
-                      <a:tailEnd type="none" w="med" len="med"/>
-                    </a:lnT>
-                    <a:lnB w="12700" cap="flat" cmpd="sng" algn="ctr">
-                      <a:solidFill>
-                        <a:srgbClr val="EEEEEE"/>
-                      </a:solidFill>
-                      <a:prstDash val="solid"/>
-                      <a:round/>
-                      <a:headEnd type="none" w="med" len="med"/>
-                      <a:tailEnd type="none" w="med" len="med"/>
-                    </a:lnB>
-                    <a:solidFill>
-                      <a:srgbClr val="FFFFFF"/>
-                    </a:solidFill>
-                  </a:tcPr>
-                </a:tc>
-                <a:extLst>
-                  <a:ext uri="{0D108BD9-81ED-4DB2-BD59-A6C34878D82A}">
-                    <a16:rowId xmlns:a16="http://schemas.microsoft.com/office/drawing/2014/main" val="10003"/>
-                  </a:ext>
-                </a:extLst>
-              </a:tr>
-            </a:tbl>
-          </a:graphicData>
-        </a:graphic>
-      </p:graphicFrame>
+            <a:endParaRPr lang="en-US" sz="1700" dirty="0"/>
+          </a:p>
+        </p:txBody>
+      </p:sp>
+      <p:pic>
+        <p:nvPicPr>
+          <p:cNvPr id="7" name="Image 0" descr="C:/Users/Aitor/Documents/apuntes-profe/introduccion-nube/docs/tema2/img/diagrama_vpc_dos_zonas.png"/>
+          <p:cNvPicPr>
+            <a:picLocks noChangeAspect="1"/>
+          </p:cNvPicPr>
+          <p:nvPr/>
+        </p:nvPicPr>
+        <p:blipFill>
+          <a:blip r:embed="rId3"/>
+          <a:stretch>
+            <a:fillRect/>
+          </a:stretch>
+        </p:blipFill>
+        <p:spPr>
+          <a:xfrm>
+            <a:off x="3076956" y="2194560"/>
+            <a:ext cx="6035040" cy="4023360"/>
+          </a:xfrm>
+          <a:prstGeom prst="rect">
+            <a:avLst/>
+          </a:prstGeom>
+        </p:spPr>
+      </p:pic>
     </p:spTree>
   </p:cSld>
   <p:clrMapOvr>
@@ -5097,7 +6224,7 @@
                 <a:ea typeface="Arial" pitchFamily="34" charset="-122"/>
                 <a:cs typeface="Arial" pitchFamily="34" charset="-120"/>
               </a:rPr>
-              <a:t>De la VPC a la subred, con números reales</a:t>
+              <a:t>El mismo patrón, repetido en dos zonas</a:t>
             </a:r>
             <a:endParaRPr lang="en-US" sz="2400" dirty="0"/>
           </a:p>
@@ -5150,18 +6277,18 @@
         </p:nvSpPr>
         <p:spPr>
           <a:xfrm>
-            <a:off x="548640" y="1554480"/>
-            <a:ext cx="11091672" cy="1828800"/>
+            <a:off x="548640" y="1188720"/>
+            <a:ext cx="11091672" cy="1371600"/>
           </a:xfrm>
           <a:prstGeom prst="roundRect">
             <a:avLst/>
           </a:prstGeom>
           <a:solidFill>
-            <a:srgbClr val="FFF8E1"/>
+            <a:srgbClr val="E8EAF6"/>
           </a:solidFill>
-          <a:ln w="19050">
+          <a:ln w="15875">
             <a:solidFill>
-              <a:srgbClr val="FFA000"/>
+              <a:srgbClr val="3949AB"/>
             </a:solidFill>
             <a:prstDash val="solid"/>
           </a:ln>
@@ -5182,8 +6309,8 @@
         </p:nvSpPr>
         <p:spPr>
           <a:xfrm>
-            <a:off x="822960" y="1645920"/>
-            <a:ext cx="10543032" cy="1645920"/>
+            <a:off x="731520" y="1261872"/>
+            <a:ext cx="10725912" cy="548640"/>
           </a:xfrm>
           <a:prstGeom prst="rect">
             <a:avLst/>
@@ -5199,7 +6326,46 @@
               <a:buNone/>
             </a:pPr>
             <a:r>
-              <a:rPr lang="en-US" sz="2000" dirty="0">
+              <a:rPr lang="en-US" sz="2000" b="1" dirty="0">
+                <a:solidFill>
+                  <a:srgbClr val="1A237E"/>
+                </a:solidFill>
+                <a:latin typeface="Arial" pitchFamily="34" charset="0"/>
+                <a:ea typeface="Arial" pitchFamily="34" charset="-122"/>
+                <a:cs typeface="Arial" pitchFamily="34" charset="-120"/>
+              </a:rPr>
+              <a:t>Internet nunca llega directamente a la privada</a:t>
+            </a:r>
+            <a:endParaRPr lang="en-US" sz="2000" dirty="0"/>
+          </a:p>
+        </p:txBody>
+      </p:sp>
+      <p:sp>
+        <p:nvSpPr>
+          <p:cNvPr id="7" name="Text 5"/>
+          <p:cNvSpPr/>
+          <p:nvPr/>
+        </p:nvSpPr>
+        <p:spPr>
+          <a:xfrm>
+            <a:off x="731520" y="1810512"/>
+            <a:ext cx="10725912" cy="676656"/>
+          </a:xfrm>
+          <a:prstGeom prst="rect">
+            <a:avLst/>
+          </a:prstGeom>
+          <a:noFill/>
+          <a:ln/>
+        </p:spPr>
+        <p:txBody>
+          <a:bodyPr wrap="square" rtlCol="0" anchor="t"/>
+          <a:lstStyle/>
+          <a:p>
+            <a:pPr marL="0" indent="0">
+              <a:buNone/>
+            </a:pPr>
+            <a:r>
+              <a:rPr lang="en-US" sz="1600" dirty="0">
                 <a:solidFill>
                   <a:srgbClr val="212121"/>
                 </a:solidFill>
@@ -5207,22 +6373,54 @@
                 <a:ea typeface="Arial" pitchFamily="34" charset="-122"/>
                 <a:cs typeface="Arial" pitchFamily="34" charset="-120"/>
               </a:rPr>
-              <a:t>Si tu VPC es 10.0.0.0/16, tienes 65.536 direcciones para repartir. Si divides ese rango en subredes /24, obtienes 256 subredes de 256 direcciones cada una: 10.0.0.0/24, 10.0.1.0/24, 10.0.2.0/24... Con solo dos o tres de esas subredes ya te sobra espacio para todo lo que vas a construir en el módulo.</a:t>
+              <a:t>Solo lo que ya está dentro de la VPC —como la instancia de la subred pública— puede alcanzarla. Esa asimetría es intencionada.</a:t>
             </a:r>
-            <a:endParaRPr lang="en-US" sz="2000" dirty="0"/>
-          </a:p>
-        </p:txBody>
-      </p:sp>
-      <p:sp>
-        <p:nvSpPr>
-          <p:cNvPr id="7" name="Text 5"/>
-          <p:cNvSpPr/>
-          <p:nvPr/>
-        </p:nvSpPr>
-        <p:spPr>
-          <a:xfrm>
-            <a:off x="548640" y="3703320"/>
-            <a:ext cx="11091672" cy="1371600"/>
+            <a:endParaRPr lang="en-US" sz="1600" dirty="0"/>
+          </a:p>
+        </p:txBody>
+      </p:sp>
+      <p:sp>
+        <p:nvSpPr>
+          <p:cNvPr id="8" name="Shape 6"/>
+          <p:cNvSpPr/>
+          <p:nvPr/>
+        </p:nvSpPr>
+        <p:spPr>
+          <a:xfrm>
+            <a:off x="548640" y="2834640"/>
+            <a:ext cx="5385816" cy="1463040"/>
+          </a:xfrm>
+          <a:prstGeom prst="roundRect">
+            <a:avLst/>
+          </a:prstGeom>
+          <a:solidFill>
+            <a:srgbClr val="E8EAF6"/>
+          </a:solidFill>
+          <a:ln w="15875">
+            <a:solidFill>
+              <a:srgbClr val="3949AB"/>
+            </a:solidFill>
+            <a:prstDash val="solid"/>
+          </a:ln>
+        </p:spPr>
+        <p:txBody>
+          <a:bodyPr/>
+          <a:lstStyle/>
+          <a:p>
+            <a:endParaRPr lang="es-ES"/>
+          </a:p>
+        </p:txBody>
+      </p:sp>
+      <p:sp>
+        <p:nvSpPr>
+          <p:cNvPr id="9" name="Text 7"/>
+          <p:cNvSpPr/>
+          <p:nvPr/>
+        </p:nvSpPr>
+        <p:spPr>
+          <a:xfrm>
+            <a:off x="685800" y="2926080"/>
+            <a:ext cx="5111496" cy="502920"/>
           </a:xfrm>
           <a:prstGeom prst="rect">
             <a:avLst/>
@@ -5231,14 +6429,53 @@
           <a:ln/>
         </p:spPr>
         <p:txBody>
-          <a:bodyPr wrap="square" rtlCol="0" anchor="t"/>
-          <a:lstStyle/>
-          <a:p>
-            <a:pPr marL="0" indent="0">
+          <a:bodyPr wrap="square" rtlCol="0" anchor="ctr"/>
+          <a:lstStyle/>
+          <a:p>
+            <a:pPr marL="0" indent="0" algn="ctr">
               <a:buNone/>
             </a:pPr>
             <a:r>
-              <a:rPr lang="en-US" sz="1900" dirty="0">
+              <a:rPr lang="en-US" sz="2000" b="1" dirty="0">
+                <a:solidFill>
+                  <a:srgbClr val="1A237E"/>
+                </a:solidFill>
+                <a:latin typeface="Arial" pitchFamily="34" charset="0"/>
+                <a:ea typeface="Arial" pitchFamily="34" charset="-122"/>
+                <a:cs typeface="Arial" pitchFamily="34" charset="-120"/>
+              </a:rPr>
+              <a:t>Zona A</a:t>
+            </a:r>
+            <a:endParaRPr lang="en-US" sz="2000" dirty="0"/>
+          </a:p>
+        </p:txBody>
+      </p:sp>
+      <p:sp>
+        <p:nvSpPr>
+          <p:cNvPr id="10" name="Text 8"/>
+          <p:cNvSpPr/>
+          <p:nvPr/>
+        </p:nvSpPr>
+        <p:spPr>
+          <a:xfrm>
+            <a:off x="731520" y="3474720"/>
+            <a:ext cx="5020056" cy="731520"/>
+          </a:xfrm>
+          <a:prstGeom prst="rect">
+            <a:avLst/>
+          </a:prstGeom>
+          <a:noFill/>
+          <a:ln/>
+        </p:spPr>
+        <p:txBody>
+          <a:bodyPr wrap="square" rtlCol="0" anchor="t"/>
+          <a:lstStyle/>
+          <a:p>
+            <a:pPr marL="0" indent="0" algn="ctr">
+              <a:buNone/>
+            </a:pPr>
+            <a:r>
+              <a:rPr lang="en-US" sz="1500" dirty="0">
                 <a:solidFill>
                   <a:srgbClr val="212121"/>
                 </a:solidFill>
@@ -5246,9 +6483,229 @@
                 <a:ea typeface="Arial" pitchFamily="34" charset="-122"/>
                 <a:cs typeface="Arial" pitchFamily="34" charset="-120"/>
               </a:rPr>
-              <a:t>No necesitas usar las 256 subredes posibles. El error típico es repetir sin darte cuenta el mismo rango en dos subredes — en la Actividad 2.1 vas a diseñar sobre papel qué subred es cuál antes de crear nada en consola.</a:t>
+              <a:t>Subred pública + subred privada</a:t>
             </a:r>
-            <a:endParaRPr lang="en-US" sz="1900" dirty="0"/>
+            <a:endParaRPr lang="en-US" sz="1500" dirty="0"/>
+          </a:p>
+        </p:txBody>
+      </p:sp>
+      <p:sp>
+        <p:nvSpPr>
+          <p:cNvPr id="11" name="Shape 9"/>
+          <p:cNvSpPr/>
+          <p:nvPr/>
+        </p:nvSpPr>
+        <p:spPr>
+          <a:xfrm>
+            <a:off x="6254496" y="2834640"/>
+            <a:ext cx="5385816" cy="1463040"/>
+          </a:xfrm>
+          <a:prstGeom prst="roundRect">
+            <a:avLst/>
+          </a:prstGeom>
+          <a:solidFill>
+            <a:srgbClr val="FFF8E1"/>
+          </a:solidFill>
+          <a:ln w="25400">
+            <a:solidFill>
+              <a:srgbClr val="FFA000"/>
+            </a:solidFill>
+            <a:prstDash val="solid"/>
+          </a:ln>
+        </p:spPr>
+        <p:txBody>
+          <a:bodyPr/>
+          <a:lstStyle/>
+          <a:p>
+            <a:endParaRPr lang="es-ES"/>
+          </a:p>
+        </p:txBody>
+      </p:sp>
+      <p:sp>
+        <p:nvSpPr>
+          <p:cNvPr id="12" name="Text 10"/>
+          <p:cNvSpPr/>
+          <p:nvPr/>
+        </p:nvSpPr>
+        <p:spPr>
+          <a:xfrm>
+            <a:off x="6391656" y="2926080"/>
+            <a:ext cx="5111496" cy="502920"/>
+          </a:xfrm>
+          <a:prstGeom prst="rect">
+            <a:avLst/>
+          </a:prstGeom>
+          <a:noFill/>
+          <a:ln/>
+        </p:spPr>
+        <p:txBody>
+          <a:bodyPr wrap="square" rtlCol="0" anchor="ctr"/>
+          <a:lstStyle/>
+          <a:p>
+            <a:pPr marL="0" indent="0" algn="ctr">
+              <a:buNone/>
+            </a:pPr>
+            <a:r>
+              <a:rPr lang="en-US" sz="2000" b="1" dirty="0">
+                <a:solidFill>
+                  <a:srgbClr val="1A237E"/>
+                </a:solidFill>
+                <a:latin typeface="Arial" pitchFamily="34" charset="0"/>
+                <a:ea typeface="Arial" pitchFamily="34" charset="-122"/>
+                <a:cs typeface="Arial" pitchFamily="34" charset="-120"/>
+              </a:rPr>
+              <a:t>Zona B</a:t>
+            </a:r>
+            <a:endParaRPr lang="en-US" sz="2000" dirty="0"/>
+          </a:p>
+        </p:txBody>
+      </p:sp>
+      <p:sp>
+        <p:nvSpPr>
+          <p:cNvPr id="13" name="Text 11"/>
+          <p:cNvSpPr/>
+          <p:nvPr/>
+        </p:nvSpPr>
+        <p:spPr>
+          <a:xfrm>
+            <a:off x="6437376" y="3474720"/>
+            <a:ext cx="5020056" cy="731520"/>
+          </a:xfrm>
+          <a:prstGeom prst="rect">
+            <a:avLst/>
+          </a:prstGeom>
+          <a:noFill/>
+          <a:ln/>
+        </p:spPr>
+        <p:txBody>
+          <a:bodyPr wrap="square" rtlCol="0" anchor="t"/>
+          <a:lstStyle/>
+          <a:p>
+            <a:pPr marL="0" indent="0" algn="ctr">
+              <a:buNone/>
+            </a:pPr>
+            <a:r>
+              <a:rPr lang="en-US" sz="1500" dirty="0">
+                <a:solidFill>
+                  <a:srgbClr val="212121"/>
+                </a:solidFill>
+                <a:latin typeface="Arial" pitchFamily="34" charset="0"/>
+                <a:ea typeface="Arial" pitchFamily="34" charset="-122"/>
+                <a:cs typeface="Arial" pitchFamily="34" charset="-120"/>
+              </a:rPr>
+              <a:t>Subred pública + subred privada (el mismo patrón, repetido)</a:t>
+            </a:r>
+            <a:endParaRPr lang="en-US" sz="1500" dirty="0"/>
+          </a:p>
+        </p:txBody>
+      </p:sp>
+      <p:sp>
+        <p:nvSpPr>
+          <p:cNvPr id="14" name="Shape 12"/>
+          <p:cNvSpPr/>
+          <p:nvPr/>
+        </p:nvSpPr>
+        <p:spPr>
+          <a:xfrm>
+            <a:off x="548640" y="4572000"/>
+            <a:ext cx="11091672" cy="1371600"/>
+          </a:xfrm>
+          <a:prstGeom prst="roundRect">
+            <a:avLst/>
+          </a:prstGeom>
+          <a:solidFill>
+            <a:srgbClr val="E8EAF6"/>
+          </a:solidFill>
+          <a:ln w="15875">
+            <a:solidFill>
+              <a:srgbClr val="3949AB"/>
+            </a:solidFill>
+            <a:prstDash val="solid"/>
+          </a:ln>
+        </p:spPr>
+        <p:txBody>
+          <a:bodyPr/>
+          <a:lstStyle/>
+          <a:p>
+            <a:endParaRPr lang="es-ES"/>
+          </a:p>
+        </p:txBody>
+      </p:sp>
+      <p:sp>
+        <p:nvSpPr>
+          <p:cNvPr id="15" name="Text 13"/>
+          <p:cNvSpPr/>
+          <p:nvPr/>
+        </p:nvSpPr>
+        <p:spPr>
+          <a:xfrm>
+            <a:off x="731520" y="4645152"/>
+            <a:ext cx="10725912" cy="548640"/>
+          </a:xfrm>
+          <a:prstGeom prst="rect">
+            <a:avLst/>
+          </a:prstGeom>
+          <a:noFill/>
+          <a:ln/>
+        </p:spPr>
+        <p:txBody>
+          <a:bodyPr wrap="square" rtlCol="0" anchor="ctr"/>
+          <a:lstStyle/>
+          <a:p>
+            <a:pPr marL="0" indent="0">
+              <a:buNone/>
+            </a:pPr>
+            <a:r>
+              <a:rPr lang="en-US" sz="1800" b="1" dirty="0">
+                <a:solidFill>
+                  <a:srgbClr val="1A237E"/>
+                </a:solidFill>
+                <a:latin typeface="Arial" pitchFamily="34" charset="0"/>
+                <a:ea typeface="Arial" pitchFamily="34" charset="-122"/>
+                <a:cs typeface="Arial" pitchFamily="34" charset="-120"/>
+              </a:rPr>
+              <a:t>La misma redundancia del Tema 1</a:t>
+            </a:r>
+            <a:endParaRPr lang="en-US" sz="1800" dirty="0"/>
+          </a:p>
+        </p:txBody>
+      </p:sp>
+      <p:sp>
+        <p:nvSpPr>
+          <p:cNvPr id="16" name="Text 14"/>
+          <p:cNvSpPr/>
+          <p:nvPr/>
+        </p:nvSpPr>
+        <p:spPr>
+          <a:xfrm>
+            <a:off x="731520" y="5193792"/>
+            <a:ext cx="10725912" cy="676656"/>
+          </a:xfrm>
+          <a:prstGeom prst="rect">
+            <a:avLst/>
+          </a:prstGeom>
+          <a:noFill/>
+          <a:ln/>
+        </p:spPr>
+        <p:txBody>
+          <a:bodyPr wrap="square" rtlCol="0" anchor="t"/>
+          <a:lstStyle/>
+          <a:p>
+            <a:pPr marL="0" indent="0">
+              <a:buNone/>
+            </a:pPr>
+            <a:r>
+              <a:rPr lang="en-US" sz="1500" dirty="0">
+                <a:solidFill>
+                  <a:srgbClr val="212121"/>
+                </a:solidFill>
+                <a:latin typeface="Arial" pitchFamily="34" charset="0"/>
+                <a:ea typeface="Arial" pitchFamily="34" charset="-122"/>
+                <a:cs typeface="Arial" pitchFamily="34" charset="-120"/>
+              </a:rPr>
+              <a:t>Si una zona entera se cae, la otra sigue funcionando. Diseñar pensando en dos zonas desde el primer día sale mucho más barato que añadir la segunda más adelante.</a:t>
+            </a:r>
+            <a:endParaRPr lang="en-US" sz="1500" dirty="0"/>
           </a:p>
         </p:txBody>
       </p:sp>
@@ -5342,7 +6799,7 @@
                 <a:ea typeface="Arial" pitchFamily="34" charset="-122"/>
                 <a:cs typeface="Arial" pitchFamily="34" charset="-120"/>
               </a:rPr>
-              <a:t>Subredes públicas y privadas</a:t>
+              <a:t>Tabla de rutas y pasarela de internet</a:t>
             </a:r>
             <a:endParaRPr lang="en-US" sz="2400" dirty="0"/>
           </a:p>
@@ -5387,40 +6844,48 @@
           </a:p>
         </p:txBody>
       </p:sp>
-      <p:pic>
-        <p:nvPicPr>
-          <p:cNvPr id="5" name="Image 0" descr="C:/Users/Aitor/docxgen/img/inu_vpc_pub_priv.png"/>
-          <p:cNvPicPr>
-            <a:picLocks noChangeAspect="1"/>
-          </p:cNvPicPr>
-          <p:nvPr/>
-        </p:nvPicPr>
-        <p:blipFill>
-          <a:blip r:embed="rId3"/>
-          <a:stretch>
-            <a:fillRect/>
-          </a:stretch>
-        </p:blipFill>
-        <p:spPr>
-          <a:xfrm>
-            <a:off x="6094476" y="898638"/>
-            <a:ext cx="5251548" cy="5421639"/>
-          </a:xfrm>
-          <a:prstGeom prst="rect">
-            <a:avLst/>
-          </a:prstGeom>
-        </p:spPr>
-      </p:pic>
-      <p:sp>
-        <p:nvSpPr>
-          <p:cNvPr id="6" name="Text 3"/>
-          <p:cNvSpPr/>
-          <p:nvPr/>
-        </p:nvSpPr>
-        <p:spPr>
-          <a:xfrm>
-            <a:off x="613954" y="2818778"/>
-            <a:ext cx="4710106" cy="685800"/>
+      <p:sp>
+        <p:nvSpPr>
+          <p:cNvPr id="5" name="Shape 3"/>
+          <p:cNvSpPr/>
+          <p:nvPr/>
+        </p:nvSpPr>
+        <p:spPr>
+          <a:xfrm>
+            <a:off x="548640" y="1143000"/>
+            <a:ext cx="11091672" cy="1051560"/>
+          </a:xfrm>
+          <a:prstGeom prst="roundRect">
+            <a:avLst/>
+          </a:prstGeom>
+          <a:solidFill>
+            <a:srgbClr val="FFF8E1"/>
+          </a:solidFill>
+          <a:ln w="19050">
+            <a:solidFill>
+              <a:srgbClr val="FFA000"/>
+            </a:solidFill>
+            <a:prstDash val="solid"/>
+          </a:ln>
+        </p:spPr>
+        <p:txBody>
+          <a:bodyPr/>
+          <a:lstStyle/>
+          <a:p>
+            <a:endParaRPr lang="es-ES"/>
+          </a:p>
+        </p:txBody>
+      </p:sp>
+      <p:sp>
+        <p:nvSpPr>
+          <p:cNvPr id="6" name="Text 4"/>
+          <p:cNvSpPr/>
+          <p:nvPr/>
+        </p:nvSpPr>
+        <p:spPr>
+          <a:xfrm>
+            <a:off x="822960" y="1234440"/>
+            <a:ext cx="10543032" cy="868680"/>
           </a:xfrm>
           <a:prstGeom prst="rect">
             <a:avLst/>
@@ -5429,14 +6894,14 @@
           <a:ln/>
         </p:spPr>
         <p:txBody>
-          <a:bodyPr wrap="square" rtlCol="0" anchor="t"/>
-          <a:lstStyle/>
-          <a:p>
-            <a:pPr marL="0" indent="0" algn="ctr">
+          <a:bodyPr wrap="square" rtlCol="0" anchor="ctr"/>
+          <a:lstStyle/>
+          <a:p>
+            <a:pPr marL="0" indent="0">
               <a:buNone/>
             </a:pPr>
             <a:r>
-              <a:rPr lang="en-US" sz="1700" dirty="0">
+              <a:rPr lang="en-US" sz="1600" dirty="0">
                 <a:solidFill>
                   <a:srgbClr val="212121"/>
                 </a:solidFill>
@@ -5444,453 +6909,15 @@
                 <a:ea typeface="Arial" pitchFamily="34" charset="-122"/>
                 <a:cs typeface="Arial" pitchFamily="34" charset="-120"/>
               </a:rPr>
-              <a:t>La diferencia no es ningún interruptor especial: es simplemente si tienen puerta a internet o no. </a:t>
+              <a:t>Lo que hace pública a una subred: una pasarela de internet (IGW) conectada a la VPC, y una entrada 0.0.0.0/0 en su tabla de rutas — el CIDR más amplio que existe: «cualquier dirección de internet».</a:t>
             </a:r>
-          </a:p>
-          <a:p>
-            <a:pPr marL="0" indent="0" algn="ctr">
-              <a:buNone/>
-            </a:pPr>
-            <a:r>
-              <a:rPr lang="en-US" sz="1700" dirty="0" err="1">
-                <a:solidFill>
-                  <a:srgbClr val="212121"/>
-                </a:solidFill>
-                <a:latin typeface="Arial" pitchFamily="34" charset="0"/>
-                <a:ea typeface="Arial" pitchFamily="34" charset="-122"/>
-                <a:cs typeface="Arial" pitchFamily="34" charset="-120"/>
-              </a:rPr>
-              <a:t>Fíjate</a:t>
-            </a:r>
-            <a:r>
-              <a:rPr lang="en-US" sz="1700" dirty="0">
-                <a:solidFill>
-                  <a:srgbClr val="212121"/>
-                </a:solidFill>
-                <a:latin typeface="Arial" pitchFamily="34" charset="0"/>
-                <a:ea typeface="Arial" pitchFamily="34" charset="-122"/>
-                <a:cs typeface="Arial" pitchFamily="34" charset="-120"/>
-              </a:rPr>
-              <a:t> en la flecha tachada: internet nunca llega directamente a la subred privada.</a:t>
-            </a:r>
-            <a:endParaRPr lang="en-US" sz="1700" dirty="0"/>
-          </a:p>
-        </p:txBody>
-      </p:sp>
-    </p:spTree>
-  </p:cSld>
-  <p:clrMapOvr>
-    <a:masterClrMapping/>
-  </p:clrMapOvr>
-</p:sld>
-</file>
-
-<file path=ppt/slides/slide8.xml><?xml version="1.0" encoding="utf-8"?>
-<p:sld xmlns:a="http://schemas.openxmlformats.org/drawingml/2006/main" xmlns:r="http://schemas.openxmlformats.org/officeDocument/2006/relationships" xmlns:p="http://schemas.openxmlformats.org/presentationml/2006/main">
-  <p:cSld name="Slide 8">
-    <p:spTree>
-      <p:nvGrpSpPr>
-        <p:cNvPr id="1" name=""/>
-        <p:cNvGrpSpPr/>
-        <p:nvPr/>
-      </p:nvGrpSpPr>
-      <p:grpSpPr>
-        <a:xfrm>
-          <a:off x="0" y="0"/>
-          <a:ext cx="0" cy="0"/>
-          <a:chOff x="0" y="0"/>
-          <a:chExt cx="0" cy="0"/>
-        </a:xfrm>
-      </p:grpSpPr>
-      <p:sp>
-        <p:nvSpPr>
-          <p:cNvPr id="2" name="Shape 0"/>
-          <p:cNvSpPr/>
-          <p:nvPr/>
-        </p:nvSpPr>
-        <p:spPr>
-          <a:xfrm>
-            <a:off x="0" y="0"/>
-            <a:ext cx="12188952" cy="777240"/>
-          </a:xfrm>
-          <a:prstGeom prst="rect">
-            <a:avLst/>
-          </a:prstGeom>
-          <a:solidFill>
-            <a:srgbClr val="1A237E"/>
-          </a:solidFill>
-          <a:ln w="12700">
-            <a:solidFill>
-              <a:srgbClr val="1A237E"/>
-            </a:solidFill>
-            <a:prstDash val="solid"/>
-          </a:ln>
-        </p:spPr>
-        <p:txBody>
-          <a:bodyPr/>
-          <a:lstStyle/>
-          <a:p>
-            <a:endParaRPr lang="es-ES"/>
-          </a:p>
-        </p:txBody>
-      </p:sp>
-      <p:sp>
-        <p:nvSpPr>
-          <p:cNvPr id="3" name="Text 1"/>
-          <p:cNvSpPr/>
-          <p:nvPr/>
-        </p:nvSpPr>
-        <p:spPr>
-          <a:xfrm>
-            <a:off x="365760" y="0"/>
-            <a:ext cx="11457432" cy="777240"/>
-          </a:xfrm>
-          <a:prstGeom prst="rect">
-            <a:avLst/>
-          </a:prstGeom>
-          <a:noFill/>
-          <a:ln/>
-        </p:spPr>
-        <p:txBody>
-          <a:bodyPr wrap="square" rtlCol="0" anchor="ctr"/>
-          <a:lstStyle/>
-          <a:p>
-            <a:pPr marL="0" indent="0">
-              <a:buNone/>
-            </a:pPr>
-            <a:r>
-              <a:rPr lang="en-US" sz="2400" b="1" dirty="0">
-                <a:solidFill>
-                  <a:srgbClr val="FFFFFF"/>
-                </a:solidFill>
-                <a:latin typeface="Arial" pitchFamily="34" charset="0"/>
-                <a:ea typeface="Arial" pitchFamily="34" charset="-122"/>
-                <a:cs typeface="Arial" pitchFamily="34" charset="-120"/>
-              </a:rPr>
-              <a:t>El mismo patrón, repetido en dos zonas</a:t>
-            </a:r>
-            <a:endParaRPr lang="en-US" sz="2400" dirty="0"/>
-          </a:p>
-        </p:txBody>
-      </p:sp>
-      <p:sp>
-        <p:nvSpPr>
-          <p:cNvPr id="4" name="Text 2"/>
-          <p:cNvSpPr/>
-          <p:nvPr/>
-        </p:nvSpPr>
-        <p:spPr>
-          <a:xfrm>
-            <a:off x="548640" y="6473952"/>
-            <a:ext cx="11091672" cy="292608"/>
-          </a:xfrm>
-          <a:prstGeom prst="rect">
-            <a:avLst/>
-          </a:prstGeom>
-          <a:noFill/>
-          <a:ln/>
-        </p:spPr>
-        <p:txBody>
-          <a:bodyPr wrap="square" rtlCol="0" anchor="ctr"/>
-          <a:lstStyle/>
-          <a:p>
-            <a:pPr marL="0" indent="0" algn="r">
-              <a:buNone/>
-            </a:pPr>
-            <a:r>
-              <a:rPr lang="en-US" sz="1100" dirty="0">
-                <a:solidFill>
-                  <a:srgbClr val="757575"/>
-                </a:solidFill>
-                <a:latin typeface="Arial" pitchFamily="34" charset="0"/>
-                <a:ea typeface="Arial" pitchFamily="34" charset="-122"/>
-                <a:cs typeface="Arial" pitchFamily="34" charset="-120"/>
-              </a:rPr>
-              <a:t>Introducción a la Nube Pública — Tema 2: Diseño de la red virtual</a:t>
-            </a:r>
-            <a:endParaRPr lang="en-US" sz="1100" dirty="0"/>
-          </a:p>
-        </p:txBody>
-      </p:sp>
-      <p:sp>
-        <p:nvSpPr>
-          <p:cNvPr id="5" name="Text 3"/>
-          <p:cNvSpPr/>
-          <p:nvPr/>
-        </p:nvSpPr>
-        <p:spPr>
-          <a:xfrm>
-            <a:off x="548640" y="1188720"/>
-            <a:ext cx="2278536" cy="914400"/>
-          </a:xfrm>
-          <a:prstGeom prst="rect">
-            <a:avLst/>
-          </a:prstGeom>
-          <a:noFill/>
-          <a:ln/>
-        </p:spPr>
-        <p:txBody>
-          <a:bodyPr wrap="square" rtlCol="0" anchor="t"/>
-          <a:lstStyle/>
-          <a:p>
-            <a:pPr marL="0" indent="0">
-              <a:buNone/>
-            </a:pPr>
-            <a:r>
-              <a:rPr lang="en-US" sz="1800" dirty="0">
-                <a:solidFill>
-                  <a:srgbClr val="212121"/>
-                </a:solidFill>
-                <a:latin typeface="Arial" pitchFamily="34" charset="0"/>
-                <a:ea typeface="Arial" pitchFamily="34" charset="-122"/>
-                <a:cs typeface="Arial" pitchFamily="34" charset="-120"/>
-              </a:rPr>
-              <a:t>El diagrama anterior solo dibuja una subred de cada tipo para no complicarlo, pero en la Actividad 2.1 vas a repartir pública y privada en dos zonas de disponibilidad distintas — el mismo patrón, repetido dos veces:</a:t>
-            </a:r>
-            <a:endParaRPr lang="en-US" sz="1800" dirty="0"/>
-          </a:p>
-        </p:txBody>
-      </p:sp>
-      <p:pic>
-        <p:nvPicPr>
-          <p:cNvPr id="6" name="Image 0" descr="C:/Users/Aitor/Documents/apuntes-profe/introduccion-nube/docs/tema2/img/diagrama_vpc_dos_zonas.png"/>
-          <p:cNvPicPr>
-            <a:picLocks noChangeAspect="1"/>
-          </p:cNvPicPr>
-          <p:nvPr/>
-        </p:nvPicPr>
-        <p:blipFill>
-          <a:blip r:embed="rId3"/>
-          <a:stretch>
-            <a:fillRect/>
-          </a:stretch>
-        </p:blipFill>
-        <p:spPr>
-          <a:xfrm>
-            <a:off x="3750624" y="1113547"/>
-            <a:ext cx="7119537" cy="4746358"/>
-          </a:xfrm>
-          <a:prstGeom prst="rect">
-            <a:avLst/>
-          </a:prstGeom>
-        </p:spPr>
-      </p:pic>
-      <p:sp>
-        <p:nvSpPr>
-          <p:cNvPr id="7" name="Text 4"/>
-          <p:cNvSpPr/>
-          <p:nvPr/>
-        </p:nvSpPr>
-        <p:spPr>
-          <a:xfrm>
-            <a:off x="623285" y="5967612"/>
-            <a:ext cx="11091672" cy="457200"/>
-          </a:xfrm>
-          <a:prstGeom prst="rect">
-            <a:avLst/>
-          </a:prstGeom>
-          <a:noFill/>
-          <a:ln/>
-        </p:spPr>
-        <p:txBody>
-          <a:bodyPr wrap="square" rtlCol="0" anchor="t"/>
-          <a:lstStyle/>
-          <a:p>
-            <a:pPr marL="0" indent="0" algn="ctr">
-              <a:buNone/>
-            </a:pPr>
-            <a:r>
-              <a:rPr lang="en-US" sz="1500" i="1" dirty="0">
-                <a:solidFill>
-                  <a:srgbClr val="757575"/>
-                </a:solidFill>
-                <a:latin typeface="Arial" pitchFamily="34" charset="0"/>
-                <a:ea typeface="Arial" pitchFamily="34" charset="-122"/>
-                <a:cs typeface="Arial" pitchFamily="34" charset="-120"/>
-              </a:rPr>
-              <a:t>Diseñar pensando en dos zonas desde el primer día sale mucho más barato que añadir la segunda cuando ya tengas media aplicación construida.</a:t>
-            </a:r>
-            <a:endParaRPr lang="en-US" sz="1500" dirty="0"/>
-          </a:p>
-        </p:txBody>
-      </p:sp>
-    </p:spTree>
-  </p:cSld>
-  <p:clrMapOvr>
-    <a:masterClrMapping/>
-  </p:clrMapOvr>
-</p:sld>
-</file>
-
-<file path=ppt/slides/slide9.xml><?xml version="1.0" encoding="utf-8"?>
-<p:sld xmlns:a="http://schemas.openxmlformats.org/drawingml/2006/main" xmlns:r="http://schemas.openxmlformats.org/officeDocument/2006/relationships" xmlns:p="http://schemas.openxmlformats.org/presentationml/2006/main">
-  <p:cSld name="Slide 9">
-    <p:spTree>
-      <p:nvGrpSpPr>
-        <p:cNvPr id="1" name=""/>
-        <p:cNvGrpSpPr/>
-        <p:nvPr/>
-      </p:nvGrpSpPr>
-      <p:grpSpPr>
-        <a:xfrm>
-          <a:off x="0" y="0"/>
-          <a:ext cx="0" cy="0"/>
-          <a:chOff x="0" y="0"/>
-          <a:chExt cx="0" cy="0"/>
-        </a:xfrm>
-      </p:grpSpPr>
-      <p:sp>
-        <p:nvSpPr>
-          <p:cNvPr id="2" name="Shape 0"/>
-          <p:cNvSpPr/>
-          <p:nvPr/>
-        </p:nvSpPr>
-        <p:spPr>
-          <a:xfrm>
-            <a:off x="0" y="0"/>
-            <a:ext cx="12188952" cy="777240"/>
-          </a:xfrm>
-          <a:prstGeom prst="rect">
-            <a:avLst/>
-          </a:prstGeom>
-          <a:solidFill>
-            <a:srgbClr val="1A237E"/>
-          </a:solidFill>
-          <a:ln w="12700">
-            <a:solidFill>
-              <a:srgbClr val="1A237E"/>
-            </a:solidFill>
-            <a:prstDash val="solid"/>
-          </a:ln>
-        </p:spPr>
-        <p:txBody>
-          <a:bodyPr/>
-          <a:lstStyle/>
-          <a:p>
-            <a:endParaRPr lang="es-ES"/>
-          </a:p>
-        </p:txBody>
-      </p:sp>
-      <p:sp>
-        <p:nvSpPr>
-          <p:cNvPr id="3" name="Text 1"/>
-          <p:cNvSpPr/>
-          <p:nvPr/>
-        </p:nvSpPr>
-        <p:spPr>
-          <a:xfrm>
-            <a:off x="365760" y="0"/>
-            <a:ext cx="11457432" cy="777240"/>
-          </a:xfrm>
-          <a:prstGeom prst="rect">
-            <a:avLst/>
-          </a:prstGeom>
-          <a:noFill/>
-          <a:ln/>
-        </p:spPr>
-        <p:txBody>
-          <a:bodyPr wrap="square" rtlCol="0" anchor="ctr"/>
-          <a:lstStyle/>
-          <a:p>
-            <a:pPr marL="0" indent="0">
-              <a:buNone/>
-            </a:pPr>
-            <a:r>
-              <a:rPr lang="en-US" sz="2400" b="1" dirty="0">
-                <a:solidFill>
-                  <a:srgbClr val="FFFFFF"/>
-                </a:solidFill>
-                <a:latin typeface="Arial" pitchFamily="34" charset="0"/>
-                <a:ea typeface="Arial" pitchFamily="34" charset="-122"/>
-                <a:cs typeface="Arial" pitchFamily="34" charset="-120"/>
-              </a:rPr>
-              <a:t>Tabla de rutas y pasarela de internet</a:t>
-            </a:r>
-            <a:endParaRPr lang="en-US" sz="2400" dirty="0"/>
-          </a:p>
-        </p:txBody>
-      </p:sp>
-      <p:sp>
-        <p:nvSpPr>
-          <p:cNvPr id="4" name="Text 2"/>
-          <p:cNvSpPr/>
-          <p:nvPr/>
-        </p:nvSpPr>
-        <p:spPr>
-          <a:xfrm>
-            <a:off x="548640" y="6473952"/>
-            <a:ext cx="11091672" cy="292608"/>
-          </a:xfrm>
-          <a:prstGeom prst="rect">
-            <a:avLst/>
-          </a:prstGeom>
-          <a:noFill/>
-          <a:ln/>
-        </p:spPr>
-        <p:txBody>
-          <a:bodyPr wrap="square" rtlCol="0" anchor="ctr"/>
-          <a:lstStyle/>
-          <a:p>
-            <a:pPr marL="0" indent="0" algn="r">
-              <a:buNone/>
-            </a:pPr>
-            <a:r>
-              <a:rPr lang="en-US" sz="1100" dirty="0">
-                <a:solidFill>
-                  <a:srgbClr val="757575"/>
-                </a:solidFill>
-                <a:latin typeface="Arial" pitchFamily="34" charset="0"/>
-                <a:ea typeface="Arial" pitchFamily="34" charset="-122"/>
-                <a:cs typeface="Arial" pitchFamily="34" charset="-120"/>
-              </a:rPr>
-              <a:t>Introducción a la Nube Pública — Tema 2: Diseño de la red virtual</a:t>
-            </a:r>
-            <a:endParaRPr lang="en-US" sz="1100" dirty="0"/>
-          </a:p>
-        </p:txBody>
-      </p:sp>
-      <p:sp>
-        <p:nvSpPr>
-          <p:cNvPr id="5" name="Text 3"/>
-          <p:cNvSpPr/>
-          <p:nvPr/>
-        </p:nvSpPr>
-        <p:spPr>
-          <a:xfrm>
-            <a:off x="548640" y="1188720"/>
-            <a:ext cx="11091672" cy="1188720"/>
-          </a:xfrm>
-          <a:prstGeom prst="rect">
-            <a:avLst/>
-          </a:prstGeom>
-          <a:noFill/>
-          <a:ln/>
-        </p:spPr>
-        <p:txBody>
-          <a:bodyPr wrap="square" rtlCol="0" anchor="t"/>
-          <a:lstStyle/>
-          <a:p>
-            <a:pPr marL="0" indent="0">
-              <a:buNone/>
-            </a:pPr>
-            <a:r>
-              <a:rPr lang="en-US" sz="1800" dirty="0">
-                <a:solidFill>
-                  <a:srgbClr val="212121"/>
-                </a:solidFill>
-                <a:latin typeface="Arial" pitchFamily="34" charset="0"/>
-                <a:ea typeface="Arial" pitchFamily="34" charset="-122"/>
-                <a:cs typeface="Arial" pitchFamily="34" charset="-120"/>
-              </a:rPr>
-              <a:t>Lo que convierte a una subred en pública es una combinación de dos piezas: una pasarela de internet (IGW) conectada a la VPC, y una entrada en la tabla de rutas que dice «todo el tráfico que no sea interno, mándalo por la pasarela» (0.0.0.0/0).</a:t>
-            </a:r>
-            <a:endParaRPr lang="en-US" sz="1800" dirty="0"/>
+            <a:endParaRPr lang="en-US" sz="1600" dirty="0"/>
           </a:p>
         </p:txBody>
       </p:sp>
       <p:graphicFrame>
         <p:nvGraphicFramePr>
-          <p:cNvPr id="10" name="Table 0"/>
+          <p:cNvPr id="8" name="Table 0"/>
           <p:cNvGraphicFramePr>
             <a:graphicFrameLocks noGrp="1"/>
           </p:cNvGraphicFramePr>
@@ -5903,29 +6930,29 @@
           </p:nvPr>
         </p:nvGraphicFramePr>
         <p:xfrm>
-          <a:off x="548640" y="2560320"/>
-          <a:ext cx="11091671" cy="3108960"/>
+          <a:off x="548640" y="2423160"/>
+          <a:ext cx="11091672" cy="3218688"/>
         </p:xfrm>
         <a:graphic>
           <a:graphicData uri="http://schemas.openxmlformats.org/drawingml/2006/table">
             <a:tbl>
               <a:tblPr/>
               <a:tblGrid>
-                <a:gridCol w="2662001">
+                <a:gridCol w="3327502">
                   <a:extLst>
                     <a:ext uri="{9D8B030D-6E8A-4147-A177-3AD203B41FA5}">
                       <a16:colId xmlns:a16="http://schemas.microsoft.com/office/drawing/2014/main" val="20000"/>
                     </a:ext>
                   </a:extLst>
                 </a:gridCol>
-                <a:gridCol w="4214835">
+                <a:gridCol w="3993002">
                   <a:extLst>
                     <a:ext uri="{9D8B030D-6E8A-4147-A177-3AD203B41FA5}">
                       <a16:colId xmlns:a16="http://schemas.microsoft.com/office/drawing/2014/main" val="20001"/>
                     </a:ext>
                   </a:extLst>
                 </a:gridCol>
-                <a:gridCol w="4214835">
+                <a:gridCol w="3771168">
                   <a:extLst>
                     <a:ext uri="{9D8B030D-6E8A-4147-A177-3AD203B41FA5}">
                       <a16:colId xmlns:a16="http://schemas.microsoft.com/office/drawing/2014/main" val="20002"/>
@@ -5933,7 +6960,7 @@
                   </a:extLst>
                 </a:gridCol>
               </a:tblGrid>
-              <a:tr h="777240">
+              <a:tr h="804672">
                 <a:tc>
                   <a:txBody>
                     <a:bodyPr/>
@@ -6144,7 +7171,7 @@
                   </a:ext>
                 </a:extLst>
               </a:tr>
-              <a:tr h="777240">
+              <a:tr h="804672">
                 <a:tc>
                   <a:txBody>
                     <a:bodyPr/>
@@ -6355,7 +7382,7 @@
                   </a:ext>
                 </a:extLst>
               </a:tr>
-              <a:tr h="777240">
+              <a:tr h="804672">
                 <a:tc>
                   <a:txBody>
                     <a:bodyPr/>
@@ -6373,7 +7400,7 @@
                           <a:ea typeface="Arial" pitchFamily="34" charset="-122"/>
                           <a:cs typeface="Arial" pitchFamily="34" charset="-120"/>
                         </a:rPr>
-                        <a:t>Ruta 0.0.0.0/0 → IGW</a:t>
+                        <a:t>Tabla de rutas con 0.0.0.0/0 → IGW</a:t>
                       </a:r>
                       <a:endParaRPr lang="en-US" sz="1400" dirty="0">
                         <a:latin typeface="Arial" charset="0"/>
@@ -6441,7 +7468,7 @@
                           <a:ea typeface="Arial" pitchFamily="34" charset="-122"/>
                           <a:cs typeface="Arial" pitchFamily="34" charset="-120"/>
                         </a:rPr>
-                        <a:t>Le dice a la subred «el tráfico externo sale por aquí»</a:t>
+                        <a:t>«El tráfico externo sale por aquí»</a:t>
                       </a:r>
                       <a:endParaRPr lang="en-US" sz="1400" dirty="0">
                         <a:latin typeface="Arial" charset="0"/>
@@ -6566,7 +7593,7 @@
                   </a:ext>
                 </a:extLst>
               </a:tr>
-              <a:tr h="777240">
+              <a:tr h="804672">
                 <a:tc>
                   <a:txBody>
                     <a:bodyPr/>
@@ -6584,7 +7611,7 @@
                           <a:ea typeface="Arial" pitchFamily="34" charset="-122"/>
                           <a:cs typeface="Arial" pitchFamily="34" charset="-120"/>
                         </a:rPr>
-                        <a:t>Tabla sin esa entrada</a:t>
+                        <a:t>Tabla de rutas sin esa entrada</a:t>
                       </a:r>
                       <a:endParaRPr lang="en-US" sz="1400" dirty="0">
                         <a:latin typeface="Arial" charset="0"/>
@@ -6781,6 +7808,1108 @@
           </a:graphicData>
         </a:graphic>
       </p:graphicFrame>
+    </p:spTree>
+  </p:cSld>
+  <p:clrMapOvr>
+    <a:masterClrMapping/>
+  </p:clrMapOvr>
+</p:sld>
+</file>
+
+<file path=ppt/slides/slide8.xml><?xml version="1.0" encoding="utf-8"?>
+<p:sld xmlns:a="http://schemas.openxmlformats.org/drawingml/2006/main" xmlns:r="http://schemas.openxmlformats.org/officeDocument/2006/relationships" xmlns:p="http://schemas.openxmlformats.org/presentationml/2006/main">
+  <p:cSld name="Slide 8">
+    <p:spTree>
+      <p:nvGrpSpPr>
+        <p:cNvPr id="1" name=""/>
+        <p:cNvGrpSpPr/>
+        <p:nvPr/>
+      </p:nvGrpSpPr>
+      <p:grpSpPr>
+        <a:xfrm>
+          <a:off x="0" y="0"/>
+          <a:ext cx="0" cy="0"/>
+          <a:chOff x="0" y="0"/>
+          <a:chExt cx="0" cy="0"/>
+        </a:xfrm>
+      </p:grpSpPr>
+      <p:sp>
+        <p:nvSpPr>
+          <p:cNvPr id="2" name="Shape 0"/>
+          <p:cNvSpPr/>
+          <p:nvPr/>
+        </p:nvSpPr>
+        <p:spPr>
+          <a:xfrm>
+            <a:off x="0" y="0"/>
+            <a:ext cx="12188952" cy="777240"/>
+          </a:xfrm>
+          <a:prstGeom prst="rect">
+            <a:avLst/>
+          </a:prstGeom>
+          <a:solidFill>
+            <a:srgbClr val="1A237E"/>
+          </a:solidFill>
+          <a:ln w="12700">
+            <a:solidFill>
+              <a:srgbClr val="1A237E"/>
+            </a:solidFill>
+            <a:prstDash val="solid"/>
+          </a:ln>
+        </p:spPr>
+        <p:txBody>
+          <a:bodyPr/>
+          <a:lstStyle/>
+          <a:p>
+            <a:endParaRPr lang="es-ES"/>
+          </a:p>
+        </p:txBody>
+      </p:sp>
+      <p:sp>
+        <p:nvSpPr>
+          <p:cNvPr id="3" name="Text 1"/>
+          <p:cNvSpPr/>
+          <p:nvPr/>
+        </p:nvSpPr>
+        <p:spPr>
+          <a:xfrm>
+            <a:off x="365760" y="0"/>
+            <a:ext cx="11457432" cy="777240"/>
+          </a:xfrm>
+          <a:prstGeom prst="rect">
+            <a:avLst/>
+          </a:prstGeom>
+          <a:noFill/>
+          <a:ln/>
+        </p:spPr>
+        <p:txBody>
+          <a:bodyPr wrap="square" rtlCol="0" anchor="ctr"/>
+          <a:lstStyle/>
+          <a:p>
+            <a:pPr marL="0" indent="0">
+              <a:buNone/>
+            </a:pPr>
+            <a:r>
+              <a:rPr lang="en-US" sz="2400" b="1" dirty="0">
+                <a:solidFill>
+                  <a:srgbClr val="FFFFFF"/>
+                </a:solidFill>
+                <a:latin typeface="Arial" pitchFamily="34" charset="0"/>
+                <a:ea typeface="Arial" pitchFamily="34" charset="-122"/>
+                <a:cs typeface="Arial" pitchFamily="34" charset="-120"/>
+              </a:rPr>
+              <a:t>El error más común de la sesión de hoy</a:t>
+            </a:r>
+            <a:endParaRPr lang="en-US" sz="2400" dirty="0"/>
+          </a:p>
+        </p:txBody>
+      </p:sp>
+      <p:sp>
+        <p:nvSpPr>
+          <p:cNvPr id="4" name="Text 2"/>
+          <p:cNvSpPr/>
+          <p:nvPr/>
+        </p:nvSpPr>
+        <p:spPr>
+          <a:xfrm>
+            <a:off x="548640" y="6473952"/>
+            <a:ext cx="11091672" cy="292608"/>
+          </a:xfrm>
+          <a:prstGeom prst="rect">
+            <a:avLst/>
+          </a:prstGeom>
+          <a:noFill/>
+          <a:ln/>
+        </p:spPr>
+        <p:txBody>
+          <a:bodyPr wrap="square" rtlCol="0" anchor="ctr"/>
+          <a:lstStyle/>
+          <a:p>
+            <a:pPr marL="0" indent="0" algn="r">
+              <a:buNone/>
+            </a:pPr>
+            <a:r>
+              <a:rPr lang="en-US" sz="1100" dirty="0">
+                <a:solidFill>
+                  <a:srgbClr val="757575"/>
+                </a:solidFill>
+                <a:latin typeface="Arial" pitchFamily="34" charset="0"/>
+                <a:ea typeface="Arial" pitchFamily="34" charset="-122"/>
+                <a:cs typeface="Arial" pitchFamily="34" charset="-120"/>
+              </a:rPr>
+              <a:t>Introducción a la Nube Pública — Tema 2: Diseño de la red virtual</a:t>
+            </a:r>
+            <a:endParaRPr lang="en-US" sz="1100" dirty="0"/>
+          </a:p>
+        </p:txBody>
+      </p:sp>
+      <p:sp>
+        <p:nvSpPr>
+          <p:cNvPr id="5" name="Shape 3"/>
+          <p:cNvSpPr/>
+          <p:nvPr/>
+        </p:nvSpPr>
+        <p:spPr>
+          <a:xfrm>
+            <a:off x="548640" y="1188720"/>
+            <a:ext cx="11091672" cy="1691640"/>
+          </a:xfrm>
+          <a:prstGeom prst="roundRect">
+            <a:avLst/>
+          </a:prstGeom>
+          <a:solidFill>
+            <a:srgbClr val="FFF8E1"/>
+          </a:solidFill>
+          <a:ln w="28575">
+            <a:solidFill>
+              <a:srgbClr val="FFA000"/>
+            </a:solidFill>
+            <a:prstDash val="solid"/>
+          </a:ln>
+        </p:spPr>
+        <p:txBody>
+          <a:bodyPr/>
+          <a:lstStyle/>
+          <a:p>
+            <a:endParaRPr lang="es-ES"/>
+          </a:p>
+        </p:txBody>
+      </p:sp>
+      <p:sp>
+        <p:nvSpPr>
+          <p:cNvPr id="6" name="Text 4"/>
+          <p:cNvSpPr/>
+          <p:nvPr/>
+        </p:nvSpPr>
+        <p:spPr>
+          <a:xfrm>
+            <a:off x="822960" y="1298448"/>
+            <a:ext cx="10543032" cy="1472184"/>
+          </a:xfrm>
+          <a:prstGeom prst="rect">
+            <a:avLst/>
+          </a:prstGeom>
+          <a:noFill/>
+          <a:ln/>
+        </p:spPr>
+        <p:txBody>
+          <a:bodyPr wrap="square" rtlCol="0" anchor="t"/>
+          <a:lstStyle/>
+          <a:p>
+            <a:pPr marL="0" indent="0">
+              <a:buNone/>
+            </a:pPr>
+            <a:r>
+              <a:rPr lang="en-US" sz="2000" b="1" dirty="0">
+                <a:solidFill>
+                  <a:srgbClr val="1A237E"/>
+                </a:solidFill>
+                <a:latin typeface="Arial" pitchFamily="34" charset="0"/>
+                <a:ea typeface="Arial" pitchFamily="34" charset="-122"/>
+                <a:cs typeface="Arial" pitchFamily="34" charset="-120"/>
+              </a:rPr>
+              <a:t>No es pública «porque tú la llamaste así»
+</a:t>
+            </a:r>
+            <a:endParaRPr lang="en-US" sz="2000" dirty="0"/>
+          </a:p>
+          <a:p>
+            <a:pPr marL="0" indent="0">
+              <a:buNone/>
+            </a:pPr>
+            <a:r>
+              <a:rPr lang="en-US" sz="1900" dirty="0">
+                <a:solidFill>
+                  <a:srgbClr val="212121"/>
+                </a:solidFill>
+                <a:latin typeface="Arial" pitchFamily="34" charset="0"/>
+                <a:ea typeface="Arial" pitchFamily="34" charset="-122"/>
+                <a:cs typeface="Arial" pitchFamily="34" charset="-120"/>
+              </a:rPr>
+              <a:t>Es pública porque su tabla de rutas apunta a la pasarela. Es habitual crear una instancia, asignarle una IP pública y esperar que funcione — y que no responda porque la subred sigue apuntando a ninguna parte. Lo diagnosticarás en la Actividad 2.2.</a:t>
+            </a:r>
+            <a:endParaRPr lang="en-US" sz="2000" dirty="0"/>
+          </a:p>
+        </p:txBody>
+      </p:sp>
+      <p:sp>
+        <p:nvSpPr>
+          <p:cNvPr id="7" name="Shape 5"/>
+          <p:cNvSpPr/>
+          <p:nvPr/>
+        </p:nvSpPr>
+        <p:spPr>
+          <a:xfrm>
+            <a:off x="548640" y="3108960"/>
+            <a:ext cx="11091672" cy="1828800"/>
+          </a:xfrm>
+          <a:prstGeom prst="roundRect">
+            <a:avLst/>
+          </a:prstGeom>
+          <a:solidFill>
+            <a:srgbClr val="E8EAF6"/>
+          </a:solidFill>
+          <a:ln w="15875">
+            <a:solidFill>
+              <a:srgbClr val="3949AB"/>
+            </a:solidFill>
+            <a:prstDash val="solid"/>
+          </a:ln>
+        </p:spPr>
+        <p:txBody>
+          <a:bodyPr/>
+          <a:lstStyle/>
+          <a:p>
+            <a:endParaRPr lang="es-ES"/>
+          </a:p>
+        </p:txBody>
+      </p:sp>
+      <p:sp>
+        <p:nvSpPr>
+          <p:cNvPr id="8" name="Text 6"/>
+          <p:cNvSpPr/>
+          <p:nvPr/>
+        </p:nvSpPr>
+        <p:spPr>
+          <a:xfrm>
+            <a:off x="731520" y="3182112"/>
+            <a:ext cx="10725912" cy="548640"/>
+          </a:xfrm>
+          <a:prstGeom prst="rect">
+            <a:avLst/>
+          </a:prstGeom>
+          <a:noFill/>
+          <a:ln/>
+        </p:spPr>
+        <p:txBody>
+          <a:bodyPr wrap="square" rtlCol="0" anchor="ctr"/>
+          <a:lstStyle/>
+          <a:p>
+            <a:pPr marL="0" indent="0">
+              <a:buNone/>
+            </a:pPr>
+            <a:r>
+              <a:rPr lang="en-US" sz="1900" b="1" dirty="0">
+                <a:solidFill>
+                  <a:srgbClr val="1A237E"/>
+                </a:solidFill>
+                <a:latin typeface="Arial" pitchFamily="34" charset="0"/>
+                <a:ea typeface="Arial" pitchFamily="34" charset="-122"/>
+                <a:cs typeface="Arial" pitchFamily="34" charset="-120"/>
+              </a:rPr>
+              <a:t>La ruta no es la única pieza</a:t>
+            </a:r>
+            <a:endParaRPr lang="en-US" sz="1900" dirty="0"/>
+          </a:p>
+        </p:txBody>
+      </p:sp>
+      <p:sp>
+        <p:nvSpPr>
+          <p:cNvPr id="9" name="Text 7"/>
+          <p:cNvSpPr/>
+          <p:nvPr/>
+        </p:nvSpPr>
+        <p:spPr>
+          <a:xfrm>
+            <a:off x="731520" y="3730752"/>
+            <a:ext cx="10725912" cy="1133856"/>
+          </a:xfrm>
+          <a:prstGeom prst="rect">
+            <a:avLst/>
+          </a:prstGeom>
+          <a:noFill/>
+          <a:ln/>
+        </p:spPr>
+        <p:txBody>
+          <a:bodyPr wrap="square" rtlCol="0" anchor="t"/>
+          <a:lstStyle/>
+          <a:p>
+            <a:pPr marL="0" indent="0">
+              <a:buNone/>
+            </a:pPr>
+            <a:r>
+              <a:rPr lang="en-US" sz="1600" dirty="0">
+                <a:solidFill>
+                  <a:srgbClr val="212121"/>
+                </a:solidFill>
+                <a:latin typeface="Arial" pitchFamily="34" charset="0"/>
+                <a:ea typeface="Arial" pitchFamily="34" charset="-122"/>
+                <a:cs typeface="Arial" pitchFamily="34" charset="-120"/>
+              </a:rPr>
+              <a:t>La próxima sesión añades los grupos de seguridad — un portero que decide quién entra aunque la puerta (la ruta) esté abierta. «No me llega tráfico» tiene más de una causa posible: la ruta, o quién tiene permiso para pasar por ella.</a:t>
+            </a:r>
+            <a:endParaRPr lang="en-US" sz="1600" dirty="0"/>
+          </a:p>
+        </p:txBody>
+      </p:sp>
+    </p:spTree>
+  </p:cSld>
+  <p:clrMapOvr>
+    <a:masterClrMapping/>
+  </p:clrMapOvr>
+</p:sld>
+</file>
+
+<file path=ppt/slides/slide9.xml><?xml version="1.0" encoding="utf-8"?>
+<p:sld xmlns:a="http://schemas.openxmlformats.org/drawingml/2006/main" xmlns:r="http://schemas.openxmlformats.org/officeDocument/2006/relationships" xmlns:p="http://schemas.openxmlformats.org/presentationml/2006/main">
+  <p:cSld name="Slide 9">
+    <p:spTree>
+      <p:nvGrpSpPr>
+        <p:cNvPr id="1" name=""/>
+        <p:cNvGrpSpPr/>
+        <p:nvPr/>
+      </p:nvGrpSpPr>
+      <p:grpSpPr>
+        <a:xfrm>
+          <a:off x="0" y="0"/>
+          <a:ext cx="0" cy="0"/>
+          <a:chOff x="0" y="0"/>
+          <a:chExt cx="0" cy="0"/>
+        </a:xfrm>
+      </p:grpSpPr>
+      <p:sp>
+        <p:nvSpPr>
+          <p:cNvPr id="2" name="Shape 0"/>
+          <p:cNvSpPr/>
+          <p:nvPr/>
+        </p:nvSpPr>
+        <p:spPr>
+          <a:xfrm>
+            <a:off x="0" y="0"/>
+            <a:ext cx="12188952" cy="777240"/>
+          </a:xfrm>
+          <a:prstGeom prst="rect">
+            <a:avLst/>
+          </a:prstGeom>
+          <a:solidFill>
+            <a:srgbClr val="1A237E"/>
+          </a:solidFill>
+          <a:ln w="12700">
+            <a:solidFill>
+              <a:srgbClr val="1A237E"/>
+            </a:solidFill>
+            <a:prstDash val="solid"/>
+          </a:ln>
+        </p:spPr>
+        <p:txBody>
+          <a:bodyPr/>
+          <a:lstStyle/>
+          <a:p>
+            <a:endParaRPr lang="es-ES"/>
+          </a:p>
+        </p:txBody>
+      </p:sp>
+      <p:sp>
+        <p:nvSpPr>
+          <p:cNvPr id="3" name="Text 1"/>
+          <p:cNvSpPr/>
+          <p:nvPr/>
+        </p:nvSpPr>
+        <p:spPr>
+          <a:xfrm>
+            <a:off x="365760" y="0"/>
+            <a:ext cx="11457432" cy="777240"/>
+          </a:xfrm>
+          <a:prstGeom prst="rect">
+            <a:avLst/>
+          </a:prstGeom>
+          <a:noFill/>
+          <a:ln/>
+        </p:spPr>
+        <p:txBody>
+          <a:bodyPr wrap="square" rtlCol="0" anchor="ctr"/>
+          <a:lstStyle/>
+          <a:p>
+            <a:pPr marL="0" indent="0">
+              <a:buNone/>
+            </a:pPr>
+            <a:r>
+              <a:rPr lang="en-US" sz="2400" b="1" dirty="0">
+                <a:solidFill>
+                  <a:srgbClr val="FFFFFF"/>
+                </a:solidFill>
+                <a:latin typeface="Arial" pitchFamily="34" charset="0"/>
+                <a:ea typeface="Arial" pitchFamily="34" charset="-122"/>
+                <a:cs typeface="Arial" pitchFamily="34" charset="-120"/>
+              </a:rPr>
+              <a:t>Por qué la base de datos nunca vive en pública</a:t>
+            </a:r>
+            <a:endParaRPr lang="en-US" sz="2400" dirty="0"/>
+          </a:p>
+        </p:txBody>
+      </p:sp>
+      <p:sp>
+        <p:nvSpPr>
+          <p:cNvPr id="4" name="Text 2"/>
+          <p:cNvSpPr/>
+          <p:nvPr/>
+        </p:nvSpPr>
+        <p:spPr>
+          <a:xfrm>
+            <a:off x="548640" y="6473952"/>
+            <a:ext cx="11091672" cy="292608"/>
+          </a:xfrm>
+          <a:prstGeom prst="rect">
+            <a:avLst/>
+          </a:prstGeom>
+          <a:noFill/>
+          <a:ln/>
+        </p:spPr>
+        <p:txBody>
+          <a:bodyPr wrap="square" rtlCol="0" anchor="ctr"/>
+          <a:lstStyle/>
+          <a:p>
+            <a:pPr marL="0" indent="0" algn="r">
+              <a:buNone/>
+            </a:pPr>
+            <a:r>
+              <a:rPr lang="en-US" sz="1100" dirty="0">
+                <a:solidFill>
+                  <a:srgbClr val="757575"/>
+                </a:solidFill>
+                <a:latin typeface="Arial" pitchFamily="34" charset="0"/>
+                <a:ea typeface="Arial" pitchFamily="34" charset="-122"/>
+                <a:cs typeface="Arial" pitchFamily="34" charset="-120"/>
+              </a:rPr>
+              <a:t>Introducción a la Nube Pública — Tema 2: Diseño de la red virtual</a:t>
+            </a:r>
+            <a:endParaRPr lang="en-US" sz="1100" dirty="0"/>
+          </a:p>
+        </p:txBody>
+      </p:sp>
+      <p:sp>
+        <p:nvSpPr>
+          <p:cNvPr id="5" name="Shape 3"/>
+          <p:cNvSpPr/>
+          <p:nvPr/>
+        </p:nvSpPr>
+        <p:spPr>
+          <a:xfrm>
+            <a:off x="548640" y="1143000"/>
+            <a:ext cx="11091672" cy="914400"/>
+          </a:xfrm>
+          <a:prstGeom prst="roundRect">
+            <a:avLst/>
+          </a:prstGeom>
+          <a:solidFill>
+            <a:srgbClr val="FFF8E1"/>
+          </a:solidFill>
+          <a:ln w="19050">
+            <a:solidFill>
+              <a:srgbClr val="FFA000"/>
+            </a:solidFill>
+            <a:prstDash val="solid"/>
+          </a:ln>
+        </p:spPr>
+        <p:txBody>
+          <a:bodyPr/>
+          <a:lstStyle/>
+          <a:p>
+            <a:endParaRPr lang="es-ES"/>
+          </a:p>
+        </p:txBody>
+      </p:sp>
+      <p:sp>
+        <p:nvSpPr>
+          <p:cNvPr id="6" name="Text 4"/>
+          <p:cNvSpPr/>
+          <p:nvPr/>
+        </p:nvSpPr>
+        <p:spPr>
+          <a:xfrm>
+            <a:off x="822960" y="1234440"/>
+            <a:ext cx="10543032" cy="731520"/>
+          </a:xfrm>
+          <a:prstGeom prst="rect">
+            <a:avLst/>
+          </a:prstGeom>
+          <a:noFill/>
+          <a:ln/>
+        </p:spPr>
+        <p:txBody>
+          <a:bodyPr wrap="square" rtlCol="0" anchor="ctr"/>
+          <a:lstStyle/>
+          <a:p>
+            <a:pPr marL="0" indent="0">
+              <a:buNone/>
+            </a:pPr>
+            <a:r>
+              <a:rPr lang="en-US" sz="1700" dirty="0">
+                <a:solidFill>
+                  <a:srgbClr val="212121"/>
+                </a:solidFill>
+                <a:latin typeface="Arial" pitchFamily="34" charset="0"/>
+                <a:ea typeface="Arial" pitchFamily="34" charset="-122"/>
+                <a:cs typeface="Arial" pitchFamily="34" charset="-120"/>
+              </a:rPr>
+              <a:t>La configuración de acceso a tus datos es responsabilidad tuya. Si algo no necesita que internet lo alcance directamente, no le des un camino para que internet lo alcance.</a:t>
+            </a:r>
+            <a:endParaRPr lang="en-US" sz="1700" dirty="0"/>
+          </a:p>
+        </p:txBody>
+      </p:sp>
+      <p:sp>
+        <p:nvSpPr>
+          <p:cNvPr id="7" name="Shape 5"/>
+          <p:cNvSpPr/>
+          <p:nvPr/>
+        </p:nvSpPr>
+        <p:spPr>
+          <a:xfrm>
+            <a:off x="548640" y="2377440"/>
+            <a:ext cx="2464308" cy="1280160"/>
+          </a:xfrm>
+          <a:prstGeom prst="roundRect">
+            <a:avLst/>
+          </a:prstGeom>
+          <a:solidFill>
+            <a:srgbClr val="E8EAF6"/>
+          </a:solidFill>
+          <a:ln w="15875">
+            <a:solidFill>
+              <a:srgbClr val="3949AB"/>
+            </a:solidFill>
+            <a:prstDash val="solid"/>
+          </a:ln>
+        </p:spPr>
+        <p:txBody>
+          <a:bodyPr/>
+          <a:lstStyle/>
+          <a:p>
+            <a:endParaRPr lang="es-ES"/>
+          </a:p>
+        </p:txBody>
+      </p:sp>
+      <p:sp>
+        <p:nvSpPr>
+          <p:cNvPr id="8" name="Text 6"/>
+          <p:cNvSpPr/>
+          <p:nvPr/>
+        </p:nvSpPr>
+        <p:spPr>
+          <a:xfrm>
+            <a:off x="594360" y="2423160"/>
+            <a:ext cx="2372868" cy="1188720"/>
+          </a:xfrm>
+          <a:prstGeom prst="rect">
+            <a:avLst/>
+          </a:prstGeom>
+          <a:noFill/>
+          <a:ln/>
+        </p:spPr>
+        <p:txBody>
+          <a:bodyPr wrap="square" rtlCol="0" anchor="ctr"/>
+          <a:lstStyle/>
+          <a:p>
+            <a:pPr marL="0" indent="0" algn="ctr">
+              <a:buNone/>
+            </a:pPr>
+            <a:r>
+              <a:rPr lang="en-US" sz="1600" dirty="0">
+                <a:solidFill>
+                  <a:srgbClr val="212121"/>
+                </a:solidFill>
+                <a:latin typeface="Arial" pitchFamily="34" charset="0"/>
+                <a:ea typeface="Arial" pitchFamily="34" charset="-122"/>
+                <a:cs typeface="Arial" pitchFamily="34" charset="-120"/>
+              </a:rPr>
+              <a:t>🌍 Internet</a:t>
+            </a:r>
+            <a:endParaRPr lang="en-US" sz="1600" dirty="0"/>
+          </a:p>
+        </p:txBody>
+      </p:sp>
+      <p:sp>
+        <p:nvSpPr>
+          <p:cNvPr id="9" name="Text 7"/>
+          <p:cNvSpPr/>
+          <p:nvPr/>
+        </p:nvSpPr>
+        <p:spPr>
+          <a:xfrm>
+            <a:off x="2967228" y="2377440"/>
+            <a:ext cx="502920" cy="1280160"/>
+          </a:xfrm>
+          <a:prstGeom prst="rect">
+            <a:avLst/>
+          </a:prstGeom>
+          <a:noFill/>
+          <a:ln/>
+        </p:spPr>
+        <p:txBody>
+          <a:bodyPr wrap="square" rtlCol="0" anchor="ctr"/>
+          <a:lstStyle/>
+          <a:p>
+            <a:pPr marL="0" indent="0" algn="ctr">
+              <a:buNone/>
+            </a:pPr>
+            <a:r>
+              <a:rPr lang="en-US" sz="2200" b="1" dirty="0">
+                <a:solidFill>
+                  <a:srgbClr val="3949AB"/>
+                </a:solidFill>
+                <a:latin typeface="Arial" pitchFamily="34" charset="0"/>
+                <a:ea typeface="Arial" pitchFamily="34" charset="-122"/>
+                <a:cs typeface="Arial" pitchFamily="34" charset="-120"/>
+              </a:rPr>
+              <a:t>→</a:t>
+            </a:r>
+            <a:endParaRPr lang="en-US" sz="2200" dirty="0"/>
+          </a:p>
+        </p:txBody>
+      </p:sp>
+      <p:sp>
+        <p:nvSpPr>
+          <p:cNvPr id="10" name="Shape 8"/>
+          <p:cNvSpPr/>
+          <p:nvPr/>
+        </p:nvSpPr>
+        <p:spPr>
+          <a:xfrm>
+            <a:off x="3424428" y="2377440"/>
+            <a:ext cx="2464308" cy="1280160"/>
+          </a:xfrm>
+          <a:prstGeom prst="roundRect">
+            <a:avLst/>
+          </a:prstGeom>
+          <a:solidFill>
+            <a:srgbClr val="E8EAF6"/>
+          </a:solidFill>
+          <a:ln w="15875">
+            <a:solidFill>
+              <a:srgbClr val="3949AB"/>
+            </a:solidFill>
+            <a:prstDash val="solid"/>
+          </a:ln>
+        </p:spPr>
+        <p:txBody>
+          <a:bodyPr/>
+          <a:lstStyle/>
+          <a:p>
+            <a:endParaRPr lang="es-ES"/>
+          </a:p>
+        </p:txBody>
+      </p:sp>
+      <p:sp>
+        <p:nvSpPr>
+          <p:cNvPr id="11" name="Text 9"/>
+          <p:cNvSpPr/>
+          <p:nvPr/>
+        </p:nvSpPr>
+        <p:spPr>
+          <a:xfrm>
+            <a:off x="3470148" y="2423160"/>
+            <a:ext cx="2372868" cy="1188720"/>
+          </a:xfrm>
+          <a:prstGeom prst="rect">
+            <a:avLst/>
+          </a:prstGeom>
+          <a:noFill/>
+          <a:ln/>
+        </p:spPr>
+        <p:txBody>
+          <a:bodyPr wrap="square" rtlCol="0" anchor="ctr"/>
+          <a:lstStyle/>
+          <a:p>
+            <a:pPr marL="0" indent="0" algn="ctr">
+              <a:buNone/>
+            </a:pPr>
+            <a:r>
+              <a:rPr lang="en-US" sz="1600" dirty="0">
+                <a:solidFill>
+                  <a:srgbClr val="212121"/>
+                </a:solidFill>
+                <a:latin typeface="Arial" pitchFamily="34" charset="0"/>
+                <a:ea typeface="Arial" pitchFamily="34" charset="-122"/>
+                <a:cs typeface="Arial" pitchFamily="34" charset="-120"/>
+              </a:rPr>
+              <a:t>🌐 Front</a:t>
+            </a:r>
+            <a:endParaRPr lang="en-US" sz="1600" dirty="0"/>
+          </a:p>
+          <a:p>
+            <a:pPr marL="0" indent="0" algn="ctr">
+              <a:buNone/>
+            </a:pPr>
+            <a:r>
+              <a:rPr lang="en-US" sz="1600" dirty="0">
+                <a:solidFill>
+                  <a:srgbClr val="212121"/>
+                </a:solidFill>
+                <a:latin typeface="Arial" pitchFamily="34" charset="0"/>
+                <a:ea typeface="Arial" pitchFamily="34" charset="-122"/>
+                <a:cs typeface="Arial" pitchFamily="34" charset="-120"/>
+              </a:rPr>
+              <a:t>subred pública</a:t>
+            </a:r>
+            <a:endParaRPr lang="en-US" sz="1600" dirty="0"/>
+          </a:p>
+        </p:txBody>
+      </p:sp>
+      <p:sp>
+        <p:nvSpPr>
+          <p:cNvPr id="12" name="Text 10"/>
+          <p:cNvSpPr/>
+          <p:nvPr/>
+        </p:nvSpPr>
+        <p:spPr>
+          <a:xfrm>
+            <a:off x="5843016" y="2377440"/>
+            <a:ext cx="502920" cy="1280160"/>
+          </a:xfrm>
+          <a:prstGeom prst="rect">
+            <a:avLst/>
+          </a:prstGeom>
+          <a:noFill/>
+          <a:ln/>
+        </p:spPr>
+        <p:txBody>
+          <a:bodyPr wrap="square" rtlCol="0" anchor="ctr"/>
+          <a:lstStyle/>
+          <a:p>
+            <a:pPr marL="0" indent="0" algn="ctr">
+              <a:buNone/>
+            </a:pPr>
+            <a:r>
+              <a:rPr lang="en-US" sz="2200" b="1" dirty="0">
+                <a:solidFill>
+                  <a:srgbClr val="3949AB"/>
+                </a:solidFill>
+                <a:latin typeface="Arial" pitchFamily="34" charset="0"/>
+                <a:ea typeface="Arial" pitchFamily="34" charset="-122"/>
+                <a:cs typeface="Arial" pitchFamily="34" charset="-120"/>
+              </a:rPr>
+              <a:t>→</a:t>
+            </a:r>
+            <a:endParaRPr lang="en-US" sz="2200" dirty="0"/>
+          </a:p>
+        </p:txBody>
+      </p:sp>
+      <p:sp>
+        <p:nvSpPr>
+          <p:cNvPr id="13" name="Shape 11"/>
+          <p:cNvSpPr/>
+          <p:nvPr/>
+        </p:nvSpPr>
+        <p:spPr>
+          <a:xfrm>
+            <a:off x="6300216" y="2377440"/>
+            <a:ext cx="2464308" cy="1280160"/>
+          </a:xfrm>
+          <a:prstGeom prst="roundRect">
+            <a:avLst/>
+          </a:prstGeom>
+          <a:solidFill>
+            <a:srgbClr val="E8EAF6"/>
+          </a:solidFill>
+          <a:ln w="15875">
+            <a:solidFill>
+              <a:srgbClr val="3949AB"/>
+            </a:solidFill>
+            <a:prstDash val="solid"/>
+          </a:ln>
+        </p:spPr>
+        <p:txBody>
+          <a:bodyPr/>
+          <a:lstStyle/>
+          <a:p>
+            <a:endParaRPr lang="es-ES"/>
+          </a:p>
+        </p:txBody>
+      </p:sp>
+      <p:sp>
+        <p:nvSpPr>
+          <p:cNvPr id="14" name="Text 12"/>
+          <p:cNvSpPr/>
+          <p:nvPr/>
+        </p:nvSpPr>
+        <p:spPr>
+          <a:xfrm>
+            <a:off x="6345936" y="2423160"/>
+            <a:ext cx="2372868" cy="1188720"/>
+          </a:xfrm>
+          <a:prstGeom prst="rect">
+            <a:avLst/>
+          </a:prstGeom>
+          <a:noFill/>
+          <a:ln/>
+        </p:spPr>
+        <p:txBody>
+          <a:bodyPr wrap="square" rtlCol="0" anchor="ctr"/>
+          <a:lstStyle/>
+          <a:p>
+            <a:pPr marL="0" indent="0" algn="ctr">
+              <a:buNone/>
+            </a:pPr>
+            <a:r>
+              <a:rPr lang="en-US" sz="1600" dirty="0">
+                <a:solidFill>
+                  <a:srgbClr val="212121"/>
+                </a:solidFill>
+                <a:latin typeface="Arial" pitchFamily="34" charset="0"/>
+                <a:ea typeface="Arial" pitchFamily="34" charset="-122"/>
+                <a:cs typeface="Arial" pitchFamily="34" charset="-120"/>
+              </a:rPr>
+              <a:t>⚙️ Aplicación</a:t>
+            </a:r>
+            <a:endParaRPr lang="en-US" sz="1600" dirty="0"/>
+          </a:p>
+          <a:p>
+            <a:pPr marL="0" indent="0" algn="ctr">
+              <a:buNone/>
+            </a:pPr>
+            <a:r>
+              <a:rPr lang="en-US" sz="1600" dirty="0">
+                <a:solidFill>
+                  <a:srgbClr val="212121"/>
+                </a:solidFill>
+                <a:latin typeface="Arial" pitchFamily="34" charset="0"/>
+                <a:ea typeface="Arial" pitchFamily="34" charset="-122"/>
+                <a:cs typeface="Arial" pitchFamily="34" charset="-120"/>
+              </a:rPr>
+              <a:t>pública o privada</a:t>
+            </a:r>
+            <a:endParaRPr lang="en-US" sz="1600" dirty="0"/>
+          </a:p>
+        </p:txBody>
+      </p:sp>
+      <p:sp>
+        <p:nvSpPr>
+          <p:cNvPr id="15" name="Text 13"/>
+          <p:cNvSpPr/>
+          <p:nvPr/>
+        </p:nvSpPr>
+        <p:spPr>
+          <a:xfrm>
+            <a:off x="8718804" y="2377440"/>
+            <a:ext cx="502920" cy="1280160"/>
+          </a:xfrm>
+          <a:prstGeom prst="rect">
+            <a:avLst/>
+          </a:prstGeom>
+          <a:noFill/>
+          <a:ln/>
+        </p:spPr>
+        <p:txBody>
+          <a:bodyPr wrap="square" rtlCol="0" anchor="ctr"/>
+          <a:lstStyle/>
+          <a:p>
+            <a:pPr marL="0" indent="0" algn="ctr">
+              <a:buNone/>
+            </a:pPr>
+            <a:r>
+              <a:rPr lang="en-US" sz="2200" b="1" dirty="0">
+                <a:solidFill>
+                  <a:srgbClr val="3949AB"/>
+                </a:solidFill>
+                <a:latin typeface="Arial" pitchFamily="34" charset="0"/>
+                <a:ea typeface="Arial" pitchFamily="34" charset="-122"/>
+                <a:cs typeface="Arial" pitchFamily="34" charset="-120"/>
+              </a:rPr>
+              <a:t>→</a:t>
+            </a:r>
+            <a:endParaRPr lang="en-US" sz="2200" dirty="0"/>
+          </a:p>
+        </p:txBody>
+      </p:sp>
+      <p:sp>
+        <p:nvSpPr>
+          <p:cNvPr id="16" name="Shape 14"/>
+          <p:cNvSpPr/>
+          <p:nvPr/>
+        </p:nvSpPr>
+        <p:spPr>
+          <a:xfrm>
+            <a:off x="9176004" y="2377440"/>
+            <a:ext cx="2464308" cy="1280160"/>
+          </a:xfrm>
+          <a:prstGeom prst="roundRect">
+            <a:avLst/>
+          </a:prstGeom>
+          <a:solidFill>
+            <a:srgbClr val="E8EAF6"/>
+          </a:solidFill>
+          <a:ln w="15875">
+            <a:solidFill>
+              <a:srgbClr val="3949AB"/>
+            </a:solidFill>
+            <a:prstDash val="solid"/>
+          </a:ln>
+        </p:spPr>
+        <p:txBody>
+          <a:bodyPr/>
+          <a:lstStyle/>
+          <a:p>
+            <a:endParaRPr lang="es-ES"/>
+          </a:p>
+        </p:txBody>
+      </p:sp>
+      <p:sp>
+        <p:nvSpPr>
+          <p:cNvPr id="17" name="Text 15"/>
+          <p:cNvSpPr/>
+          <p:nvPr/>
+        </p:nvSpPr>
+        <p:spPr>
+          <a:xfrm>
+            <a:off x="9221724" y="2423160"/>
+            <a:ext cx="2372868" cy="1188720"/>
+          </a:xfrm>
+          <a:prstGeom prst="rect">
+            <a:avLst/>
+          </a:prstGeom>
+          <a:noFill/>
+          <a:ln/>
+        </p:spPr>
+        <p:txBody>
+          <a:bodyPr wrap="square" rtlCol="0" anchor="ctr"/>
+          <a:lstStyle/>
+          <a:p>
+            <a:pPr marL="0" indent="0" algn="ctr">
+              <a:buNone/>
+            </a:pPr>
+            <a:r>
+              <a:rPr lang="en-US" sz="1600" dirty="0">
+                <a:solidFill>
+                  <a:srgbClr val="212121"/>
+                </a:solidFill>
+                <a:latin typeface="Arial" pitchFamily="34" charset="0"/>
+                <a:ea typeface="Arial" pitchFamily="34" charset="-122"/>
+                <a:cs typeface="Arial" pitchFamily="34" charset="-120"/>
+              </a:rPr>
+              <a:t>🔒 Base de datos</a:t>
+            </a:r>
+            <a:endParaRPr lang="en-US" sz="1600" dirty="0"/>
+          </a:p>
+          <a:p>
+            <a:pPr marL="0" indent="0" algn="ctr">
+              <a:buNone/>
+            </a:pPr>
+            <a:r>
+              <a:rPr lang="en-US" sz="1600" dirty="0">
+                <a:solidFill>
+                  <a:srgbClr val="212121"/>
+                </a:solidFill>
+                <a:latin typeface="Arial" pitchFamily="34" charset="0"/>
+                <a:ea typeface="Arial" pitchFamily="34" charset="-122"/>
+                <a:cs typeface="Arial" pitchFamily="34" charset="-120"/>
+              </a:rPr>
+              <a:t>subred privada, siempre</a:t>
+            </a:r>
+            <a:endParaRPr lang="en-US" sz="1600" dirty="0"/>
+          </a:p>
+        </p:txBody>
+      </p:sp>
+      <p:sp>
+        <p:nvSpPr>
+          <p:cNvPr id="18" name="Shape 16"/>
+          <p:cNvSpPr/>
+          <p:nvPr/>
+        </p:nvSpPr>
+        <p:spPr>
+          <a:xfrm>
+            <a:off x="548640" y="4023360"/>
+            <a:ext cx="11091672" cy="1737360"/>
+          </a:xfrm>
+          <a:prstGeom prst="roundRect">
+            <a:avLst/>
+          </a:prstGeom>
+          <a:solidFill>
+            <a:srgbClr val="E8EAF6"/>
+          </a:solidFill>
+          <a:ln w="15875">
+            <a:solidFill>
+              <a:srgbClr val="3949AB"/>
+            </a:solidFill>
+            <a:prstDash val="solid"/>
+          </a:ln>
+        </p:spPr>
+        <p:txBody>
+          <a:bodyPr/>
+          <a:lstStyle/>
+          <a:p>
+            <a:endParaRPr lang="es-ES"/>
+          </a:p>
+        </p:txBody>
+      </p:sp>
+      <p:sp>
+        <p:nvSpPr>
+          <p:cNvPr id="19" name="Text 17"/>
+          <p:cNvSpPr/>
+          <p:nvPr/>
+        </p:nvSpPr>
+        <p:spPr>
+          <a:xfrm>
+            <a:off x="731520" y="4096512"/>
+            <a:ext cx="10725912" cy="548640"/>
+          </a:xfrm>
+          <a:prstGeom prst="rect">
+            <a:avLst/>
+          </a:prstGeom>
+          <a:noFill/>
+          <a:ln/>
+        </p:spPr>
+        <p:txBody>
+          <a:bodyPr wrap="square" rtlCol="0" anchor="ctr"/>
+          <a:lstStyle/>
+          <a:p>
+            <a:pPr marL="0" indent="0">
+              <a:buNone/>
+            </a:pPr>
+            <a:r>
+              <a:rPr lang="en-US" sz="2000" b="1" dirty="0">
+                <a:solidFill>
+                  <a:srgbClr val="1A237E"/>
+                </a:solidFill>
+                <a:latin typeface="Arial" pitchFamily="34" charset="0"/>
+                <a:ea typeface="Arial" pitchFamily="34" charset="-122"/>
+                <a:cs typeface="Arial" pitchFamily="34" charset="-120"/>
+              </a:rPr>
+              <a:t>La pieza que menos debe estar expuesta</a:t>
+            </a:r>
+            <a:endParaRPr lang="en-US" sz="2000" dirty="0"/>
+          </a:p>
+        </p:txBody>
+      </p:sp>
+      <p:sp>
+        <p:nvSpPr>
+          <p:cNvPr id="20" name="Text 18"/>
+          <p:cNvSpPr/>
+          <p:nvPr/>
+        </p:nvSpPr>
+        <p:spPr>
+          <a:xfrm>
+            <a:off x="731520" y="4645152"/>
+            <a:ext cx="10725912" cy="1042416"/>
+          </a:xfrm>
+          <a:prstGeom prst="rect">
+            <a:avLst/>
+          </a:prstGeom>
+          <a:noFill/>
+          <a:ln/>
+        </p:spPr>
+        <p:txBody>
+          <a:bodyPr wrap="square" rtlCol="0" anchor="t"/>
+          <a:lstStyle/>
+          <a:p>
+            <a:pPr marL="0" indent="0">
+              <a:buNone/>
+            </a:pPr>
+            <a:r>
+              <a:rPr lang="en-US" sz="1600" dirty="0">
+                <a:solidFill>
+                  <a:srgbClr val="212121"/>
+                </a:solidFill>
+                <a:latin typeface="Arial" pitchFamily="34" charset="0"/>
+                <a:ea typeface="Arial" pitchFamily="34" charset="-122"/>
+                <a:cs typeface="Arial" pitchFamily="34" charset="-120"/>
+              </a:rPr>
+              <a:t>Es la que más daño hace si alguien llega hasta ella sin permiso — por eso va siempre en la subred más protegida, sin excepción, en cualquier arquitectura del módulo.</a:t>
+            </a:r>
+            <a:endParaRPr lang="en-US" sz="1600" dirty="0"/>
+          </a:p>
+        </p:txBody>
+      </p:sp>
     </p:spTree>
   </p:cSld>
   <p:clrMapOvr>
